--- a/skills/dsh-academic-ppt/references/templates/synthesis.pptx
+++ b/skills/dsh-academic-ppt/references/templates/synthesis.pptx
@@ -512,7 +512,7 @@
 内容职责：共同机制；关键差异。
 建议讲述时间只是排练起点，按实际内容调整。
 参考文献（完整题名）
-T1 · Full article title: connecting decision models, experimental evidence and independent validation in crop cultivation · 期刊与卷页（替换） · 2026 · 待替换 · 书目占位，非真实文献</a:t>
+T1 · Full article title: connecting decision models, experimental evidence and independent validation in crop cultivation · 期刊与卷页（替换） · 2026 · 书目占位；图表均为合成示例 · 书目占位，非真实文献</a:t>
             </a:r>
             <a:endParaRPr lang="en-US" dirty="0"/>
           </a:p>
@@ -605,7 +605,7 @@
 内容职责：离线与模拟；受控实验；独立环境验证；真实部署；共同评价对象；外推边界。
 建议讲述时间只是排练起点，按实际内容调整。
 参考文献（完整题名）
-T1 · Full article title: connecting decision models, experimental evidence and independent validation in crop cultivation · 期刊与卷页（替换） · 2026 · 待替换 · 书目占位，非真实文献</a:t>
+T1 · Full article title: connecting decision models, experimental evidence and independent validation in crop cultivation · 期刊与卷页（替换） · 2026 · 书目占位；图表均为合成示例 · 书目占位，非真实文献</a:t>
             </a:r>
             <a:endParaRPr lang="en-US" dirty="0"/>
           </a:p>
@@ -698,7 +698,7 @@
 内容职责：比较维度；不可比条件。
 建议讲述时间只是排练起点，按实际内容调整。
 参考文献（完整题名）
-T1 · Full article title: connecting decision models, experimental evidence and independent validation in crop cultivation · 期刊与卷页（替换） · 2026 · 待替换 · 书目占位，非真实文献</a:t>
+T1 · Full article title: connecting decision models, experimental evidence and independent validation in crop cultivation · 期刊与卷页（替换） · 2026 · 书目占位；图表均为合成示例 · 书目占位，非真实文献</a:t>
             </a:r>
             <a:endParaRPr lang="en-US" dirty="0"/>
           </a:p>
@@ -791,7 +791,7 @@
 内容职责：方法演化；评价演化；仍然缺少的验证。
 建议讲述时间只是排练起点，按实际内容调整。
 参考文献（完整题名）
-T1 · Full article title: connecting decision models, experimental evidence and independent validation in crop cultivation · 期刊与卷页（替换） · 2026 · 待替换 · 书目占位，非真实文献</a:t>
+T1 · Full article title: connecting decision models, experimental evidence and independent validation in crop cultivation · 期刊与卷页（替换） · 2026 · 书目占位；图表均为合成示例 · 书目占位，非真实文献</a:t>
             </a:r>
             <a:endParaRPr lang="en-US" dirty="0"/>
           </a:p>
@@ -883,8 +883,22 @@
 全部文本为填写指引，图表值是合成演示值，不是任何研究结果。使用前替换论文、数据、原图与来源。
 内容职责：一致发现；冲突来源；可区分的解释。
 建议讲述时间只是排练起点，按实际内容调整。
+原图来源：T1
+示例图
+响应曲线；合成演示值
+https://github.com/YuZhou0311/dsh-academic-ppt
+原创排版教学示例 v0.3.0
+MIT; all plotted values are synthetic
+完整原图，无裁切
+原图来源：T1
+示例图
+效应与区间；合成演示值
+https://github.com/YuZhou0311/dsh-academic-ppt
+原创排版教学示例 v0.3.0
+MIT; all plotted values are synthetic
+完整原图，无裁切
 参考文献（完整题名）
-T1 · Full article title: connecting decision models, experimental evidence and independent validation in crop cultivation · 期刊与卷页（替换） · 2026 · 待替换 · 书目占位，非真实文献</a:t>
+T1 · Full article title: connecting decision models, experimental evidence and independent validation in crop cultivation · 期刊与卷页（替换） · 2026 · 书目占位；图表均为合成示例 · 书目占位，非真实文献</a:t>
             </a:r>
             <a:endParaRPr lang="en-US" dirty="0"/>
           </a:p>
@@ -977,7 +991,7 @@
 内容职责：已知证据一；对应研究问题一；已知证据二；对应研究问题二；下一步检验条件。
 建议讲述时间只是排练起点，按实际内容调整。
 参考文献（完整题名）
-T1 · Full article title: connecting decision models, experimental evidence and independent validation in crop cultivation · 期刊与卷页（替换） · 2026 · 待替换 · 书目占位，非真实文献</a:t>
+T1 · Full article title: connecting decision models, experimental evidence and independent validation in crop cultivation · 期刊与卷页（替换） · 2026 · 书目占位；图表均为合成示例 · 书目占位，非真实文献</a:t>
             </a:r>
             <a:endParaRPr lang="en-US" dirty="0"/>
           </a:p>
@@ -1421,14 +1435,14 @@
       </p:sp>
       <p:sp>
         <p:nvSpPr>
-          <p:cNvPr id="4" name="T31/kicker"/>
-          <p:cNvSpPr/>
-          <p:nvPr/>
-        </p:nvSpPr>
-        <p:spPr>
-          <a:xfrm>
-            <a:off x="457200" y="152400"/>
-            <a:ext cx="11277600" cy="190500"/>
+          <p:cNvPr id="4" name="T31/title"/>
+          <p:cNvSpPr/>
+          <p:nvPr/>
+        </p:nvSpPr>
+        <p:spPr>
+          <a:xfrm>
+            <a:off x="457200" y="209550"/>
+            <a:ext cx="11277600" cy="438150"/>
           </a:xfrm>
           <a:prstGeom prst="rect">
             <a:avLst/>
@@ -1442,54 +1456,12 @@
           <a:p>
             <a:pPr algn="l" indent="0" marL="0">
               <a:lnSpc>
-                <a:spcPts val="1320"/>
-              </a:lnSpc>
-              <a:buNone/>
-            </a:pPr>
-            <a:r>
-              <a:rPr lang="zh-CN" altLang="en-US" sz="1200" dirty="0">
-                <a:solidFill>
-                  <a:srgbClr val="515B68"/>
-                </a:solidFill>
-                <a:latin typeface="Noto Sans CJK SC" pitchFamily="34" charset="0"/>
-                <a:ea typeface="Noto Sans CJK SC" pitchFamily="34" charset="-122"/>
-                <a:cs typeface="Noto Sans CJK SC" pitchFamily="34" charset="-120"/>
-              </a:rPr>
-              <a:t>结构模板 / 占位说明与合成数据</a:t>
-            </a:r>
-            <a:endParaRPr lang="zh-CN" sz="1200" dirty="0"/>
-          </a:p>
-        </p:txBody>
-      </p:sp>
-      <p:sp>
-        <p:nvSpPr>
-          <p:cNvPr id="5" name="T31/title"/>
-          <p:cNvSpPr/>
-          <p:nvPr/>
-        </p:nvSpPr>
-        <p:spPr>
-          <a:xfrm>
-            <a:off x="457200" y="381000"/>
-            <a:ext cx="11277600" cy="400050"/>
-          </a:xfrm>
-          <a:prstGeom prst="rect">
-            <a:avLst/>
-          </a:prstGeom>
-          <a:noFill/>
-          <a:ln/>
-        </p:spPr>
-        <p:txBody>
-          <a:bodyPr wrap="none" lIns="0" tIns="0" rIns="0" bIns="0" rtlCol="0" anchor="t"/>
-          <a:lstStyle/>
-          <a:p>
-            <a:pPr algn="l" indent="0" marL="0">
-              <a:lnSpc>
-                <a:spcPts val="2856"/>
-              </a:lnSpc>
-              <a:buNone/>
-            </a:pPr>
-            <a:r>
-              <a:rPr lang="zh-CN" altLang="en-US" sz="2550" b="1" dirty="0">
+                <a:spcPts val="3360"/>
+              </a:lnSpc>
+              <a:buNone/>
+            </a:pPr>
+            <a:r>
+              <a:rPr lang="zh-CN" altLang="en-US" sz="3000" b="1" dirty="0">
                 <a:solidFill>
                   <a:srgbClr val="1C2430"/>
                 </a:solidFill>
@@ -1499,26 +1471,49 @@
               </a:rPr>
               <a:t>多篇方法的接口对应</a:t>
             </a:r>
-            <a:endParaRPr lang="zh-CN" sz="2550" dirty="0"/>
-          </a:p>
-        </p:txBody>
-      </p:sp>
-      <p:sp>
-        <p:nvSpPr>
-          <p:cNvPr id="6" name="T31/header-rule"/>
-          <p:cNvSpPr/>
-          <p:nvPr/>
-        </p:nvSpPr>
-        <p:spPr>
-          <a:xfrm>
-            <a:off x="457200" y="876300"/>
+            <a:endParaRPr lang="zh-CN" sz="3000" dirty="0"/>
+          </a:p>
+        </p:txBody>
+      </p:sp>
+      <p:sp>
+        <p:nvSpPr>
+          <p:cNvPr id="5" name="T31/header-rule"/>
+          <p:cNvSpPr/>
+          <p:nvPr/>
+        </p:nvSpPr>
+        <p:spPr>
+          <a:xfrm>
+            <a:off x="457200" y="752475"/>
             <a:ext cx="11277600" cy="0"/>
           </a:xfrm>
           <a:prstGeom prst="line">
             <a:avLst/>
           </a:prstGeom>
           <a:noFill/>
-          <a:ln w="11430">
+          <a:ln w="10478">
+            <a:solidFill>
+              <a:srgbClr val="BEC8D4"/>
+            </a:solidFill>
+            <a:prstDash val="solid"/>
+          </a:ln>
+        </p:spPr>
+      </p:sp>
+      <p:sp>
+        <p:nvSpPr>
+          <p:cNvPr id="6" name="T31/header-accent"/>
+          <p:cNvSpPr/>
+          <p:nvPr/>
+        </p:nvSpPr>
+        <p:spPr>
+          <a:xfrm>
+            <a:off x="457200" y="752475"/>
+            <a:ext cx="704850" cy="0"/>
+          </a:xfrm>
+          <a:prstGeom prst="line">
+            <a:avLst/>
+          </a:prstGeom>
+          <a:noFill/>
+          <a:ln w="28575">
             <a:solidFill>
               <a:srgbClr val="173C70"/>
             </a:solidFill>
@@ -1534,8 +1529,8 @@
         </p:nvSpPr>
         <p:spPr>
           <a:xfrm>
-            <a:off x="457200" y="1371600"/>
-            <a:ext cx="11277600" cy="2324100"/>
+            <a:off x="457200" y="1187006"/>
+            <a:ext cx="11277600" cy="2413445"/>
           </a:xfrm>
           <a:prstGeom prst="rect">
             <a:avLst/>
@@ -1559,14 +1554,14 @@
         </p:nvSpPr>
         <p:spPr>
           <a:xfrm>
-            <a:off x="466725" y="1381125"/>
+            <a:off x="466725" y="1196531"/>
             <a:ext cx="11258550" cy="381000"/>
           </a:xfrm>
           <a:prstGeom prst="rect">
             <a:avLst/>
           </a:prstGeom>
           <a:solidFill>
-            <a:srgbClr val="EEF3F8"/>
+            <a:srgbClr val="EAF2FA"/>
           </a:solidFill>
           <a:ln w="12700">
             <a:solidFill>
@@ -1586,7 +1581,7 @@
         </p:nvSpPr>
         <p:spPr>
           <a:xfrm>
-            <a:off x="457200" y="1762125"/>
+            <a:off x="457200" y="1577531"/>
             <a:ext cx="11277600" cy="0"/>
           </a:xfrm>
           <a:prstGeom prst="line">
@@ -1609,8 +1604,8 @@
         </p:nvSpPr>
         <p:spPr>
           <a:xfrm>
-            <a:off x="581025" y="1428750"/>
-            <a:ext cx="11029950" cy="295275"/>
+            <a:off x="581025" y="1234631"/>
+            <a:ext cx="11029950" cy="304800"/>
           </a:xfrm>
           <a:prstGeom prst="rect">
             <a:avLst/>
@@ -1624,14 +1619,14 @@
           <a:p>
             <a:pPr algn="l" indent="0" marL="0">
               <a:lnSpc>
-                <a:spcPts val="2070"/>
-              </a:lnSpc>
-              <a:buNone/>
-            </a:pPr>
-            <a:r>
-              <a:rPr lang="zh-CN" altLang="en-US" sz="1800" b="1" dirty="0">
-                <a:solidFill>
-                  <a:srgbClr val="173C70"/>
+                <a:spcPts val="2242"/>
+              </a:lnSpc>
+              <a:buNone/>
+            </a:pPr>
+            <a:r>
+              <a:rPr lang="zh-CN" altLang="en-US" sz="1950" b="1" dirty="0">
+                <a:solidFill>
+                  <a:srgbClr val="235E96"/>
                 </a:solidFill>
                 <a:latin typeface="Noto Sans CJK SC" pitchFamily="34" charset="0"/>
                 <a:ea typeface="Noto Sans CJK SC" pitchFamily="34" charset="-122"/>
@@ -1639,7 +1634,7 @@
               </a:rPr>
               <a:t>在同一接口层级比较</a:t>
             </a:r>
-            <a:endParaRPr lang="zh-CN" sz="1800" dirty="0"/>
+            <a:endParaRPr lang="zh-CN" sz="1950" dirty="0"/>
           </a:p>
         </p:txBody>
       </p:sp>
@@ -1651,7 +1646,7 @@
         </p:nvSpPr>
         <p:spPr>
           <a:xfrm>
-            <a:off x="2762250" y="2695575"/>
+            <a:off x="2762250" y="2561844"/>
             <a:ext cx="723900" cy="0"/>
           </a:xfrm>
           <a:prstGeom prst="line">
@@ -1675,7 +1670,7 @@
         </p:nvSpPr>
         <p:spPr>
           <a:xfrm>
-            <a:off x="5638800" y="2695575"/>
+            <a:off x="5638800" y="2561844"/>
             <a:ext cx="742950" cy="0"/>
           </a:xfrm>
           <a:prstGeom prst="line">
@@ -1699,7 +1694,7 @@
         </p:nvSpPr>
         <p:spPr>
           <a:xfrm>
-            <a:off x="8534400" y="2695575"/>
+            <a:off x="8534400" y="2561844"/>
             <a:ext cx="742950" cy="0"/>
           </a:xfrm>
           <a:prstGeom prst="line">
@@ -1723,14 +1718,14 @@
         </p:nvSpPr>
         <p:spPr>
           <a:xfrm>
-            <a:off x="609600" y="2019300"/>
-            <a:ext cx="2152650" cy="1352550"/>
+            <a:off x="609600" y="1859566"/>
+            <a:ext cx="2152650" cy="1404557"/>
           </a:xfrm>
           <a:prstGeom prst="rect">
             <a:avLst/>
           </a:prstGeom>
           <a:solidFill>
-            <a:srgbClr val="FFFFFF"/>
+            <a:srgbClr val="F0F3F6"/>
           </a:solidFill>
           <a:ln w="11430">
             <a:solidFill>
@@ -1748,7 +1743,7 @@
         </p:nvSpPr>
         <p:spPr>
           <a:xfrm>
-            <a:off x="609600" y="2019300"/>
+            <a:off x="609600" y="1859566"/>
             <a:ext cx="2152650" cy="0"/>
           </a:xfrm>
           <a:prstGeom prst="line">
@@ -1757,7 +1752,7 @@
           <a:noFill/>
           <a:ln w="19050">
             <a:solidFill>
-              <a:srgbClr val="173C70"/>
+              <a:srgbClr val="536A7A"/>
             </a:solidFill>
             <a:prstDash val="solid"/>
           </a:ln>
@@ -1771,7 +1766,7 @@
         </p:nvSpPr>
         <p:spPr>
           <a:xfrm>
-            <a:off x="723900" y="2114550"/>
+            <a:off x="723900" y="1954816"/>
             <a:ext cx="1924050" cy="266700"/>
           </a:xfrm>
           <a:prstGeom prst="rect">
@@ -1793,7 +1788,7 @@
             <a:r>
               <a:rPr lang="zh-CN" altLang="en-US" sz="1800" b="1" dirty="0">
                 <a:solidFill>
-                  <a:srgbClr val="173C70"/>
+                  <a:srgbClr val="536A7A"/>
                 </a:solidFill>
                 <a:latin typeface="Noto Sans CJK SC" pitchFamily="34" charset="0"/>
                 <a:ea typeface="Noto Sans CJK SC" pitchFamily="34" charset="-122"/>
@@ -1813,8 +1808,8 @@
         </p:nvSpPr>
         <p:spPr>
           <a:xfrm>
-            <a:off x="723900" y="2428875"/>
-            <a:ext cx="1924050" cy="857250"/>
+            <a:off x="723900" y="2269141"/>
+            <a:ext cx="1924050" cy="909257"/>
           </a:xfrm>
           <a:prstGeom prst="rect">
             <a:avLst/>
@@ -1841,7 +1836,7 @@
                 <a:ea typeface="Noto Sans CJK SC" pitchFamily="34" charset="-122"/>
                 <a:cs typeface="Noto Sans CJK SC" pitchFamily="34" charset="-120"/>
               </a:rPr>
-              <a:t>填写接口与条件</a:t>
+              <a:t>统一观测与单位</a:t>
             </a:r>
             <a:endParaRPr lang="zh-CN" sz="1650" dirty="0"/>
           </a:p>
@@ -1855,14 +1850,14 @@
         </p:nvSpPr>
         <p:spPr>
           <a:xfrm>
-            <a:off x="3486150" y="2019300"/>
-            <a:ext cx="2152650" cy="1352550"/>
+            <a:off x="3486150" y="1859566"/>
+            <a:ext cx="2152650" cy="1404557"/>
           </a:xfrm>
           <a:prstGeom prst="rect">
             <a:avLst/>
           </a:prstGeom>
           <a:solidFill>
-            <a:srgbClr val="FFFFFF"/>
+            <a:srgbClr val="EAF2FA"/>
           </a:solidFill>
           <a:ln w="11430">
             <a:solidFill>
@@ -1880,7 +1875,7 @@
         </p:nvSpPr>
         <p:spPr>
           <a:xfrm>
-            <a:off x="3486150" y="2019300"/>
+            <a:off x="3486150" y="1859566"/>
             <a:ext cx="2152650" cy="0"/>
           </a:xfrm>
           <a:prstGeom prst="line">
@@ -1889,7 +1884,7 @@
           <a:noFill/>
           <a:ln w="19050">
             <a:solidFill>
-              <a:srgbClr val="173C70"/>
+              <a:srgbClr val="235E96"/>
             </a:solidFill>
             <a:prstDash val="solid"/>
           </a:ln>
@@ -1903,7 +1898,7 @@
         </p:nvSpPr>
         <p:spPr>
           <a:xfrm>
-            <a:off x="3600450" y="2114550"/>
+            <a:off x="3600450" y="1954816"/>
             <a:ext cx="1924050" cy="266700"/>
           </a:xfrm>
           <a:prstGeom prst="rect">
@@ -1925,7 +1920,7 @@
             <a:r>
               <a:rPr lang="zh-CN" altLang="en-US" sz="1800" b="1" dirty="0">
                 <a:solidFill>
-                  <a:srgbClr val="173C70"/>
+                  <a:srgbClr val="235E96"/>
                 </a:solidFill>
                 <a:latin typeface="Noto Sans CJK SC" pitchFamily="34" charset="0"/>
                 <a:ea typeface="Noto Sans CJK SC" pitchFamily="34" charset="-122"/>
@@ -1945,8 +1940,8 @@
         </p:nvSpPr>
         <p:spPr>
           <a:xfrm>
-            <a:off x="3600450" y="2428875"/>
-            <a:ext cx="1924050" cy="857250"/>
+            <a:off x="3600450" y="2269141"/>
+            <a:ext cx="1924050" cy="909257"/>
           </a:xfrm>
           <a:prstGeom prst="rect">
             <a:avLst/>
@@ -1973,7 +1968,7 @@
                 <a:ea typeface="Noto Sans CJK SC" pitchFamily="34" charset="-122"/>
                 <a:cs typeface="Noto Sans CJK SC" pitchFamily="34" charset="-120"/>
               </a:rPr>
-              <a:t>填写接口与条件</a:t>
+              <a:t>新增信息的来源</a:t>
             </a:r>
             <a:endParaRPr lang="zh-CN" sz="1650" dirty="0"/>
           </a:p>
@@ -1987,14 +1982,14 @@
         </p:nvSpPr>
         <p:spPr>
           <a:xfrm>
-            <a:off x="6381750" y="2019300"/>
-            <a:ext cx="2152650" cy="1352550"/>
+            <a:off x="6381750" y="1859566"/>
+            <a:ext cx="2152650" cy="1404557"/>
           </a:xfrm>
           <a:prstGeom prst="rect">
             <a:avLst/>
           </a:prstGeom>
           <a:solidFill>
-            <a:srgbClr val="FFFFFF"/>
+            <a:srgbClr val="EAF2FA"/>
           </a:solidFill>
           <a:ln w="11430">
             <a:solidFill>
@@ -2012,7 +2007,7 @@
         </p:nvSpPr>
         <p:spPr>
           <a:xfrm>
-            <a:off x="6381750" y="2019300"/>
+            <a:off x="6381750" y="1859566"/>
             <a:ext cx="2152650" cy="0"/>
           </a:xfrm>
           <a:prstGeom prst="line">
@@ -2021,7 +2016,7 @@
           <a:noFill/>
           <a:ln w="19050">
             <a:solidFill>
-              <a:srgbClr val="173C70"/>
+              <a:srgbClr val="235E96"/>
             </a:solidFill>
             <a:prstDash val="solid"/>
           </a:ln>
@@ -2035,7 +2030,7 @@
         </p:nvSpPr>
         <p:spPr>
           <a:xfrm>
-            <a:off x="6496050" y="2114550"/>
+            <a:off x="6496050" y="1954816"/>
             <a:ext cx="1924050" cy="266700"/>
           </a:xfrm>
           <a:prstGeom prst="rect">
@@ -2057,7 +2052,7 @@
             <a:r>
               <a:rPr lang="zh-CN" altLang="en-US" sz="1800" b="1" dirty="0">
                 <a:solidFill>
-                  <a:srgbClr val="173C70"/>
+                  <a:srgbClr val="235E96"/>
                 </a:solidFill>
                 <a:latin typeface="Noto Sans CJK SC" pitchFamily="34" charset="0"/>
                 <a:ea typeface="Noto Sans CJK SC" pitchFamily="34" charset="-122"/>
@@ -2077,8 +2072,8 @@
         </p:nvSpPr>
         <p:spPr>
           <a:xfrm>
-            <a:off x="6496050" y="2428875"/>
-            <a:ext cx="1924050" cy="857250"/>
+            <a:off x="6496050" y="2269141"/>
+            <a:ext cx="1924050" cy="909257"/>
           </a:xfrm>
           <a:prstGeom prst="rect">
             <a:avLst/>
@@ -2105,7 +2100,7 @@
                 <a:ea typeface="Noto Sans CJK SC" pitchFamily="34" charset="-122"/>
                 <a:cs typeface="Noto Sans CJK SC" pitchFamily="34" charset="-120"/>
               </a:rPr>
-              <a:t>填写接口与条件</a:t>
+              <a:t>谁选择管理动作</a:t>
             </a:r>
             <a:endParaRPr lang="zh-CN" sz="1650" dirty="0"/>
           </a:p>
@@ -2119,14 +2114,14 @@
         </p:nvSpPr>
         <p:spPr>
           <a:xfrm>
-            <a:off x="9277350" y="2019300"/>
-            <a:ext cx="2305050" cy="1352550"/>
+            <a:off x="9277350" y="1859566"/>
+            <a:ext cx="2305050" cy="1404557"/>
           </a:xfrm>
           <a:prstGeom prst="rect">
             <a:avLst/>
           </a:prstGeom>
           <a:solidFill>
-            <a:srgbClr val="FFFFFF"/>
+            <a:srgbClr val="EAF2FA"/>
           </a:solidFill>
           <a:ln w="11430">
             <a:solidFill>
@@ -2144,7 +2139,7 @@
         </p:nvSpPr>
         <p:spPr>
           <a:xfrm>
-            <a:off x="9277350" y="2019300"/>
+            <a:off x="9277350" y="1859566"/>
             <a:ext cx="2305050" cy="0"/>
           </a:xfrm>
           <a:prstGeom prst="line">
@@ -2153,7 +2148,7 @@
           <a:noFill/>
           <a:ln w="19050">
             <a:solidFill>
-              <a:srgbClr val="173C70"/>
+              <a:srgbClr val="235E96"/>
             </a:solidFill>
             <a:prstDash val="solid"/>
           </a:ln>
@@ -2167,7 +2162,7 @@
         </p:nvSpPr>
         <p:spPr>
           <a:xfrm>
-            <a:off x="9391650" y="2114550"/>
+            <a:off x="9391650" y="1954816"/>
             <a:ext cx="2076450" cy="266700"/>
           </a:xfrm>
           <a:prstGeom prst="rect">
@@ -2189,7 +2184,7 @@
             <a:r>
               <a:rPr lang="zh-CN" altLang="en-US" sz="1800" b="1" dirty="0">
                 <a:solidFill>
-                  <a:srgbClr val="173C70"/>
+                  <a:srgbClr val="235E96"/>
                 </a:solidFill>
                 <a:latin typeface="Noto Sans CJK SC" pitchFamily="34" charset="0"/>
                 <a:ea typeface="Noto Sans CJK SC" pitchFamily="34" charset="-122"/>
@@ -2209,8 +2204,8 @@
         </p:nvSpPr>
         <p:spPr>
           <a:xfrm>
-            <a:off x="9391650" y="2428875"/>
-            <a:ext cx="2076450" cy="857250"/>
+            <a:off x="9391650" y="2269141"/>
+            <a:ext cx="2076450" cy="909257"/>
           </a:xfrm>
           <a:prstGeom prst="rect">
             <a:avLst/>
@@ -2237,7 +2232,7 @@
                 <a:ea typeface="Noto Sans CJK SC" pitchFamily="34" charset="-122"/>
                 <a:cs typeface="Noto Sans CJK SC" pitchFamily="34" charset="-120"/>
               </a:rPr>
-              <a:t>填写接口与条件</a:t>
+              <a:t>如何检验输出</a:t>
             </a:r>
             <a:endParaRPr lang="zh-CN" sz="1650" dirty="0"/>
           </a:p>
@@ -2251,8 +2246,8 @@
         </p:nvSpPr>
         <p:spPr>
           <a:xfrm>
-            <a:off x="457200" y="4152900"/>
-            <a:ext cx="5486400" cy="1866900"/>
+            <a:off x="457200" y="4075271"/>
+            <a:ext cx="5486400" cy="1938719"/>
           </a:xfrm>
           <a:prstGeom prst="rect">
             <a:avLst/>
@@ -2276,14 +2271,14 @@
         </p:nvSpPr>
         <p:spPr>
           <a:xfrm>
-            <a:off x="466725" y="4162425"/>
+            <a:off x="466725" y="4084796"/>
             <a:ext cx="5467350" cy="371475"/>
           </a:xfrm>
           <a:prstGeom prst="rect">
             <a:avLst/>
           </a:prstGeom>
           <a:solidFill>
-            <a:srgbClr val="EEF3F8"/>
+            <a:srgbClr val="EAF2FA"/>
           </a:solidFill>
           <a:ln w="12700">
             <a:solidFill>
@@ -2303,7 +2298,7 @@
         </p:nvSpPr>
         <p:spPr>
           <a:xfrm>
-            <a:off x="457200" y="4533900"/>
+            <a:off x="457200" y="4456271"/>
             <a:ext cx="5486400" cy="0"/>
           </a:xfrm>
           <a:prstGeom prst="line">
@@ -2326,8 +2321,8 @@
         </p:nvSpPr>
         <p:spPr>
           <a:xfrm>
-            <a:off x="581025" y="4210050"/>
-            <a:ext cx="5238750" cy="276225"/>
+            <a:off x="581025" y="4122896"/>
+            <a:ext cx="5238750" cy="295275"/>
           </a:xfrm>
           <a:prstGeom prst="rect">
             <a:avLst/>
@@ -2341,14 +2336,14 @@
           <a:p>
             <a:pPr algn="l" indent="0" marL="0">
               <a:lnSpc>
-                <a:spcPts val="2070"/>
-              </a:lnSpc>
-              <a:buNone/>
-            </a:pPr>
-            <a:r>
-              <a:rPr lang="zh-CN" altLang="en-US" sz="1800" b="1" dirty="0">
-                <a:solidFill>
-                  <a:srgbClr val="173C70"/>
+                <a:spcPts val="2242"/>
+              </a:lnSpc>
+              <a:buNone/>
+            </a:pPr>
+            <a:r>
+              <a:rPr lang="zh-CN" altLang="en-US" sz="1950" b="1" dirty="0">
+                <a:solidFill>
+                  <a:srgbClr val="235E96"/>
                 </a:solidFill>
                 <a:latin typeface="Noto Sans CJK SC" pitchFamily="34" charset="0"/>
                 <a:ea typeface="Noto Sans CJK SC" pitchFamily="34" charset="-122"/>
@@ -2356,7 +2351,7 @@
               </a:rPr>
               <a:t>共同机制</a:t>
             </a:r>
-            <a:endParaRPr lang="zh-CN" sz="1800" dirty="0"/>
+            <a:endParaRPr lang="zh-CN" sz="1950" dirty="0"/>
           </a:p>
         </p:txBody>
       </p:sp>
@@ -2368,8 +2363,8 @@
         </p:nvSpPr>
         <p:spPr>
           <a:xfrm>
-            <a:off x="590550" y="4648200"/>
-            <a:ext cx="5219700" cy="1276350"/>
+            <a:off x="590550" y="4561046"/>
+            <a:ext cx="5219700" cy="1357693"/>
           </a:xfrm>
           <a:prstGeom prst="rect">
             <a:avLst/>
@@ -2383,12 +2378,12 @@
           <a:p>
             <a:pPr algn="l" indent="0" marL="0">
               <a:lnSpc>
-                <a:spcPts val="2139"/>
-              </a:lnSpc>
-              <a:buNone/>
-            </a:pPr>
-            <a:r>
-              <a:rPr lang="zh-CN" altLang="en-US" sz="1725" dirty="0">
+                <a:spcPts val="2232"/>
+              </a:lnSpc>
+              <a:buNone/>
+            </a:pPr>
+            <a:r>
+              <a:rPr lang="zh-CN" altLang="en-US" sz="1800" dirty="0">
                 <a:solidFill>
                   <a:srgbClr val="1C2430"/>
                 </a:solidFill>
@@ -2396,19 +2391,33 @@
                 <a:ea typeface="Noto Sans CJK SC" pitchFamily="34" charset="-122"/>
                 <a:cs typeface="Noto Sans CJK SC" pitchFamily="34" charset="-120"/>
               </a:rPr>
-              <a:t>比较共同输入、动作和反馈的接口</a:t>
-            </a:r>
-            <a:endParaRPr lang="zh-CN" sz="1725" dirty="0"/>
-          </a:p>
-          <a:p>
+              <a:t>比较共同</a:t>
+            </a:r>
             <a:pPr algn="l" indent="0" marL="0">
               <a:lnSpc>
-                <a:spcPts val="2139"/>
-              </a:lnSpc>
-              <a:buNone/>
-            </a:pPr>
-            <a:r>
-              <a:rPr lang="zh-CN" altLang="en-US" sz="1725" dirty="0">
+                <a:spcPts val="2232"/>
+              </a:lnSpc>
+              <a:buNone/>
+            </a:pPr>
+            <a:r>
+              <a:rPr lang="zh-CN" altLang="en-US" sz="1800" b="1" dirty="0">
+                <a:solidFill>
+                  <a:srgbClr val="235E96"/>
+                </a:solidFill>
+                <a:latin typeface="Noto Sans CJK SC" pitchFamily="34" charset="0"/>
+                <a:ea typeface="Noto Sans CJK SC" pitchFamily="34" charset="-122"/>
+                <a:cs typeface="Noto Sans CJK SC" pitchFamily="34" charset="-120"/>
+              </a:rPr>
+              <a:t>输入</a:t>
+            </a:r>
+            <a:pPr algn="l" indent="0" marL="0">
+              <a:lnSpc>
+                <a:spcPts val="2232"/>
+              </a:lnSpc>
+              <a:buNone/>
+            </a:pPr>
+            <a:r>
+              <a:rPr lang="zh-CN" altLang="en-US" sz="1800" dirty="0">
                 <a:solidFill>
                   <a:srgbClr val="1C2430"/>
                 </a:solidFill>
@@ -2416,9 +2425,29 @@
                 <a:ea typeface="Noto Sans CJK SC" pitchFamily="34" charset="-122"/>
                 <a:cs typeface="Noto Sans CJK SC" pitchFamily="34" charset="-120"/>
               </a:rPr>
+              <a:t>、动作和反馈的接口</a:t>
+            </a:r>
+            <a:endParaRPr lang="zh-CN" sz="1800" dirty="0"/>
+          </a:p>
+          <a:p>
+            <a:pPr algn="l" indent="0" marL="0">
+              <a:lnSpc>
+                <a:spcPts val="2232"/>
+              </a:lnSpc>
+              <a:buNone/>
+            </a:pPr>
+            <a:r>
+              <a:rPr lang="zh-CN" altLang="en-US" sz="1800" dirty="0">
+                <a:solidFill>
+                  <a:srgbClr val="1C2430"/>
+                </a:solidFill>
+                <a:latin typeface="Noto Sans CJK SC" pitchFamily="34" charset="0"/>
+                <a:ea typeface="Noto Sans CJK SC" pitchFamily="34" charset="-122"/>
+                <a:cs typeface="Noto Sans CJK SC" pitchFamily="34" charset="-120"/>
+              </a:rPr>
               <a:t>把机制相同与实现相同分开</a:t>
             </a:r>
-            <a:endParaRPr lang="zh-CN" sz="1725" dirty="0"/>
+            <a:endParaRPr lang="zh-CN" sz="1800" dirty="0"/>
           </a:p>
         </p:txBody>
       </p:sp>
@@ -2430,8 +2459,8 @@
         </p:nvSpPr>
         <p:spPr>
           <a:xfrm>
-            <a:off x="6248400" y="4267200"/>
-            <a:ext cx="5486400" cy="1752600"/>
+            <a:off x="6248400" y="4189571"/>
+            <a:ext cx="5486400" cy="1824419"/>
           </a:xfrm>
           <a:prstGeom prst="rect">
             <a:avLst/>
@@ -2455,14 +2484,14 @@
         </p:nvSpPr>
         <p:spPr>
           <a:xfrm>
-            <a:off x="6362700" y="4152900"/>
-            <a:ext cx="1181100" cy="320040"/>
+            <a:off x="6362700" y="4075271"/>
+            <a:ext cx="1257300" cy="342900"/>
           </a:xfrm>
           <a:prstGeom prst="rect">
             <a:avLst/>
           </a:prstGeom>
           <a:solidFill>
-            <a:srgbClr val="173C70"/>
+            <a:srgbClr val="235E96"/>
           </a:solidFill>
           <a:ln w="12700">
             <a:solidFill>
@@ -2482,8 +2511,8 @@
         </p:nvSpPr>
         <p:spPr>
           <a:xfrm>
-            <a:off x="6467475" y="4181475"/>
-            <a:ext cx="971550" cy="262890"/>
+            <a:off x="6467475" y="4103846"/>
+            <a:ext cx="1047750" cy="285750"/>
           </a:xfrm>
           <a:prstGeom prst="rect">
             <a:avLst/>
@@ -2497,12 +2526,12 @@
           <a:p>
             <a:pPr algn="l" indent="0" marL="0">
               <a:lnSpc>
-                <a:spcPts val="2070"/>
-              </a:lnSpc>
-              <a:buNone/>
-            </a:pPr>
-            <a:r>
-              <a:rPr lang="zh-CN" altLang="en-US" sz="1800" b="1" dirty="0">
+                <a:spcPts val="2242"/>
+              </a:lnSpc>
+              <a:buNone/>
+            </a:pPr>
+            <a:r>
+              <a:rPr lang="zh-CN" altLang="en-US" sz="1950" b="1" dirty="0">
                 <a:solidFill>
                   <a:srgbClr val="FFFFFF"/>
                 </a:solidFill>
@@ -2512,7 +2541,7 @@
               </a:rPr>
               <a:t>关键差异</a:t>
             </a:r>
-            <a:endParaRPr lang="zh-CN" sz="1800" dirty="0"/>
+            <a:endParaRPr lang="zh-CN" sz="1950" dirty="0"/>
           </a:p>
         </p:txBody>
       </p:sp>
@@ -2524,8 +2553,8 @@
         </p:nvSpPr>
         <p:spPr>
           <a:xfrm>
-            <a:off x="6381750" y="4615815"/>
-            <a:ext cx="5219700" cy="1308735"/>
+            <a:off x="6381750" y="4561046"/>
+            <a:ext cx="5219700" cy="1357693"/>
           </a:xfrm>
           <a:prstGeom prst="rect">
             <a:avLst/>
@@ -2539,12 +2568,12 @@
           <a:p>
             <a:pPr algn="l" indent="0" marL="0">
               <a:lnSpc>
-                <a:spcPts val="2139"/>
-              </a:lnSpc>
-              <a:buNone/>
-            </a:pPr>
-            <a:r>
-              <a:rPr lang="zh-CN" altLang="en-US" sz="1725" dirty="0">
+                <a:spcPts val="2232"/>
+              </a:lnSpc>
+              <a:buNone/>
+            </a:pPr>
+            <a:r>
+              <a:rPr lang="zh-CN" altLang="en-US" sz="1800" dirty="0">
                 <a:solidFill>
                   <a:srgbClr val="1C2430"/>
                 </a:solidFill>
@@ -2554,17 +2583,17 @@
               </a:rPr>
               <a:t>额外知识、模型和控制权进入何处</a:t>
             </a:r>
-            <a:endParaRPr lang="zh-CN" sz="1725" dirty="0"/>
+            <a:endParaRPr lang="zh-CN" sz="1800" dirty="0"/>
           </a:p>
           <a:p>
             <a:pPr algn="l" indent="0" marL="0">
               <a:lnSpc>
-                <a:spcPts val="2139"/>
-              </a:lnSpc>
-              <a:buNone/>
-            </a:pPr>
-            <a:r>
-              <a:rPr lang="zh-CN" altLang="en-US" sz="1725" dirty="0">
+                <a:spcPts val="2232"/>
+              </a:lnSpc>
+              <a:buNone/>
+            </a:pPr>
+            <a:r>
+              <a:rPr lang="zh-CN" altLang="en-US" sz="1800" dirty="0">
                 <a:solidFill>
                   <a:srgbClr val="1C2430"/>
                 </a:solidFill>
@@ -2574,7 +2603,7 @@
               </a:rPr>
               <a:t>不同环境的数值不直接排序</a:t>
             </a:r>
-            <a:endParaRPr lang="zh-CN" sz="1725" dirty="0"/>
+            <a:endParaRPr lang="zh-CN" sz="1800" dirty="0"/>
           </a:p>
         </p:txBody>
       </p:sp>
@@ -2614,7 +2643,7 @@
                 <a:ea typeface="Noto Sans CJK SC" pitchFamily="34" charset="-122"/>
                 <a:cs typeface="Noto Sans CJK SC" pitchFamily="34" charset="-120"/>
               </a:rPr>
-              <a:t>T1 · 2026 · 待替换</a:t>
+              <a:t>T1 · 2026 · 书目占位；图表均为合成示例</a:t>
             </a:r>
             <a:endParaRPr lang="zh-CN" sz="1125" dirty="0"/>
           </a:p>
@@ -2723,14 +2752,14 @@
       </p:sp>
       <p:sp>
         <p:nvSpPr>
-          <p:cNvPr id="4" name="T32/kicker"/>
-          <p:cNvSpPr/>
-          <p:nvPr/>
-        </p:nvSpPr>
-        <p:spPr>
-          <a:xfrm>
-            <a:off x="457200" y="152400"/>
-            <a:ext cx="11277600" cy="190500"/>
+          <p:cNvPr id="4" name="T32/title"/>
+          <p:cNvSpPr/>
+          <p:nvPr/>
+        </p:nvSpPr>
+        <p:spPr>
+          <a:xfrm>
+            <a:off x="457200" y="209550"/>
+            <a:ext cx="11277600" cy="438150"/>
           </a:xfrm>
           <a:prstGeom prst="rect">
             <a:avLst/>
@@ -2744,54 +2773,12 @@
           <a:p>
             <a:pPr algn="l" indent="0" marL="0">
               <a:lnSpc>
-                <a:spcPts val="1320"/>
-              </a:lnSpc>
-              <a:buNone/>
-            </a:pPr>
-            <a:r>
-              <a:rPr lang="zh-CN" altLang="en-US" sz="1200" dirty="0">
-                <a:solidFill>
-                  <a:srgbClr val="515B68"/>
-                </a:solidFill>
-                <a:latin typeface="Noto Sans CJK SC" pitchFamily="34" charset="0"/>
-                <a:ea typeface="Noto Sans CJK SC" pitchFamily="34" charset="-122"/>
-                <a:cs typeface="Noto Sans CJK SC" pitchFamily="34" charset="-120"/>
-              </a:rPr>
-              <a:t>结构模板 / 占位说明与合成数据</a:t>
-            </a:r>
-            <a:endParaRPr lang="zh-CN" sz="1200" dirty="0"/>
-          </a:p>
-        </p:txBody>
-      </p:sp>
-      <p:sp>
-        <p:nvSpPr>
-          <p:cNvPr id="5" name="T32/title"/>
-          <p:cNvSpPr/>
-          <p:nvPr/>
-        </p:nvSpPr>
-        <p:spPr>
-          <a:xfrm>
-            <a:off x="457200" y="381000"/>
-            <a:ext cx="11277600" cy="400050"/>
-          </a:xfrm>
-          <a:prstGeom prst="rect">
-            <a:avLst/>
-          </a:prstGeom>
-          <a:noFill/>
-          <a:ln/>
-        </p:spPr>
-        <p:txBody>
-          <a:bodyPr wrap="none" lIns="0" tIns="0" rIns="0" bIns="0" rtlCol="0" anchor="t"/>
-          <a:lstStyle/>
-          <a:p>
-            <a:pPr algn="l" indent="0" marL="0">
-              <a:lnSpc>
-                <a:spcPts val="2856"/>
-              </a:lnSpc>
-              <a:buNone/>
-            </a:pPr>
-            <a:r>
-              <a:rPr lang="zh-CN" altLang="en-US" sz="2550" b="1" dirty="0">
+                <a:spcPts val="3360"/>
+              </a:lnSpc>
+              <a:buNone/>
+            </a:pPr>
+            <a:r>
+              <a:rPr lang="zh-CN" altLang="en-US" sz="3000" b="1" dirty="0">
                 <a:solidFill>
                   <a:srgbClr val="1C2430"/>
                 </a:solidFill>
@@ -2801,26 +2788,49 @@
               </a:rPr>
               <a:t>证据等级与外推距离</a:t>
             </a:r>
-            <a:endParaRPr lang="zh-CN" sz="2550" dirty="0"/>
-          </a:p>
-        </p:txBody>
-      </p:sp>
-      <p:sp>
-        <p:nvSpPr>
-          <p:cNvPr id="6" name="T32/header-rule"/>
-          <p:cNvSpPr/>
-          <p:nvPr/>
-        </p:nvSpPr>
-        <p:spPr>
-          <a:xfrm>
-            <a:off x="457200" y="876300"/>
+            <a:endParaRPr lang="zh-CN" sz="3000" dirty="0"/>
+          </a:p>
+        </p:txBody>
+      </p:sp>
+      <p:sp>
+        <p:nvSpPr>
+          <p:cNvPr id="5" name="T32/header-rule"/>
+          <p:cNvSpPr/>
+          <p:nvPr/>
+        </p:nvSpPr>
+        <p:spPr>
+          <a:xfrm>
+            <a:off x="457200" y="752475"/>
             <a:ext cx="11277600" cy="0"/>
           </a:xfrm>
           <a:prstGeom prst="line">
             <a:avLst/>
           </a:prstGeom>
           <a:noFill/>
-          <a:ln w="11430">
+          <a:ln w="10478">
+            <a:solidFill>
+              <a:srgbClr val="BEC8D4"/>
+            </a:solidFill>
+            <a:prstDash val="solid"/>
+          </a:ln>
+        </p:spPr>
+      </p:sp>
+      <p:sp>
+        <p:nvSpPr>
+          <p:cNvPr id="6" name="T32/header-accent"/>
+          <p:cNvSpPr/>
+          <p:nvPr/>
+        </p:nvSpPr>
+        <p:spPr>
+          <a:xfrm>
+            <a:off x="457200" y="752475"/>
+            <a:ext cx="704850" cy="0"/>
+          </a:xfrm>
+          <a:prstGeom prst="line">
+            <a:avLst/>
+          </a:prstGeom>
+          <a:noFill/>
+          <a:ln w="28575">
             <a:solidFill>
               <a:srgbClr val="173C70"/>
             </a:solidFill>
@@ -2836,8 +2846,8 @@
         </p:nvSpPr>
         <p:spPr>
           <a:xfrm>
-            <a:off x="457200" y="1409700"/>
-            <a:ext cx="7620000" cy="1104900"/>
+            <a:off x="457200" y="1226534"/>
+            <a:ext cx="7620000" cy="1147381"/>
           </a:xfrm>
           <a:prstGeom prst="rect">
             <a:avLst/>
@@ -2861,14 +2871,14 @@
         </p:nvSpPr>
         <p:spPr>
           <a:xfrm>
-            <a:off x="466725" y="1419225"/>
+            <a:off x="466725" y="1236059"/>
             <a:ext cx="7600950" cy="371475"/>
           </a:xfrm>
           <a:prstGeom prst="rect">
             <a:avLst/>
           </a:prstGeom>
           <a:solidFill>
-            <a:srgbClr val="EEF3F8"/>
+            <a:srgbClr val="EAF2FA"/>
           </a:solidFill>
           <a:ln w="12700">
             <a:solidFill>
@@ -2888,7 +2898,7 @@
         </p:nvSpPr>
         <p:spPr>
           <a:xfrm>
-            <a:off x="457200" y="1790700"/>
+            <a:off x="457200" y="1607534"/>
             <a:ext cx="7620000" cy="0"/>
           </a:xfrm>
           <a:prstGeom prst="line">
@@ -2911,8 +2921,8 @@
         </p:nvSpPr>
         <p:spPr>
           <a:xfrm>
-            <a:off x="581025" y="1466850"/>
-            <a:ext cx="7372350" cy="276225"/>
+            <a:off x="581025" y="1274159"/>
+            <a:ext cx="7372350" cy="295275"/>
           </a:xfrm>
           <a:prstGeom prst="rect">
             <a:avLst/>
@@ -2926,14 +2936,14 @@
           <a:p>
             <a:pPr algn="l" indent="0" marL="0">
               <a:lnSpc>
-                <a:spcPts val="2070"/>
-              </a:lnSpc>
-              <a:buNone/>
-            </a:pPr>
-            <a:r>
-              <a:rPr lang="zh-CN" altLang="en-US" sz="1800" b="1" dirty="0">
-                <a:solidFill>
-                  <a:srgbClr val="173C70"/>
+                <a:spcPts val="2242"/>
+              </a:lnSpc>
+              <a:buNone/>
+            </a:pPr>
+            <a:r>
+              <a:rPr lang="zh-CN" altLang="en-US" sz="1950" b="1" dirty="0">
+                <a:solidFill>
+                  <a:srgbClr val="235E96"/>
                 </a:solidFill>
                 <a:latin typeface="Noto Sans CJK SC" pitchFamily="34" charset="0"/>
                 <a:ea typeface="Noto Sans CJK SC" pitchFamily="34" charset="-122"/>
@@ -2941,7 +2951,7 @@
               </a:rPr>
               <a:t>离线与模拟</a:t>
             </a:r>
-            <a:endParaRPr lang="zh-CN" sz="1800" dirty="0"/>
+            <a:endParaRPr lang="zh-CN" sz="1950" dirty="0"/>
           </a:p>
         </p:txBody>
       </p:sp>
@@ -2953,8 +2963,8 @@
         </p:nvSpPr>
         <p:spPr>
           <a:xfrm>
-            <a:off x="590550" y="1905000"/>
-            <a:ext cx="7353300" cy="514350"/>
+            <a:off x="590550" y="1712309"/>
+            <a:ext cx="7353300" cy="566357"/>
           </a:xfrm>
           <a:prstGeom prst="rect">
             <a:avLst/>
@@ -2968,12 +2978,12 @@
           <a:p>
             <a:pPr algn="l" indent="0" marL="0">
               <a:lnSpc>
-                <a:spcPts val="2139"/>
-              </a:lnSpc>
-              <a:buNone/>
-            </a:pPr>
-            <a:r>
-              <a:rPr lang="zh-CN" altLang="en-US" sz="1725" dirty="0">
+                <a:spcPts val="2232"/>
+              </a:lnSpc>
+              <a:buNone/>
+            </a:pPr>
+            <a:r>
+              <a:rPr lang="zh-CN" altLang="en-US" sz="1800" dirty="0">
                 <a:solidFill>
                   <a:srgbClr val="1C2430"/>
                 </a:solidFill>
@@ -2983,7 +2993,7 @@
               </a:rPr>
               <a:t>明确模拟器和状态空间</a:t>
             </a:r>
-            <a:endParaRPr lang="zh-CN" sz="1725" dirty="0"/>
+            <a:endParaRPr lang="zh-CN" sz="1800" dirty="0"/>
           </a:p>
         </p:txBody>
       </p:sp>
@@ -2995,8 +3005,8 @@
         </p:nvSpPr>
         <p:spPr>
           <a:xfrm>
-            <a:off x="1028700" y="2609850"/>
-            <a:ext cx="7048500" cy="1104900"/>
+            <a:off x="1028700" y="2472881"/>
+            <a:ext cx="7048500" cy="1147381"/>
           </a:xfrm>
           <a:prstGeom prst="rect">
             <a:avLst/>
@@ -3020,14 +3030,14 @@
         </p:nvSpPr>
         <p:spPr>
           <a:xfrm>
-            <a:off x="1038225" y="2619375"/>
+            <a:off x="1038225" y="2482406"/>
             <a:ext cx="7029450" cy="371475"/>
           </a:xfrm>
           <a:prstGeom prst="rect">
             <a:avLst/>
           </a:prstGeom>
           <a:solidFill>
-            <a:srgbClr val="EEF3F8"/>
+            <a:srgbClr val="EAF2FA"/>
           </a:solidFill>
           <a:ln w="12700">
             <a:solidFill>
@@ -3047,7 +3057,7 @@
         </p:nvSpPr>
         <p:spPr>
           <a:xfrm>
-            <a:off x="1028700" y="2990850"/>
+            <a:off x="1028700" y="2853881"/>
             <a:ext cx="7048500" cy="0"/>
           </a:xfrm>
           <a:prstGeom prst="line">
@@ -3070,8 +3080,8 @@
         </p:nvSpPr>
         <p:spPr>
           <a:xfrm>
-            <a:off x="1152525" y="2667000"/>
-            <a:ext cx="6800850" cy="276225"/>
+            <a:off x="1152525" y="2520506"/>
+            <a:ext cx="6800850" cy="295275"/>
           </a:xfrm>
           <a:prstGeom prst="rect">
             <a:avLst/>
@@ -3085,14 +3095,14 @@
           <a:p>
             <a:pPr algn="l" indent="0" marL="0">
               <a:lnSpc>
-                <a:spcPts val="2070"/>
-              </a:lnSpc>
-              <a:buNone/>
-            </a:pPr>
-            <a:r>
-              <a:rPr lang="zh-CN" altLang="en-US" sz="1800" b="1" dirty="0">
-                <a:solidFill>
-                  <a:srgbClr val="173C70"/>
+                <a:spcPts val="2242"/>
+              </a:lnSpc>
+              <a:buNone/>
+            </a:pPr>
+            <a:r>
+              <a:rPr lang="zh-CN" altLang="en-US" sz="1950" b="1" dirty="0">
+                <a:solidFill>
+                  <a:srgbClr val="235E96"/>
                 </a:solidFill>
                 <a:latin typeface="Noto Sans CJK SC" pitchFamily="34" charset="0"/>
                 <a:ea typeface="Noto Sans CJK SC" pitchFamily="34" charset="-122"/>
@@ -3100,7 +3110,7 @@
               </a:rPr>
               <a:t>受控实验</a:t>
             </a:r>
-            <a:endParaRPr lang="zh-CN" sz="1800" dirty="0"/>
+            <a:endParaRPr lang="zh-CN" sz="1950" dirty="0"/>
           </a:p>
         </p:txBody>
       </p:sp>
@@ -3112,8 +3122,8 @@
         </p:nvSpPr>
         <p:spPr>
           <a:xfrm>
-            <a:off x="1162050" y="3105150"/>
-            <a:ext cx="6781800" cy="514350"/>
+            <a:off x="1162050" y="2958656"/>
+            <a:ext cx="6781800" cy="566356"/>
           </a:xfrm>
           <a:prstGeom prst="rect">
             <a:avLst/>
@@ -3127,12 +3137,12 @@
           <a:p>
             <a:pPr algn="l" indent="0" marL="0">
               <a:lnSpc>
-                <a:spcPts val="2139"/>
-              </a:lnSpc>
-              <a:buNone/>
-            </a:pPr>
-            <a:r>
-              <a:rPr lang="zh-CN" altLang="en-US" sz="1725" dirty="0">
+                <a:spcPts val="2232"/>
+              </a:lnSpc>
+              <a:buNone/>
+            </a:pPr>
+            <a:r>
+              <a:rPr lang="zh-CN" altLang="en-US" sz="1800" dirty="0">
                 <a:solidFill>
                   <a:srgbClr val="1C2430"/>
                 </a:solidFill>
@@ -3140,9 +3150,26 @@
                 <a:ea typeface="Noto Sans CJK SC" pitchFamily="34" charset="-122"/>
                 <a:cs typeface="Noto Sans CJK SC" pitchFamily="34" charset="-120"/>
               </a:rPr>
-              <a:t>说明受控条件与独立重复</a:t>
-            </a:r>
-            <a:endParaRPr lang="zh-CN" sz="1725" dirty="0"/>
+              <a:t>说明受控条件与</a:t>
+            </a:r>
+            <a:pPr algn="l" indent="0" marL="0">
+              <a:lnSpc>
+                <a:spcPts val="2232"/>
+              </a:lnSpc>
+              <a:buNone/>
+            </a:pPr>
+            <a:r>
+              <a:rPr lang="zh-CN" altLang="en-US" sz="1800" b="1" dirty="0">
+                <a:solidFill>
+                  <a:srgbClr val="235E96"/>
+                </a:solidFill>
+                <a:latin typeface="Noto Sans CJK SC" pitchFamily="34" charset="0"/>
+                <a:ea typeface="Noto Sans CJK SC" pitchFamily="34" charset="-122"/>
+                <a:cs typeface="Noto Sans CJK SC" pitchFamily="34" charset="-120"/>
+              </a:rPr>
+              <a:t>独立重复</a:t>
+            </a:r>
+            <a:endParaRPr lang="zh-CN" sz="1800" dirty="0"/>
           </a:p>
         </p:txBody>
       </p:sp>
@@ -3154,8 +3181,8 @@
         </p:nvSpPr>
         <p:spPr>
           <a:xfrm>
-            <a:off x="1600200" y="3810000"/>
-            <a:ext cx="6477000" cy="1104900"/>
+            <a:off x="1600200" y="3719132"/>
+            <a:ext cx="6477000" cy="1147381"/>
           </a:xfrm>
           <a:prstGeom prst="rect">
             <a:avLst/>
@@ -3179,14 +3206,14 @@
         </p:nvSpPr>
         <p:spPr>
           <a:xfrm>
-            <a:off x="1609725" y="3819525"/>
+            <a:off x="1609725" y="3728656"/>
             <a:ext cx="6457950" cy="371475"/>
           </a:xfrm>
           <a:prstGeom prst="rect">
             <a:avLst/>
           </a:prstGeom>
           <a:solidFill>
-            <a:srgbClr val="EEF3F8"/>
+            <a:srgbClr val="EAF2FA"/>
           </a:solidFill>
           <a:ln w="12700">
             <a:solidFill>
@@ -3206,7 +3233,7 @@
         </p:nvSpPr>
         <p:spPr>
           <a:xfrm>
-            <a:off x="1600200" y="4191000"/>
+            <a:off x="1600200" y="4100131"/>
             <a:ext cx="6477000" cy="0"/>
           </a:xfrm>
           <a:prstGeom prst="line">
@@ -3229,8 +3256,8 @@
         </p:nvSpPr>
         <p:spPr>
           <a:xfrm>
-            <a:off x="1724025" y="3867150"/>
-            <a:ext cx="6229350" cy="276225"/>
+            <a:off x="1724025" y="3766757"/>
+            <a:ext cx="6229350" cy="295275"/>
           </a:xfrm>
           <a:prstGeom prst="rect">
             <a:avLst/>
@@ -3244,14 +3271,14 @@
           <a:p>
             <a:pPr algn="l" indent="0" marL="0">
               <a:lnSpc>
-                <a:spcPts val="2070"/>
-              </a:lnSpc>
-              <a:buNone/>
-            </a:pPr>
-            <a:r>
-              <a:rPr lang="zh-CN" altLang="en-US" sz="1800" b="1" dirty="0">
-                <a:solidFill>
-                  <a:srgbClr val="173C70"/>
+                <a:spcPts val="2242"/>
+              </a:lnSpc>
+              <a:buNone/>
+            </a:pPr>
+            <a:r>
+              <a:rPr lang="zh-CN" altLang="en-US" sz="1950" b="1" dirty="0">
+                <a:solidFill>
+                  <a:srgbClr val="235E96"/>
                 </a:solidFill>
                 <a:latin typeface="Noto Sans CJK SC" pitchFamily="34" charset="0"/>
                 <a:ea typeface="Noto Sans CJK SC" pitchFamily="34" charset="-122"/>
@@ -3259,7 +3286,7 @@
               </a:rPr>
               <a:t>独立环境验证</a:t>
             </a:r>
-            <a:endParaRPr lang="zh-CN" sz="1800" dirty="0"/>
+            <a:endParaRPr lang="zh-CN" sz="1950" dirty="0"/>
           </a:p>
         </p:txBody>
       </p:sp>
@@ -3271,8 +3298,8 @@
         </p:nvSpPr>
         <p:spPr>
           <a:xfrm>
-            <a:off x="1733550" y="4305300"/>
-            <a:ext cx="6210300" cy="514350"/>
+            <a:off x="1733550" y="4204907"/>
+            <a:ext cx="6210300" cy="566356"/>
           </a:xfrm>
           <a:prstGeom prst="rect">
             <a:avLst/>
@@ -3286,12 +3313,12 @@
           <a:p>
             <a:pPr algn="l" indent="0" marL="0">
               <a:lnSpc>
-                <a:spcPts val="2139"/>
-              </a:lnSpc>
-              <a:buNone/>
-            </a:pPr>
-            <a:r>
-              <a:rPr lang="zh-CN" altLang="en-US" sz="1725" dirty="0">
+                <a:spcPts val="2232"/>
+              </a:lnSpc>
+              <a:buNone/>
+            </a:pPr>
+            <a:r>
+              <a:rPr lang="zh-CN" altLang="en-US" sz="1800" dirty="0">
                 <a:solidFill>
                   <a:srgbClr val="1C2430"/>
                 </a:solidFill>
@@ -3301,7 +3328,7 @@
               </a:rPr>
               <a:t>报告年份、地点或对象留出</a:t>
             </a:r>
-            <a:endParaRPr lang="zh-CN" sz="1725" dirty="0"/>
+            <a:endParaRPr lang="zh-CN" sz="1800" dirty="0"/>
           </a:p>
         </p:txBody>
       </p:sp>
@@ -3313,8 +3340,8 @@
         </p:nvSpPr>
         <p:spPr>
           <a:xfrm>
-            <a:off x="2171700" y="5010150"/>
-            <a:ext cx="5905500" cy="1104900"/>
+            <a:off x="2171700" y="4965478"/>
+            <a:ext cx="5905500" cy="1147381"/>
           </a:xfrm>
           <a:prstGeom prst="rect">
             <a:avLst/>
@@ -3338,14 +3365,14 @@
         </p:nvSpPr>
         <p:spPr>
           <a:xfrm>
-            <a:off x="2181225" y="5019675"/>
+            <a:off x="2181225" y="4975003"/>
             <a:ext cx="5886450" cy="371475"/>
           </a:xfrm>
           <a:prstGeom prst="rect">
             <a:avLst/>
           </a:prstGeom>
           <a:solidFill>
-            <a:srgbClr val="EEF3F8"/>
+            <a:srgbClr val="EAF2FA"/>
           </a:solidFill>
           <a:ln w="12700">
             <a:solidFill>
@@ -3365,7 +3392,7 @@
         </p:nvSpPr>
         <p:spPr>
           <a:xfrm>
-            <a:off x="2171700" y="5391150"/>
+            <a:off x="2171700" y="5346478"/>
             <a:ext cx="5905500" cy="0"/>
           </a:xfrm>
           <a:prstGeom prst="line">
@@ -3388,8 +3415,8 @@
         </p:nvSpPr>
         <p:spPr>
           <a:xfrm>
-            <a:off x="2295525" y="5067300"/>
-            <a:ext cx="5657850" cy="276225"/>
+            <a:off x="2295525" y="5013103"/>
+            <a:ext cx="5657850" cy="295275"/>
           </a:xfrm>
           <a:prstGeom prst="rect">
             <a:avLst/>
@@ -3403,14 +3430,14 @@
           <a:p>
             <a:pPr algn="l" indent="0" marL="0">
               <a:lnSpc>
-                <a:spcPts val="2070"/>
-              </a:lnSpc>
-              <a:buNone/>
-            </a:pPr>
-            <a:r>
-              <a:rPr lang="zh-CN" altLang="en-US" sz="1800" b="1" dirty="0">
-                <a:solidFill>
-                  <a:srgbClr val="173C70"/>
+                <a:spcPts val="2242"/>
+              </a:lnSpc>
+              <a:buNone/>
+            </a:pPr>
+            <a:r>
+              <a:rPr lang="zh-CN" altLang="en-US" sz="1950" b="1" dirty="0">
+                <a:solidFill>
+                  <a:srgbClr val="235E96"/>
                 </a:solidFill>
                 <a:latin typeface="Noto Sans CJK SC" pitchFamily="34" charset="0"/>
                 <a:ea typeface="Noto Sans CJK SC" pitchFamily="34" charset="-122"/>
@@ -3418,7 +3445,7 @@
               </a:rPr>
               <a:t>真实部署</a:t>
             </a:r>
-            <a:endParaRPr lang="zh-CN" sz="1800" dirty="0"/>
+            <a:endParaRPr lang="zh-CN" sz="1950" dirty="0"/>
           </a:p>
         </p:txBody>
       </p:sp>
@@ -3430,8 +3457,8 @@
         </p:nvSpPr>
         <p:spPr>
           <a:xfrm>
-            <a:off x="2305050" y="5505450"/>
-            <a:ext cx="5638800" cy="514350"/>
+            <a:off x="2305050" y="5451253"/>
+            <a:ext cx="5638800" cy="566357"/>
           </a:xfrm>
           <a:prstGeom prst="rect">
             <a:avLst/>
@@ -3445,12 +3472,12 @@
           <a:p>
             <a:pPr algn="l" indent="0" marL="0">
               <a:lnSpc>
-                <a:spcPts val="2139"/>
-              </a:lnSpc>
-              <a:buNone/>
-            </a:pPr>
-            <a:r>
-              <a:rPr lang="zh-CN" altLang="en-US" sz="1725" dirty="0">
+                <a:spcPts val="2232"/>
+              </a:lnSpc>
+              <a:buNone/>
+            </a:pPr>
+            <a:r>
+              <a:rPr lang="zh-CN" altLang="en-US" sz="1800" dirty="0">
                 <a:solidFill>
                   <a:srgbClr val="1C2430"/>
                 </a:solidFill>
@@ -3460,7 +3487,7 @@
               </a:rPr>
               <a:t>交代部署时间与干预后果</a:t>
             </a:r>
-            <a:endParaRPr lang="zh-CN" sz="1725" dirty="0"/>
+            <a:endParaRPr lang="zh-CN" sz="1800" dirty="0"/>
           </a:p>
         </p:txBody>
       </p:sp>
@@ -3472,7 +3499,7 @@
         </p:nvSpPr>
         <p:spPr>
           <a:xfrm>
-            <a:off x="8515350" y="3467100"/>
+            <a:off x="8515350" y="3363087"/>
             <a:ext cx="3219450" cy="0"/>
           </a:xfrm>
           <a:prstGeom prst="line">
@@ -3495,14 +3522,14 @@
         </p:nvSpPr>
         <p:spPr>
           <a:xfrm>
-            <a:off x="8515350" y="1428750"/>
+            <a:off x="8515350" y="1245584"/>
             <a:ext cx="47625" cy="295275"/>
           </a:xfrm>
           <a:prstGeom prst="rect">
             <a:avLst/>
           </a:prstGeom>
           <a:solidFill>
-            <a:srgbClr val="173C70"/>
+            <a:srgbClr val="536A7A"/>
           </a:solidFill>
           <a:ln w="12700">
             <a:solidFill>
@@ -3522,7 +3549,7 @@
         </p:nvSpPr>
         <p:spPr>
           <a:xfrm>
-            <a:off x="8667750" y="1428750"/>
+            <a:off x="8667750" y="1245584"/>
             <a:ext cx="3067050" cy="304800"/>
           </a:xfrm>
           <a:prstGeom prst="rect">
@@ -3537,14 +3564,14 @@
           <a:p>
             <a:pPr algn="l" indent="0" marL="0">
               <a:lnSpc>
-                <a:spcPts val="2070"/>
-              </a:lnSpc>
-              <a:buNone/>
-            </a:pPr>
-            <a:r>
-              <a:rPr lang="zh-CN" altLang="en-US" sz="1800" b="1" dirty="0">
-                <a:solidFill>
-                  <a:srgbClr val="173C70"/>
+                <a:spcPts val="2242"/>
+              </a:lnSpc>
+              <a:buNone/>
+            </a:pPr>
+            <a:r>
+              <a:rPr lang="zh-CN" altLang="en-US" sz="1950" b="1" dirty="0">
+                <a:solidFill>
+                  <a:srgbClr val="536A7A"/>
                 </a:solidFill>
                 <a:latin typeface="Noto Sans CJK SC" pitchFamily="34" charset="0"/>
                 <a:ea typeface="Noto Sans CJK SC" pitchFamily="34" charset="-122"/>
@@ -3552,7 +3579,7 @@
               </a:rPr>
               <a:t>共同评价对象</a:t>
             </a:r>
-            <a:endParaRPr lang="zh-CN" sz="1800" dirty="0"/>
+            <a:endParaRPr lang="zh-CN" sz="1950" dirty="0"/>
           </a:p>
         </p:txBody>
       </p:sp>
@@ -3564,8 +3591,8 @@
         </p:nvSpPr>
         <p:spPr>
           <a:xfrm>
-            <a:off x="8667750" y="1847850"/>
-            <a:ext cx="3067050" cy="1524000"/>
+            <a:off x="8667750" y="1664684"/>
+            <a:ext cx="3067050" cy="1603153"/>
           </a:xfrm>
           <a:prstGeom prst="rect">
             <a:avLst/>
@@ -3579,12 +3606,12 @@
           <a:p>
             <a:pPr algn="l" indent="0" marL="0">
               <a:lnSpc>
-                <a:spcPts val="2139"/>
-              </a:lnSpc>
-              <a:buNone/>
-            </a:pPr>
-            <a:r>
-              <a:rPr lang="zh-CN" altLang="en-US" sz="1725" dirty="0">
+                <a:spcPts val="2232"/>
+              </a:lnSpc>
+              <a:buNone/>
+            </a:pPr>
+            <a:r>
+              <a:rPr lang="zh-CN" altLang="en-US" sz="1800" dirty="0">
                 <a:solidFill>
                   <a:srgbClr val="1C2430"/>
                 </a:solidFill>
@@ -3594,17 +3621,17 @@
               </a:rPr>
               <a:t>先确定评价对象是否一致</a:t>
             </a:r>
-            <a:endParaRPr lang="zh-CN" sz="1725" dirty="0"/>
+            <a:endParaRPr lang="zh-CN" sz="1800" dirty="0"/>
           </a:p>
           <a:p>
             <a:pPr algn="l" indent="0" marL="0">
               <a:lnSpc>
-                <a:spcPts val="2139"/>
-              </a:lnSpc>
-              <a:buNone/>
-            </a:pPr>
-            <a:r>
-              <a:rPr lang="zh-CN" altLang="en-US" sz="1725" dirty="0">
+                <a:spcPts val="2232"/>
+              </a:lnSpc>
+              <a:buNone/>
+            </a:pPr>
+            <a:r>
+              <a:rPr lang="zh-CN" altLang="en-US" sz="1800" dirty="0">
                 <a:solidFill>
                   <a:srgbClr val="1C2430"/>
                 </a:solidFill>
@@ -3612,19 +3639,19 @@
                 <a:ea typeface="Noto Sans CJK SC" pitchFamily="34" charset="-122"/>
                 <a:cs typeface="Noto Sans CJK SC" pitchFamily="34" charset="-120"/>
               </a:rPr>
-              <a:t>任务完成、预测性能和农艺收益</a:t>
-            </a:r>
-            <a:endParaRPr lang="zh-CN" sz="1725" dirty="0"/>
+              <a:t>任务完成、预测性能和农艺收</a:t>
+            </a:r>
+            <a:endParaRPr lang="zh-CN" sz="1800" dirty="0"/>
           </a:p>
           <a:p>
             <a:pPr algn="l" indent="0" marL="0">
               <a:lnSpc>
-                <a:spcPts val="2139"/>
-              </a:lnSpc>
-              <a:buNone/>
-            </a:pPr>
-            <a:r>
-              <a:rPr lang="zh-CN" altLang="en-US" sz="1725" dirty="0">
+                <a:spcPts val="2232"/>
+              </a:lnSpc>
+              <a:buNone/>
+            </a:pPr>
+            <a:r>
+              <a:rPr lang="zh-CN" altLang="en-US" sz="1800" dirty="0">
                 <a:solidFill>
                   <a:srgbClr val="1C2430"/>
                 </a:solidFill>
@@ -3632,9 +3659,9 @@
                 <a:ea typeface="Noto Sans CJK SC" pitchFamily="34" charset="-122"/>
                 <a:cs typeface="Noto Sans CJK SC" pitchFamily="34" charset="-120"/>
               </a:rPr>
-              <a:t>分别比较</a:t>
-            </a:r>
-            <a:endParaRPr lang="zh-CN" sz="1725" dirty="0"/>
+              <a:t>益分别比较</a:t>
+            </a:r>
+            <a:endParaRPr lang="zh-CN" sz="1800" dirty="0"/>
           </a:p>
         </p:txBody>
       </p:sp>
@@ -3646,8 +3673,8 @@
         </p:nvSpPr>
         <p:spPr>
           <a:xfrm>
-            <a:off x="8515350" y="3848100"/>
-            <a:ext cx="3219450" cy="2152650"/>
+            <a:off x="8515350" y="3754279"/>
+            <a:ext cx="3219450" cy="2239804"/>
           </a:xfrm>
           <a:prstGeom prst="rect">
             <a:avLst/>
@@ -3671,14 +3698,14 @@
         </p:nvSpPr>
         <p:spPr>
           <a:xfrm>
-            <a:off x="8629650" y="3733800"/>
-            <a:ext cx="1181100" cy="320040"/>
+            <a:off x="8629650" y="3639979"/>
+            <a:ext cx="1257300" cy="342900"/>
           </a:xfrm>
           <a:prstGeom prst="rect">
             <a:avLst/>
           </a:prstGeom>
           <a:solidFill>
-            <a:srgbClr val="903543"/>
+            <a:srgbClr val="A24736"/>
           </a:solidFill>
           <a:ln w="12700">
             <a:solidFill>
@@ -3698,8 +3725,8 @@
         </p:nvSpPr>
         <p:spPr>
           <a:xfrm>
-            <a:off x="8734425" y="3762375"/>
-            <a:ext cx="971550" cy="262890"/>
+            <a:off x="8734425" y="3668554"/>
+            <a:ext cx="1047750" cy="285750"/>
           </a:xfrm>
           <a:prstGeom prst="rect">
             <a:avLst/>
@@ -3713,12 +3740,12 @@
           <a:p>
             <a:pPr algn="l" indent="0" marL="0">
               <a:lnSpc>
-                <a:spcPts val="2070"/>
-              </a:lnSpc>
-              <a:buNone/>
-            </a:pPr>
-            <a:r>
-              <a:rPr lang="zh-CN" altLang="en-US" sz="1800" b="1" dirty="0">
+                <a:spcPts val="2242"/>
+              </a:lnSpc>
+              <a:buNone/>
+            </a:pPr>
+            <a:r>
+              <a:rPr lang="zh-CN" altLang="en-US" sz="1950" b="1" dirty="0">
                 <a:solidFill>
                   <a:srgbClr val="FFFFFF"/>
                 </a:solidFill>
@@ -3728,7 +3755,7 @@
               </a:rPr>
               <a:t>外推边界</a:t>
             </a:r>
-            <a:endParaRPr lang="zh-CN" sz="1800" dirty="0"/>
+            <a:endParaRPr lang="zh-CN" sz="1950" dirty="0"/>
           </a:p>
         </p:txBody>
       </p:sp>
@@ -3740,8 +3767,8 @@
         </p:nvSpPr>
         <p:spPr>
           <a:xfrm>
-            <a:off x="8648700" y="4196715"/>
-            <a:ext cx="2952750" cy="1708785"/>
+            <a:off x="8648700" y="4125754"/>
+            <a:ext cx="2952750" cy="1773079"/>
           </a:xfrm>
           <a:prstGeom prst="rect">
             <a:avLst/>
@@ -3755,12 +3782,12 @@
           <a:p>
             <a:pPr algn="l" indent="0" marL="0">
               <a:lnSpc>
-                <a:spcPts val="2139"/>
-              </a:lnSpc>
-              <a:buNone/>
-            </a:pPr>
-            <a:r>
-              <a:rPr lang="zh-CN" altLang="en-US" sz="1725" dirty="0">
+                <a:spcPts val="2232"/>
+              </a:lnSpc>
+              <a:buNone/>
+            </a:pPr>
+            <a:r>
+              <a:rPr lang="zh-CN" altLang="en-US" sz="1800" dirty="0">
                 <a:solidFill>
                   <a:srgbClr val="1C2430"/>
                 </a:solidFill>
@@ -3770,17 +3797,17 @@
               </a:rPr>
               <a:t>不同证据层级支持不同结论</a:t>
             </a:r>
-            <a:endParaRPr lang="zh-CN" sz="1725" dirty="0"/>
+            <a:endParaRPr lang="zh-CN" sz="1800" dirty="0"/>
           </a:p>
           <a:p>
             <a:pPr algn="l" indent="0" marL="0">
               <a:lnSpc>
-                <a:spcPts val="2139"/>
-              </a:lnSpc>
-              <a:buNone/>
-            </a:pPr>
-            <a:r>
-              <a:rPr lang="zh-CN" altLang="en-US" sz="1725" dirty="0">
+                <a:spcPts val="2232"/>
+              </a:lnSpc>
+              <a:buNone/>
+            </a:pPr>
+            <a:r>
+              <a:rPr lang="zh-CN" altLang="en-US" sz="1800" dirty="0">
                 <a:solidFill>
                   <a:srgbClr val="1C2430"/>
                 </a:solidFill>
@@ -3790,7 +3817,7 @@
               </a:rPr>
               <a:t>指出升级验证还需要什么</a:t>
             </a:r>
-            <a:endParaRPr lang="zh-CN" sz="1725" dirty="0"/>
+            <a:endParaRPr lang="zh-CN" sz="1800" dirty="0"/>
           </a:p>
         </p:txBody>
       </p:sp>
@@ -3830,7 +3857,7 @@
                 <a:ea typeface="Noto Sans CJK SC" pitchFamily="34" charset="-122"/>
                 <a:cs typeface="Noto Sans CJK SC" pitchFamily="34" charset="-120"/>
               </a:rPr>
-              <a:t>T1 · 2026 · 待替换</a:t>
+              <a:t>T1 · 2026 · 书目占位；图表均为合成示例</a:t>
             </a:r>
             <a:endParaRPr lang="zh-CN" sz="1125" dirty="0"/>
           </a:p>
@@ -3939,14 +3966,14 @@
       </p:sp>
       <p:sp>
         <p:nvSpPr>
-          <p:cNvPr id="4" name="T33/kicker"/>
-          <p:cNvSpPr/>
-          <p:nvPr/>
-        </p:nvSpPr>
-        <p:spPr>
-          <a:xfrm>
-            <a:off x="457200" y="152400"/>
-            <a:ext cx="11277600" cy="190500"/>
+          <p:cNvPr id="4" name="T33/title"/>
+          <p:cNvSpPr/>
+          <p:nvPr/>
+        </p:nvSpPr>
+        <p:spPr>
+          <a:xfrm>
+            <a:off x="457200" y="209550"/>
+            <a:ext cx="11277600" cy="438150"/>
           </a:xfrm>
           <a:prstGeom prst="rect">
             <a:avLst/>
@@ -3960,54 +3987,12 @@
           <a:p>
             <a:pPr algn="l" indent="0" marL="0">
               <a:lnSpc>
-                <a:spcPts val="1320"/>
-              </a:lnSpc>
-              <a:buNone/>
-            </a:pPr>
-            <a:r>
-              <a:rPr lang="zh-CN" altLang="en-US" sz="1200" dirty="0">
-                <a:solidFill>
-                  <a:srgbClr val="515B68"/>
-                </a:solidFill>
-                <a:latin typeface="Noto Sans CJK SC" pitchFamily="34" charset="0"/>
-                <a:ea typeface="Noto Sans CJK SC" pitchFamily="34" charset="-122"/>
-                <a:cs typeface="Noto Sans CJK SC" pitchFamily="34" charset="-120"/>
-              </a:rPr>
-              <a:t>结构模板 / 占位说明与合成数据</a:t>
-            </a:r>
-            <a:endParaRPr lang="zh-CN" sz="1200" dirty="0"/>
-          </a:p>
-        </p:txBody>
-      </p:sp>
-      <p:sp>
-        <p:nvSpPr>
-          <p:cNvPr id="5" name="T33/title"/>
-          <p:cNvSpPr/>
-          <p:nvPr/>
-        </p:nvSpPr>
-        <p:spPr>
-          <a:xfrm>
-            <a:off x="457200" y="381000"/>
-            <a:ext cx="11277600" cy="400050"/>
-          </a:xfrm>
-          <a:prstGeom prst="rect">
-            <a:avLst/>
-          </a:prstGeom>
-          <a:noFill/>
-          <a:ln/>
-        </p:spPr>
-        <p:txBody>
-          <a:bodyPr wrap="none" lIns="0" tIns="0" rIns="0" bIns="0" rtlCol="0" anchor="t"/>
-          <a:lstStyle/>
-          <a:p>
-            <a:pPr algn="l" indent="0" marL="0">
-              <a:lnSpc>
-                <a:spcPts val="2856"/>
-              </a:lnSpc>
-              <a:buNone/>
-            </a:pPr>
-            <a:r>
-              <a:rPr lang="zh-CN" altLang="en-US" sz="2550" b="1" dirty="0">
+                <a:spcPts val="3360"/>
+              </a:lnSpc>
+              <a:buNone/>
+            </a:pPr>
+            <a:r>
+              <a:rPr lang="zh-CN" altLang="en-US" sz="3000" b="1" dirty="0">
                 <a:solidFill>
                   <a:srgbClr val="1C2430"/>
                 </a:solidFill>
@@ -4017,26 +4002,49 @@
               </a:rPr>
               <a:t>同维度方法比较</a:t>
             </a:r>
-            <a:endParaRPr lang="zh-CN" sz="2550" dirty="0"/>
-          </a:p>
-        </p:txBody>
-      </p:sp>
-      <p:sp>
-        <p:nvSpPr>
-          <p:cNvPr id="6" name="T33/header-rule"/>
-          <p:cNvSpPr/>
-          <p:nvPr/>
-        </p:nvSpPr>
-        <p:spPr>
-          <a:xfrm>
-            <a:off x="457200" y="876300"/>
+            <a:endParaRPr lang="zh-CN" sz="3000" dirty="0"/>
+          </a:p>
+        </p:txBody>
+      </p:sp>
+      <p:sp>
+        <p:nvSpPr>
+          <p:cNvPr id="5" name="T33/header-rule"/>
+          <p:cNvSpPr/>
+          <p:nvPr/>
+        </p:nvSpPr>
+        <p:spPr>
+          <a:xfrm>
+            <a:off x="457200" y="752475"/>
             <a:ext cx="11277600" cy="0"/>
           </a:xfrm>
           <a:prstGeom prst="line">
             <a:avLst/>
           </a:prstGeom>
           <a:noFill/>
-          <a:ln w="11430">
+          <a:ln w="10478">
+            <a:solidFill>
+              <a:srgbClr val="BEC8D4"/>
+            </a:solidFill>
+            <a:prstDash val="solid"/>
+          </a:ln>
+        </p:spPr>
+      </p:sp>
+      <p:sp>
+        <p:nvSpPr>
+          <p:cNvPr id="6" name="T33/header-accent"/>
+          <p:cNvSpPr/>
+          <p:nvPr/>
+        </p:nvSpPr>
+        <p:spPr>
+          <a:xfrm>
+            <a:off x="457200" y="752475"/>
+            <a:ext cx="704850" cy="0"/>
+          </a:xfrm>
+          <a:prstGeom prst="line">
+            <a:avLst/>
+          </a:prstGeom>
+          <a:noFill/>
+          <a:ln w="28575">
             <a:solidFill>
               <a:srgbClr val="173C70"/>
             </a:solidFill>
@@ -4052,8 +4060,8 @@
         </p:nvSpPr>
         <p:spPr>
           <a:xfrm>
-            <a:off x="457200" y="5791200"/>
-            <a:ext cx="8153400" cy="266700"/>
+            <a:off x="457200" y="5776532"/>
+            <a:ext cx="8153400" cy="276987"/>
           </a:xfrm>
           <a:prstGeom prst="rect">
             <a:avLst/>
@@ -4101,7 +4109,7 @@
           </p:nvPr>
         </p:nvGraphicFramePr>
         <p:xfrm>
-          <a:off x="457200" y="1409700"/>
+          <a:off x="457200" y="1226534"/>
           <a:ext cx="8153400" cy="3072194"/>
         </p:xfrm>
         <a:graphic>
@@ -5316,7 +5324,7 @@
         </p:nvSpPr>
         <p:spPr>
           <a:xfrm>
-            <a:off x="457200" y="4548569"/>
+            <a:off x="457200" y="4365403"/>
             <a:ext cx="8153400" cy="209550"/>
           </a:xfrm>
           <a:prstGeom prst="rect">
@@ -5358,7 +5366,7 @@
         </p:nvSpPr>
         <p:spPr>
           <a:xfrm>
-            <a:off x="8934450" y="3543300"/>
+            <a:off x="8934450" y="3442240"/>
             <a:ext cx="2800350" cy="0"/>
           </a:xfrm>
           <a:prstGeom prst="line">
@@ -5381,14 +5389,14 @@
         </p:nvSpPr>
         <p:spPr>
           <a:xfrm>
-            <a:off x="8934450" y="1428750"/>
+            <a:off x="8934450" y="1245584"/>
             <a:ext cx="47625" cy="295275"/>
           </a:xfrm>
           <a:prstGeom prst="rect">
             <a:avLst/>
           </a:prstGeom>
           <a:solidFill>
-            <a:srgbClr val="173C70"/>
+            <a:srgbClr val="235E96"/>
           </a:solidFill>
           <a:ln w="12700">
             <a:solidFill>
@@ -5408,7 +5416,7 @@
         </p:nvSpPr>
         <p:spPr>
           <a:xfrm>
-            <a:off x="9086850" y="1428750"/>
+            <a:off x="9086850" y="1245584"/>
             <a:ext cx="2647950" cy="304800"/>
           </a:xfrm>
           <a:prstGeom prst="rect">
@@ -5423,14 +5431,14 @@
           <a:p>
             <a:pPr algn="l" indent="0" marL="0">
               <a:lnSpc>
-                <a:spcPts val="2070"/>
-              </a:lnSpc>
-              <a:buNone/>
-            </a:pPr>
-            <a:r>
-              <a:rPr lang="zh-CN" altLang="en-US" sz="1800" b="1" dirty="0">
-                <a:solidFill>
-                  <a:srgbClr val="173C70"/>
+                <a:spcPts val="2242"/>
+              </a:lnSpc>
+              <a:buNone/>
+            </a:pPr>
+            <a:r>
+              <a:rPr lang="zh-CN" altLang="en-US" sz="1950" b="1" dirty="0">
+                <a:solidFill>
+                  <a:srgbClr val="235E96"/>
                 </a:solidFill>
                 <a:latin typeface="Noto Sans CJK SC" pitchFamily="34" charset="0"/>
                 <a:ea typeface="Noto Sans CJK SC" pitchFamily="34" charset="-122"/>
@@ -5438,7 +5446,7 @@
               </a:rPr>
               <a:t>比较维度</a:t>
             </a:r>
-            <a:endParaRPr lang="zh-CN" sz="1800" dirty="0"/>
+            <a:endParaRPr lang="zh-CN" sz="1950" dirty="0"/>
           </a:p>
         </p:txBody>
       </p:sp>
@@ -5450,8 +5458,8 @@
         </p:nvSpPr>
         <p:spPr>
           <a:xfrm>
-            <a:off x="9086850" y="1847850"/>
-            <a:ext cx="2647950" cy="1600200"/>
+            <a:off x="9086850" y="1664684"/>
+            <a:ext cx="2647950" cy="1682305"/>
           </a:xfrm>
           <a:prstGeom prst="rect">
             <a:avLst/>
@@ -5465,12 +5473,12 @@
           <a:p>
             <a:pPr algn="l" indent="0" marL="0">
               <a:lnSpc>
-                <a:spcPts val="2139"/>
-              </a:lnSpc>
-              <a:buNone/>
-            </a:pPr>
-            <a:r>
-              <a:rPr lang="zh-CN" altLang="en-US" sz="1725" dirty="0">
+                <a:spcPts val="2232"/>
+              </a:lnSpc>
+              <a:buNone/>
+            </a:pPr>
+            <a:r>
+              <a:rPr lang="zh-CN" altLang="en-US" sz="1800" dirty="0">
                 <a:solidFill>
                   <a:srgbClr val="1C2430"/>
                 </a:solidFill>
@@ -5478,19 +5486,33 @@
                 <a:ea typeface="Noto Sans CJK SC" pitchFamily="34" charset="-122"/>
                 <a:cs typeface="Noto Sans CJK SC" pitchFamily="34" charset="-120"/>
               </a:rPr>
-              <a:t>只比较含义一致的输入与接</a:t>
-            </a:r>
-            <a:endParaRPr lang="zh-CN" sz="1725" dirty="0"/>
-          </a:p>
-          <a:p>
+              <a:t>只比较含义一致的</a:t>
+            </a:r>
             <a:pPr algn="l" indent="0" marL="0">
               <a:lnSpc>
-                <a:spcPts val="2139"/>
-              </a:lnSpc>
-              <a:buNone/>
-            </a:pPr>
-            <a:r>
-              <a:rPr lang="zh-CN" altLang="en-US" sz="1725" dirty="0">
+                <a:spcPts val="2232"/>
+              </a:lnSpc>
+              <a:buNone/>
+            </a:pPr>
+            <a:r>
+              <a:rPr lang="zh-CN" altLang="en-US" sz="1800" b="1" dirty="0">
+                <a:solidFill>
+                  <a:srgbClr val="235E96"/>
+                </a:solidFill>
+                <a:latin typeface="Noto Sans CJK SC" pitchFamily="34" charset="0"/>
+                <a:ea typeface="Noto Sans CJK SC" pitchFamily="34" charset="-122"/>
+                <a:cs typeface="Noto Sans CJK SC" pitchFamily="34" charset="-120"/>
+              </a:rPr>
+              <a:t>输入</a:t>
+            </a:r>
+            <a:pPr algn="l" indent="0" marL="0">
+              <a:lnSpc>
+                <a:spcPts val="2232"/>
+              </a:lnSpc>
+              <a:buNone/>
+            </a:pPr>
+            <a:r>
+              <a:rPr lang="zh-CN" altLang="en-US" sz="1800" dirty="0">
                 <a:solidFill>
                   <a:srgbClr val="1C2430"/>
                 </a:solidFill>
@@ -5498,19 +5520,19 @@
                 <a:ea typeface="Noto Sans CJK SC" pitchFamily="34" charset="-122"/>
                 <a:cs typeface="Noto Sans CJK SC" pitchFamily="34" charset="-120"/>
               </a:rPr>
-              <a:t>口</a:t>
-            </a:r>
-            <a:endParaRPr lang="zh-CN" sz="1725" dirty="0"/>
+              <a:t>与</a:t>
+            </a:r>
+            <a:endParaRPr lang="zh-CN" sz="1800" dirty="0"/>
           </a:p>
           <a:p>
             <a:pPr algn="l" indent="0" marL="0">
               <a:lnSpc>
-                <a:spcPts val="2139"/>
-              </a:lnSpc>
-              <a:buNone/>
-            </a:pPr>
-            <a:r>
-              <a:rPr lang="zh-CN" altLang="en-US" sz="1725" dirty="0">
+                <a:spcPts val="2232"/>
+              </a:lnSpc>
+              <a:buNone/>
+            </a:pPr>
+            <a:r>
+              <a:rPr lang="zh-CN" altLang="en-US" sz="1800" dirty="0">
                 <a:solidFill>
                   <a:srgbClr val="1C2430"/>
                 </a:solidFill>
@@ -5518,19 +5540,19 @@
                 <a:ea typeface="Noto Sans CJK SC" pitchFamily="34" charset="-122"/>
                 <a:cs typeface="Noto Sans CJK SC" pitchFamily="34" charset="-120"/>
               </a:rPr>
-              <a:t>数值比较须使用相同任务和</a:t>
-            </a:r>
-            <a:endParaRPr lang="zh-CN" sz="1725" dirty="0"/>
+              <a:t>接口</a:t>
+            </a:r>
+            <a:endParaRPr lang="zh-CN" sz="1800" dirty="0"/>
           </a:p>
           <a:p>
             <a:pPr algn="l" indent="0" marL="0">
               <a:lnSpc>
-                <a:spcPts val="2139"/>
-              </a:lnSpc>
-              <a:buNone/>
-            </a:pPr>
-            <a:r>
-              <a:rPr lang="zh-CN" altLang="en-US" sz="1725" dirty="0">
+                <a:spcPts val="2232"/>
+              </a:lnSpc>
+              <a:buNone/>
+            </a:pPr>
+            <a:r>
+              <a:rPr lang="zh-CN" altLang="en-US" sz="1800" dirty="0">
                 <a:solidFill>
                   <a:srgbClr val="1C2430"/>
                 </a:solidFill>
@@ -5538,9 +5560,46 @@
                 <a:ea typeface="Noto Sans CJK SC" pitchFamily="34" charset="-122"/>
                 <a:cs typeface="Noto Sans CJK SC" pitchFamily="34" charset="-120"/>
               </a:rPr>
-              <a:t>评价单位</a:t>
-            </a:r>
-            <a:endParaRPr lang="zh-CN" sz="1725" dirty="0"/>
+              <a:t>数值比较须使用相同任务</a:t>
+            </a:r>
+            <a:endParaRPr lang="zh-CN" sz="1800" dirty="0"/>
+          </a:p>
+          <a:p>
+            <a:pPr algn="l" indent="0" marL="0">
+              <a:lnSpc>
+                <a:spcPts val="2232"/>
+              </a:lnSpc>
+              <a:buNone/>
+            </a:pPr>
+            <a:r>
+              <a:rPr lang="zh-CN" altLang="en-US" sz="1800" dirty="0">
+                <a:solidFill>
+                  <a:srgbClr val="1C2430"/>
+                </a:solidFill>
+                <a:latin typeface="Noto Sans CJK SC" pitchFamily="34" charset="0"/>
+                <a:ea typeface="Noto Sans CJK SC" pitchFamily="34" charset="-122"/>
+                <a:cs typeface="Noto Sans CJK SC" pitchFamily="34" charset="-120"/>
+              </a:rPr>
+              <a:t>和评价</a:t>
+            </a:r>
+            <a:pPr algn="l" indent="0" marL="0">
+              <a:lnSpc>
+                <a:spcPts val="2232"/>
+              </a:lnSpc>
+              <a:buNone/>
+            </a:pPr>
+            <a:r>
+              <a:rPr lang="zh-CN" altLang="en-US" sz="1800" b="1" dirty="0">
+                <a:solidFill>
+                  <a:srgbClr val="235E96"/>
+                </a:solidFill>
+                <a:latin typeface="Noto Sans CJK SC" pitchFamily="34" charset="0"/>
+                <a:ea typeface="Noto Sans CJK SC" pitchFamily="34" charset="-122"/>
+                <a:cs typeface="Noto Sans CJK SC" pitchFamily="34" charset="-120"/>
+              </a:rPr>
+              <a:t>单位</a:t>
+            </a:r>
+            <a:endParaRPr lang="zh-CN" sz="1800" dirty="0"/>
           </a:p>
         </p:txBody>
       </p:sp>
@@ -5552,8 +5611,8 @@
         </p:nvSpPr>
         <p:spPr>
           <a:xfrm>
-            <a:off x="8934450" y="3905250"/>
-            <a:ext cx="2800350" cy="2095500"/>
+            <a:off x="8934450" y="3813620"/>
+            <a:ext cx="2800350" cy="2180463"/>
           </a:xfrm>
           <a:prstGeom prst="rect">
             <a:avLst/>
@@ -5577,14 +5636,14 @@
         </p:nvSpPr>
         <p:spPr>
           <a:xfrm>
-            <a:off x="9048750" y="3790950"/>
-            <a:ext cx="1409700" cy="320040"/>
+            <a:off x="9048750" y="3699320"/>
+            <a:ext cx="1504950" cy="342900"/>
           </a:xfrm>
           <a:prstGeom prst="rect">
             <a:avLst/>
           </a:prstGeom>
           <a:solidFill>
-            <a:srgbClr val="903543"/>
+            <a:srgbClr val="A24736"/>
           </a:solidFill>
           <a:ln w="12700">
             <a:solidFill>
@@ -5604,8 +5663,8 @@
         </p:nvSpPr>
         <p:spPr>
           <a:xfrm>
-            <a:off x="9153525" y="3819525"/>
-            <a:ext cx="1200150" cy="262890"/>
+            <a:off x="9153525" y="3727895"/>
+            <a:ext cx="1295400" cy="285750"/>
           </a:xfrm>
           <a:prstGeom prst="rect">
             <a:avLst/>
@@ -5619,12 +5678,12 @@
           <a:p>
             <a:pPr algn="l" indent="0" marL="0">
               <a:lnSpc>
-                <a:spcPts val="2070"/>
-              </a:lnSpc>
-              <a:buNone/>
-            </a:pPr>
-            <a:r>
-              <a:rPr lang="zh-CN" altLang="en-US" sz="1800" b="1" dirty="0">
+                <a:spcPts val="2242"/>
+              </a:lnSpc>
+              <a:buNone/>
+            </a:pPr>
+            <a:r>
+              <a:rPr lang="zh-CN" altLang="en-US" sz="1950" b="1" dirty="0">
                 <a:solidFill>
                   <a:srgbClr val="FFFFFF"/>
                 </a:solidFill>
@@ -5634,7 +5693,7 @@
               </a:rPr>
               <a:t>不可比条件</a:t>
             </a:r>
-            <a:endParaRPr lang="zh-CN" sz="1800" dirty="0"/>
+            <a:endParaRPr lang="zh-CN" sz="1950" dirty="0"/>
           </a:p>
         </p:txBody>
       </p:sp>
@@ -5646,8 +5705,8 @@
         </p:nvSpPr>
         <p:spPr>
           <a:xfrm>
-            <a:off x="9067800" y="4253865"/>
-            <a:ext cx="2533650" cy="1651635"/>
+            <a:off x="9067800" y="4185095"/>
+            <a:ext cx="2533650" cy="1713738"/>
           </a:xfrm>
           <a:prstGeom prst="rect">
             <a:avLst/>
@@ -5661,12 +5720,12 @@
           <a:p>
             <a:pPr algn="l" indent="0" marL="0">
               <a:lnSpc>
-                <a:spcPts val="2139"/>
-              </a:lnSpc>
-              <a:buNone/>
-            </a:pPr>
-            <a:r>
-              <a:rPr lang="zh-CN" altLang="en-US" sz="1725" dirty="0">
+                <a:spcPts val="2232"/>
+              </a:lnSpc>
+              <a:buNone/>
+            </a:pPr>
+            <a:r>
+              <a:rPr lang="zh-CN" altLang="en-US" sz="1800" dirty="0">
                 <a:solidFill>
                   <a:srgbClr val="1C2430"/>
                 </a:solidFill>
@@ -5674,19 +5733,19 @@
                 <a:ea typeface="Noto Sans CJK SC" pitchFamily="34" charset="-122"/>
                 <a:cs typeface="Noto Sans CJK SC" pitchFamily="34" charset="-120"/>
               </a:rPr>
-              <a:t>列出数据、预算和任务范</a:t>
-            </a:r>
-            <a:endParaRPr lang="zh-CN" sz="1725" dirty="0"/>
+              <a:t>列出数据、预算和任务</a:t>
+            </a:r>
+            <a:endParaRPr lang="zh-CN" sz="1800" dirty="0"/>
           </a:p>
           <a:p>
             <a:pPr algn="l" indent="0" marL="0">
               <a:lnSpc>
-                <a:spcPts val="2139"/>
-              </a:lnSpc>
-              <a:buNone/>
-            </a:pPr>
-            <a:r>
-              <a:rPr lang="zh-CN" altLang="en-US" sz="1725" dirty="0">
+                <a:spcPts val="2232"/>
+              </a:lnSpc>
+              <a:buNone/>
+            </a:pPr>
+            <a:r>
+              <a:rPr lang="zh-CN" altLang="en-US" sz="1800" dirty="0">
                 <a:solidFill>
                   <a:srgbClr val="1C2430"/>
                 </a:solidFill>
@@ -5694,19 +5753,19 @@
                 <a:ea typeface="Noto Sans CJK SC" pitchFamily="34" charset="-122"/>
                 <a:cs typeface="Noto Sans CJK SC" pitchFamily="34" charset="-120"/>
               </a:rPr>
-              <a:t>围的差异</a:t>
-            </a:r>
-            <a:endParaRPr lang="zh-CN" sz="1725" dirty="0"/>
+              <a:t>范围的差异</a:t>
+            </a:r>
+            <a:endParaRPr lang="zh-CN" sz="1800" dirty="0"/>
           </a:p>
           <a:p>
             <a:pPr algn="l" indent="0" marL="0">
               <a:lnSpc>
-                <a:spcPts val="2139"/>
-              </a:lnSpc>
-              <a:buNone/>
-            </a:pPr>
-            <a:r>
-              <a:rPr lang="zh-CN" altLang="en-US" sz="1725" dirty="0">
+                <a:spcPts val="2232"/>
+              </a:lnSpc>
+              <a:buNone/>
+            </a:pPr>
+            <a:r>
+              <a:rPr lang="zh-CN" altLang="en-US" sz="1800" dirty="0">
                 <a:solidFill>
                   <a:srgbClr val="1C2430"/>
                 </a:solidFill>
@@ -5714,19 +5773,19 @@
                 <a:ea typeface="Noto Sans CJK SC" pitchFamily="34" charset="-122"/>
                 <a:cs typeface="Noto Sans CJK SC" pitchFamily="34" charset="-120"/>
               </a:rPr>
-              <a:t>报告不可比原因及需要补</a:t>
-            </a:r>
-            <a:endParaRPr lang="zh-CN" sz="1725" dirty="0"/>
+              <a:t>报告不可比原因及需要</a:t>
+            </a:r>
+            <a:endParaRPr lang="zh-CN" sz="1800" dirty="0"/>
           </a:p>
           <a:p>
             <a:pPr algn="l" indent="0" marL="0">
               <a:lnSpc>
-                <a:spcPts val="2139"/>
-              </a:lnSpc>
-              <a:buNone/>
-            </a:pPr>
-            <a:r>
-              <a:rPr lang="zh-CN" altLang="en-US" sz="1725" dirty="0">
+                <a:spcPts val="2232"/>
+              </a:lnSpc>
+              <a:buNone/>
+            </a:pPr>
+            <a:r>
+              <a:rPr lang="zh-CN" altLang="en-US" sz="1800" dirty="0">
                 <a:solidFill>
                   <a:srgbClr val="1C2430"/>
                 </a:solidFill>
@@ -5734,9 +5793,26 @@
                 <a:ea typeface="Noto Sans CJK SC" pitchFamily="34" charset="-122"/>
                 <a:cs typeface="Noto Sans CJK SC" pitchFamily="34" charset="-120"/>
               </a:rPr>
-              <a:t>充的对照</a:t>
-            </a:r>
-            <a:endParaRPr lang="zh-CN" sz="1725" dirty="0"/>
+              <a:t>补充的</a:t>
+            </a:r>
+            <a:pPr algn="l" indent="0" marL="0">
+              <a:lnSpc>
+                <a:spcPts val="2232"/>
+              </a:lnSpc>
+              <a:buNone/>
+            </a:pPr>
+            <a:r>
+              <a:rPr lang="zh-CN" altLang="en-US" sz="1800" b="1" dirty="0">
+                <a:solidFill>
+                  <a:srgbClr val="A24736"/>
+                </a:solidFill>
+                <a:latin typeface="Noto Sans CJK SC" pitchFamily="34" charset="0"/>
+                <a:ea typeface="Noto Sans CJK SC" pitchFamily="34" charset="-122"/>
+                <a:cs typeface="Noto Sans CJK SC" pitchFamily="34" charset="-120"/>
+              </a:rPr>
+              <a:t>对照</a:t>
+            </a:r>
+            <a:endParaRPr lang="zh-CN" sz="1800" dirty="0"/>
           </a:p>
         </p:txBody>
       </p:sp>
@@ -5776,7 +5852,7 @@
                 <a:ea typeface="Noto Sans CJK SC" pitchFamily="34" charset="-122"/>
                 <a:cs typeface="Noto Sans CJK SC" pitchFamily="34" charset="-120"/>
               </a:rPr>
-              <a:t>T1 · 2026 · 待替换</a:t>
+              <a:t>T1 · 2026 · 书目占位；图表均为合成示例</a:t>
             </a:r>
             <a:endParaRPr lang="zh-CN" sz="1125" dirty="0"/>
           </a:p>
@@ -5885,14 +5961,14 @@
       </p:sp>
       <p:sp>
         <p:nvSpPr>
-          <p:cNvPr id="4" name="T34/kicker"/>
-          <p:cNvSpPr/>
-          <p:nvPr/>
-        </p:nvSpPr>
-        <p:spPr>
-          <a:xfrm>
-            <a:off x="457200" y="152400"/>
-            <a:ext cx="11277600" cy="190500"/>
+          <p:cNvPr id="4" name="T34/title"/>
+          <p:cNvSpPr/>
+          <p:nvPr/>
+        </p:nvSpPr>
+        <p:spPr>
+          <a:xfrm>
+            <a:off x="457200" y="209550"/>
+            <a:ext cx="11277600" cy="438150"/>
           </a:xfrm>
           <a:prstGeom prst="rect">
             <a:avLst/>
@@ -5906,54 +5982,12 @@
           <a:p>
             <a:pPr algn="l" indent="0" marL="0">
               <a:lnSpc>
-                <a:spcPts val="1320"/>
-              </a:lnSpc>
-              <a:buNone/>
-            </a:pPr>
-            <a:r>
-              <a:rPr lang="zh-CN" altLang="en-US" sz="1200" dirty="0">
-                <a:solidFill>
-                  <a:srgbClr val="515B68"/>
-                </a:solidFill>
-                <a:latin typeface="Noto Sans CJK SC" pitchFamily="34" charset="0"/>
-                <a:ea typeface="Noto Sans CJK SC" pitchFamily="34" charset="-122"/>
-                <a:cs typeface="Noto Sans CJK SC" pitchFamily="34" charset="-120"/>
-              </a:rPr>
-              <a:t>结构模板 / 占位说明与合成数据</a:t>
-            </a:r>
-            <a:endParaRPr lang="zh-CN" sz="1200" dirty="0"/>
-          </a:p>
-        </p:txBody>
-      </p:sp>
-      <p:sp>
-        <p:nvSpPr>
-          <p:cNvPr id="5" name="T34/title"/>
-          <p:cNvSpPr/>
-          <p:nvPr/>
-        </p:nvSpPr>
-        <p:spPr>
-          <a:xfrm>
-            <a:off x="457200" y="381000"/>
-            <a:ext cx="11277600" cy="400050"/>
-          </a:xfrm>
-          <a:prstGeom prst="rect">
-            <a:avLst/>
-          </a:prstGeom>
-          <a:noFill/>
-          <a:ln/>
-        </p:spPr>
-        <p:txBody>
-          <a:bodyPr wrap="none" lIns="0" tIns="0" rIns="0" bIns="0" rtlCol="0" anchor="t"/>
-          <a:lstStyle/>
-          <a:p>
-            <a:pPr algn="l" indent="0" marL="0">
-              <a:lnSpc>
-                <a:spcPts val="2856"/>
-              </a:lnSpc>
-              <a:buNone/>
-            </a:pPr>
-            <a:r>
-              <a:rPr lang="zh-CN" altLang="en-US" sz="2550" b="1" dirty="0">
+                <a:spcPts val="3360"/>
+              </a:lnSpc>
+              <a:buNone/>
+            </a:pPr>
+            <a:r>
+              <a:rPr lang="zh-CN" altLang="en-US" sz="3000" b="1" dirty="0">
                 <a:solidFill>
                   <a:srgbClr val="1C2430"/>
                 </a:solidFill>
@@ -5963,26 +5997,49 @@
               </a:rPr>
               <a:t>研究进展与方法演化</a:t>
             </a:r>
-            <a:endParaRPr lang="zh-CN" sz="2550" dirty="0"/>
-          </a:p>
-        </p:txBody>
-      </p:sp>
-      <p:sp>
-        <p:nvSpPr>
-          <p:cNvPr id="6" name="T34/header-rule"/>
-          <p:cNvSpPr/>
-          <p:nvPr/>
-        </p:nvSpPr>
-        <p:spPr>
-          <a:xfrm>
-            <a:off x="457200" y="876300"/>
+            <a:endParaRPr lang="zh-CN" sz="3000" dirty="0"/>
+          </a:p>
+        </p:txBody>
+      </p:sp>
+      <p:sp>
+        <p:nvSpPr>
+          <p:cNvPr id="5" name="T34/header-rule"/>
+          <p:cNvSpPr/>
+          <p:nvPr/>
+        </p:nvSpPr>
+        <p:spPr>
+          <a:xfrm>
+            <a:off x="457200" y="752475"/>
             <a:ext cx="11277600" cy="0"/>
           </a:xfrm>
           <a:prstGeom prst="line">
             <a:avLst/>
           </a:prstGeom>
           <a:noFill/>
-          <a:ln w="11430">
+          <a:ln w="10478">
+            <a:solidFill>
+              <a:srgbClr val="BEC8D4"/>
+            </a:solidFill>
+            <a:prstDash val="solid"/>
+          </a:ln>
+        </p:spPr>
+      </p:sp>
+      <p:sp>
+        <p:nvSpPr>
+          <p:cNvPr id="6" name="T34/header-accent"/>
+          <p:cNvSpPr/>
+          <p:nvPr/>
+        </p:nvSpPr>
+        <p:spPr>
+          <a:xfrm>
+            <a:off x="457200" y="752475"/>
+            <a:ext cx="704850" cy="0"/>
+          </a:xfrm>
+          <a:prstGeom prst="line">
+            <a:avLst/>
+          </a:prstGeom>
+          <a:noFill/>
+          <a:ln w="28575">
             <a:solidFill>
               <a:srgbClr val="173C70"/>
             </a:solidFill>
@@ -5998,7 +6055,7 @@
         </p:nvSpPr>
         <p:spPr>
           <a:xfrm>
-            <a:off x="2762250" y="2114550"/>
+            <a:off x="2762250" y="1958435"/>
             <a:ext cx="685800" cy="0"/>
           </a:xfrm>
           <a:prstGeom prst="line">
@@ -6022,7 +6079,7 @@
         </p:nvSpPr>
         <p:spPr>
           <a:xfrm>
-            <a:off x="5753100" y="2114550"/>
+            <a:off x="5753100" y="1958435"/>
             <a:ext cx="685800" cy="0"/>
           </a:xfrm>
           <a:prstGeom prst="line">
@@ -6046,7 +6103,7 @@
         </p:nvSpPr>
         <p:spPr>
           <a:xfrm>
-            <a:off x="8743950" y="2114550"/>
+            <a:off x="8743950" y="1958435"/>
             <a:ext cx="685800" cy="0"/>
           </a:xfrm>
           <a:prstGeom prst="line">
@@ -6070,14 +6127,14 @@
         </p:nvSpPr>
         <p:spPr>
           <a:xfrm>
-            <a:off x="457200" y="1504950"/>
-            <a:ext cx="2305050" cy="1219200"/>
+            <a:off x="457200" y="1325404"/>
+            <a:ext cx="2305050" cy="1266063"/>
           </a:xfrm>
           <a:prstGeom prst="rect">
             <a:avLst/>
           </a:prstGeom>
           <a:solidFill>
-            <a:srgbClr val="FFFFFF"/>
+            <a:srgbClr val="EAF2FA"/>
           </a:solidFill>
           <a:ln w="11430">
             <a:solidFill>
@@ -6095,7 +6152,7 @@
         </p:nvSpPr>
         <p:spPr>
           <a:xfrm>
-            <a:off x="457200" y="1504950"/>
+            <a:off x="457200" y="1325404"/>
             <a:ext cx="2305050" cy="0"/>
           </a:xfrm>
           <a:prstGeom prst="line">
@@ -6104,7 +6161,7 @@
           <a:noFill/>
           <a:ln w="19050">
             <a:solidFill>
-              <a:srgbClr val="173C70"/>
+              <a:srgbClr val="235E96"/>
             </a:solidFill>
             <a:prstDash val="solid"/>
           </a:ln>
@@ -6118,7 +6175,7 @@
         </p:nvSpPr>
         <p:spPr>
           <a:xfrm>
-            <a:off x="571500" y="1600200"/>
+            <a:off x="571500" y="1420654"/>
             <a:ext cx="2076450" cy="266700"/>
           </a:xfrm>
           <a:prstGeom prst="rect">
@@ -6140,7 +6197,7 @@
             <a:r>
               <a:rPr lang="zh-CN" altLang="en-US" sz="1800" b="1" dirty="0">
                 <a:solidFill>
-                  <a:srgbClr val="173C70"/>
+                  <a:srgbClr val="235E96"/>
                 </a:solidFill>
                 <a:latin typeface="Noto Sans CJK SC" pitchFamily="34" charset="0"/>
                 <a:ea typeface="Noto Sans CJK SC" pitchFamily="34" charset="-122"/>
@@ -6160,8 +6217,8 @@
         </p:nvSpPr>
         <p:spPr>
           <a:xfrm>
-            <a:off x="571500" y="1914525"/>
-            <a:ext cx="2076450" cy="723900"/>
+            <a:off x="571500" y="1734979"/>
+            <a:ext cx="2076450" cy="770763"/>
           </a:xfrm>
           <a:prstGeom prst="rect">
             <a:avLst/>
@@ -6188,7 +6245,7 @@
                 <a:ea typeface="Noto Sans CJK SC" pitchFamily="34" charset="-122"/>
                 <a:cs typeface="Noto Sans CJK SC" pitchFamily="34" charset="-120"/>
               </a:rPr>
-              <a:t>填写接口与条件</a:t>
+              <a:t>定义输入与任务</a:t>
             </a:r>
             <a:endParaRPr lang="zh-CN" sz="1650" dirty="0"/>
           </a:p>
@@ -6202,14 +6259,14 @@
         </p:nvSpPr>
         <p:spPr>
           <a:xfrm>
-            <a:off x="3448050" y="1504950"/>
-            <a:ext cx="2305050" cy="1219200"/>
+            <a:off x="3448050" y="1325404"/>
+            <a:ext cx="2305050" cy="1266063"/>
           </a:xfrm>
           <a:prstGeom prst="rect">
             <a:avLst/>
           </a:prstGeom>
           <a:solidFill>
-            <a:srgbClr val="FFFFFF"/>
+            <a:srgbClr val="EAF2FA"/>
           </a:solidFill>
           <a:ln w="11430">
             <a:solidFill>
@@ -6227,7 +6284,7 @@
         </p:nvSpPr>
         <p:spPr>
           <a:xfrm>
-            <a:off x="3448050" y="1504950"/>
+            <a:off x="3448050" y="1325404"/>
             <a:ext cx="2305050" cy="0"/>
           </a:xfrm>
           <a:prstGeom prst="line">
@@ -6236,7 +6293,7 @@
           <a:noFill/>
           <a:ln w="19050">
             <a:solidFill>
-              <a:srgbClr val="173C70"/>
+              <a:srgbClr val="235E96"/>
             </a:solidFill>
             <a:prstDash val="solid"/>
           </a:ln>
@@ -6250,7 +6307,7 @@
         </p:nvSpPr>
         <p:spPr>
           <a:xfrm>
-            <a:off x="3562350" y="1600200"/>
+            <a:off x="3562350" y="1420654"/>
             <a:ext cx="2076450" cy="266700"/>
           </a:xfrm>
           <a:prstGeom prst="rect">
@@ -6272,7 +6329,7 @@
             <a:r>
               <a:rPr lang="zh-CN" altLang="en-US" sz="1800" b="1" dirty="0">
                 <a:solidFill>
-                  <a:srgbClr val="173C70"/>
+                  <a:srgbClr val="235E96"/>
                 </a:solidFill>
                 <a:latin typeface="Noto Sans CJK SC" pitchFamily="34" charset="0"/>
                 <a:ea typeface="Noto Sans CJK SC" pitchFamily="34" charset="-122"/>
@@ -6292,8 +6349,8 @@
         </p:nvSpPr>
         <p:spPr>
           <a:xfrm>
-            <a:off x="3562350" y="1914525"/>
-            <a:ext cx="2076450" cy="723900"/>
+            <a:off x="3562350" y="1734979"/>
+            <a:ext cx="2076450" cy="770763"/>
           </a:xfrm>
           <a:prstGeom prst="rect">
             <a:avLst/>
@@ -6320,7 +6377,7 @@
                 <a:ea typeface="Noto Sans CJK SC" pitchFamily="34" charset="-122"/>
                 <a:cs typeface="Noto Sans CJK SC" pitchFamily="34" charset="-120"/>
               </a:rPr>
-              <a:t>填写接口与条件</a:t>
+              <a:t>定位新模块</a:t>
             </a:r>
             <a:endParaRPr lang="zh-CN" sz="1650" dirty="0"/>
           </a:p>
@@ -6334,14 +6391,14 @@
         </p:nvSpPr>
         <p:spPr>
           <a:xfrm>
-            <a:off x="6438900" y="1504950"/>
-            <a:ext cx="2305050" cy="1219200"/>
+            <a:off x="6438900" y="1325404"/>
+            <a:ext cx="2305050" cy="1266063"/>
           </a:xfrm>
           <a:prstGeom prst="rect">
             <a:avLst/>
           </a:prstGeom>
           <a:solidFill>
-            <a:srgbClr val="FFFFFF"/>
+            <a:srgbClr val="EAF2FA"/>
           </a:solidFill>
           <a:ln w="11430">
             <a:solidFill>
@@ -6359,7 +6416,7 @@
         </p:nvSpPr>
         <p:spPr>
           <a:xfrm>
-            <a:off x="6438900" y="1504950"/>
+            <a:off x="6438900" y="1325404"/>
             <a:ext cx="2305050" cy="0"/>
           </a:xfrm>
           <a:prstGeom prst="line">
@@ -6368,7 +6425,7 @@
           <a:noFill/>
           <a:ln w="19050">
             <a:solidFill>
-              <a:srgbClr val="173C70"/>
+              <a:srgbClr val="235E96"/>
             </a:solidFill>
             <a:prstDash val="solid"/>
           </a:ln>
@@ -6382,7 +6439,7 @@
         </p:nvSpPr>
         <p:spPr>
           <a:xfrm>
-            <a:off x="6553200" y="1600200"/>
+            <a:off x="6553200" y="1420654"/>
             <a:ext cx="2076450" cy="266700"/>
           </a:xfrm>
           <a:prstGeom prst="rect">
@@ -6404,7 +6461,7 @@
             <a:r>
               <a:rPr lang="zh-CN" altLang="en-US" sz="1800" b="1" dirty="0">
                 <a:solidFill>
-                  <a:srgbClr val="173C70"/>
+                  <a:srgbClr val="235E96"/>
                 </a:solidFill>
                 <a:latin typeface="Noto Sans CJK SC" pitchFamily="34" charset="0"/>
                 <a:ea typeface="Noto Sans CJK SC" pitchFamily="34" charset="-122"/>
@@ -6424,8 +6481,8 @@
         </p:nvSpPr>
         <p:spPr>
           <a:xfrm>
-            <a:off x="6553200" y="1914525"/>
-            <a:ext cx="2076450" cy="723900"/>
+            <a:off x="6553200" y="1734979"/>
+            <a:ext cx="2076450" cy="770763"/>
           </a:xfrm>
           <a:prstGeom prst="rect">
             <a:avLst/>
@@ -6452,7 +6509,7 @@
                 <a:ea typeface="Noto Sans CJK SC" pitchFamily="34" charset="-122"/>
                 <a:cs typeface="Noto Sans CJK SC" pitchFamily="34" charset="-120"/>
               </a:rPr>
-              <a:t>填写接口与条件</a:t>
+              <a:t>检查验证范围</a:t>
             </a:r>
             <a:endParaRPr lang="zh-CN" sz="1650" dirty="0"/>
           </a:p>
@@ -6466,14 +6523,14 @@
         </p:nvSpPr>
         <p:spPr>
           <a:xfrm>
-            <a:off x="9429750" y="1504950"/>
-            <a:ext cx="2305050" cy="1219200"/>
+            <a:off x="9429750" y="1325404"/>
+            <a:ext cx="2305050" cy="1266063"/>
           </a:xfrm>
           <a:prstGeom prst="rect">
             <a:avLst/>
           </a:prstGeom>
           <a:solidFill>
-            <a:srgbClr val="FFFFFF"/>
+            <a:srgbClr val="EAF2FA"/>
           </a:solidFill>
           <a:ln w="11430">
             <a:solidFill>
@@ -6491,7 +6548,7 @@
         </p:nvSpPr>
         <p:spPr>
           <a:xfrm>
-            <a:off x="9429750" y="1504950"/>
+            <a:off x="9429750" y="1325404"/>
             <a:ext cx="2305050" cy="0"/>
           </a:xfrm>
           <a:prstGeom prst="line">
@@ -6500,7 +6557,7 @@
           <a:noFill/>
           <a:ln w="19050">
             <a:solidFill>
-              <a:srgbClr val="173C70"/>
+              <a:srgbClr val="235E96"/>
             </a:solidFill>
             <a:prstDash val="solid"/>
           </a:ln>
@@ -6514,7 +6571,7 @@
         </p:nvSpPr>
         <p:spPr>
           <a:xfrm>
-            <a:off x="9544050" y="1600200"/>
+            <a:off x="9544050" y="1420654"/>
             <a:ext cx="2076450" cy="266700"/>
           </a:xfrm>
           <a:prstGeom prst="rect">
@@ -6536,7 +6593,7 @@
             <a:r>
               <a:rPr lang="zh-CN" altLang="en-US" sz="1800" b="1" dirty="0">
                 <a:solidFill>
-                  <a:srgbClr val="173C70"/>
+                  <a:srgbClr val="235E96"/>
                 </a:solidFill>
                 <a:latin typeface="Noto Sans CJK SC" pitchFamily="34" charset="0"/>
                 <a:ea typeface="Noto Sans CJK SC" pitchFamily="34" charset="-122"/>
@@ -6556,8 +6613,8 @@
         </p:nvSpPr>
         <p:spPr>
           <a:xfrm>
-            <a:off x="9544050" y="1914525"/>
-            <a:ext cx="2076450" cy="723900"/>
+            <a:off x="9544050" y="1734979"/>
+            <a:ext cx="2076450" cy="770763"/>
           </a:xfrm>
           <a:prstGeom prst="rect">
             <a:avLst/>
@@ -6584,7 +6641,7 @@
                 <a:ea typeface="Noto Sans CJK SC" pitchFamily="34" charset="-122"/>
                 <a:cs typeface="Noto Sans CJK SC" pitchFamily="34" charset="-120"/>
               </a:rPr>
-              <a:t>填写接口与条件</a:t>
+              <a:t>明确仍缺的证据</a:t>
             </a:r>
             <a:endParaRPr lang="zh-CN" sz="1650" dirty="0"/>
           </a:p>
@@ -6598,7 +6655,7 @@
         </p:nvSpPr>
         <p:spPr>
           <a:xfrm>
-            <a:off x="457200" y="6019800"/>
+            <a:off x="457200" y="6013895"/>
             <a:ext cx="3524250" cy="0"/>
           </a:xfrm>
           <a:prstGeom prst="line">
@@ -6621,14 +6678,14 @@
         </p:nvSpPr>
         <p:spPr>
           <a:xfrm>
-            <a:off x="457200" y="3714750"/>
+            <a:off x="457200" y="3619500"/>
             <a:ext cx="47625" cy="295275"/>
           </a:xfrm>
           <a:prstGeom prst="rect">
             <a:avLst/>
           </a:prstGeom>
           <a:solidFill>
-            <a:srgbClr val="173C70"/>
+            <a:srgbClr val="235E96"/>
           </a:solidFill>
           <a:ln w="12700">
             <a:solidFill>
@@ -6648,7 +6705,7 @@
         </p:nvSpPr>
         <p:spPr>
           <a:xfrm>
-            <a:off x="609600" y="3714750"/>
+            <a:off x="609600" y="3619500"/>
             <a:ext cx="3371850" cy="304800"/>
           </a:xfrm>
           <a:prstGeom prst="rect">
@@ -6663,14 +6720,14 @@
           <a:p>
             <a:pPr algn="l" indent="0" marL="0">
               <a:lnSpc>
-                <a:spcPts val="2070"/>
-              </a:lnSpc>
-              <a:buNone/>
-            </a:pPr>
-            <a:r>
-              <a:rPr lang="zh-CN" altLang="en-US" sz="1800" b="1" dirty="0">
-                <a:solidFill>
-                  <a:srgbClr val="173C70"/>
+                <a:spcPts val="2242"/>
+              </a:lnSpc>
+              <a:buNone/>
+            </a:pPr>
+            <a:r>
+              <a:rPr lang="zh-CN" altLang="en-US" sz="1950" b="1" dirty="0">
+                <a:solidFill>
+                  <a:srgbClr val="235E96"/>
                 </a:solidFill>
                 <a:latin typeface="Noto Sans CJK SC" pitchFamily="34" charset="0"/>
                 <a:ea typeface="Noto Sans CJK SC" pitchFamily="34" charset="-122"/>
@@ -6678,7 +6735,7 @@
               </a:rPr>
               <a:t>方法演化</a:t>
             </a:r>
-            <a:endParaRPr lang="zh-CN" sz="1800" dirty="0"/>
+            <a:endParaRPr lang="zh-CN" sz="1950" dirty="0"/>
           </a:p>
         </p:txBody>
       </p:sp>
@@ -6690,8 +6747,8 @@
         </p:nvSpPr>
         <p:spPr>
           <a:xfrm>
-            <a:off x="609600" y="4133850"/>
-            <a:ext cx="3371850" cy="1790700"/>
+            <a:off x="609600" y="4038600"/>
+            <a:ext cx="3371850" cy="1880045"/>
           </a:xfrm>
           <a:prstGeom prst="rect">
             <a:avLst/>
@@ -6705,12 +6762,12 @@
           <a:p>
             <a:pPr algn="l" indent="0" marL="0">
               <a:lnSpc>
-                <a:spcPts val="2139"/>
-              </a:lnSpc>
-              <a:buNone/>
-            </a:pPr>
-            <a:r>
-              <a:rPr lang="zh-CN" altLang="en-US" sz="1725" dirty="0">
+                <a:spcPts val="2232"/>
+              </a:lnSpc>
+              <a:buNone/>
+            </a:pPr>
+            <a:r>
+              <a:rPr lang="zh-CN" altLang="en-US" sz="1800" dirty="0">
                 <a:solidFill>
                   <a:srgbClr val="1C2430"/>
                 </a:solidFill>
@@ -6718,19 +6775,19 @@
                 <a:ea typeface="Noto Sans CJK SC" pitchFamily="34" charset="-122"/>
                 <a:cs typeface="Noto Sans CJK SC" pitchFamily="34" charset="-120"/>
               </a:rPr>
-              <a:t>记录新增的知识、工具或控制接口</a:t>
-            </a:r>
-            <a:endParaRPr lang="zh-CN" sz="1725" dirty="0"/>
+              <a:t>记录新增的知识、工具或控制接</a:t>
+            </a:r>
+            <a:endParaRPr lang="zh-CN" sz="1800" dirty="0"/>
           </a:p>
           <a:p>
             <a:pPr algn="l" indent="0" marL="0">
               <a:lnSpc>
-                <a:spcPts val="2139"/>
-              </a:lnSpc>
-              <a:buNone/>
-            </a:pPr>
-            <a:r>
-              <a:rPr lang="zh-CN" altLang="en-US" sz="1725" dirty="0">
+                <a:spcPts val="2232"/>
+              </a:lnSpc>
+              <a:buNone/>
+            </a:pPr>
+            <a:r>
+              <a:rPr lang="zh-CN" altLang="en-US" sz="1800" dirty="0">
                 <a:solidFill>
                   <a:srgbClr val="1C2430"/>
                 </a:solidFill>
@@ -6738,9 +6795,29 @@
                 <a:ea typeface="Noto Sans CJK SC" pitchFamily="34" charset="-122"/>
                 <a:cs typeface="Noto Sans CJK SC" pitchFamily="34" charset="-120"/>
               </a:rPr>
+              <a:t>口</a:t>
+            </a:r>
+            <a:endParaRPr lang="zh-CN" sz="1800" dirty="0"/>
+          </a:p>
+          <a:p>
+            <a:pPr algn="l" indent="0" marL="0">
+              <a:lnSpc>
+                <a:spcPts val="2232"/>
+              </a:lnSpc>
+              <a:buNone/>
+            </a:pPr>
+            <a:r>
+              <a:rPr lang="zh-CN" altLang="en-US" sz="1800" dirty="0">
+                <a:solidFill>
+                  <a:srgbClr val="1C2430"/>
+                </a:solidFill>
+                <a:latin typeface="Noto Sans CJK SC" pitchFamily="34" charset="0"/>
+                <a:ea typeface="Noto Sans CJK SC" pitchFamily="34" charset="-122"/>
+                <a:cs typeface="Noto Sans CJK SC" pitchFamily="34" charset="-120"/>
+              </a:rPr>
               <a:t>用具体模块变化解释方法进展</a:t>
             </a:r>
-            <a:endParaRPr lang="zh-CN" sz="1725" dirty="0"/>
+            <a:endParaRPr lang="zh-CN" sz="1800" dirty="0"/>
           </a:p>
         </p:txBody>
       </p:sp>
@@ -6752,7 +6829,7 @@
         </p:nvSpPr>
         <p:spPr>
           <a:xfrm>
-            <a:off x="4267200" y="4057650"/>
+            <a:off x="4267200" y="3962400"/>
             <a:ext cx="3524250" cy="0"/>
           </a:xfrm>
           <a:prstGeom prst="line">
@@ -6775,7 +6852,7 @@
         </p:nvSpPr>
         <p:spPr>
           <a:xfrm>
-            <a:off x="4267200" y="4057650"/>
+            <a:off x="4267200" y="3962400"/>
             <a:ext cx="342900" cy="0"/>
           </a:xfrm>
           <a:prstGeom prst="line">
@@ -6784,7 +6861,7 @@
           <a:noFill/>
           <a:ln w="17145">
             <a:solidFill>
-              <a:srgbClr val="173C70"/>
+              <a:srgbClr val="235E96"/>
             </a:solidFill>
             <a:prstDash val="solid"/>
           </a:ln>
@@ -6798,7 +6875,7 @@
         </p:nvSpPr>
         <p:spPr>
           <a:xfrm>
-            <a:off x="4267200" y="3714750"/>
+            <a:off x="4267200" y="3619500"/>
             <a:ext cx="3524250" cy="323850"/>
           </a:xfrm>
           <a:prstGeom prst="rect">
@@ -6813,14 +6890,14 @@
           <a:p>
             <a:pPr algn="l" indent="0" marL="0">
               <a:lnSpc>
-                <a:spcPts val="2156"/>
-              </a:lnSpc>
-              <a:buNone/>
-            </a:pPr>
-            <a:r>
-              <a:rPr lang="zh-CN" altLang="en-US" sz="1875" b="1" dirty="0">
-                <a:solidFill>
-                  <a:srgbClr val="173C70"/>
+                <a:spcPts val="2242"/>
+              </a:lnSpc>
+              <a:buNone/>
+            </a:pPr>
+            <a:r>
+              <a:rPr lang="zh-CN" altLang="en-US" sz="1950" b="1" dirty="0">
+                <a:solidFill>
+                  <a:srgbClr val="235E96"/>
                 </a:solidFill>
                 <a:latin typeface="Noto Sans CJK SC" pitchFamily="34" charset="0"/>
                 <a:ea typeface="Noto Sans CJK SC" pitchFamily="34" charset="-122"/>
@@ -6828,7 +6905,7 @@
               </a:rPr>
               <a:t>评价演化</a:t>
             </a:r>
-            <a:endParaRPr lang="zh-CN" sz="1875" dirty="0"/>
+            <a:endParaRPr lang="zh-CN" sz="1950" dirty="0"/>
           </a:p>
         </p:txBody>
       </p:sp>
@@ -6840,8 +6917,8 @@
         </p:nvSpPr>
         <p:spPr>
           <a:xfrm>
-            <a:off x="4267200" y="4191000"/>
-            <a:ext cx="3524250" cy="1790700"/>
+            <a:off x="4267200" y="4095750"/>
+            <a:ext cx="3524250" cy="1880045"/>
           </a:xfrm>
           <a:prstGeom prst="rect">
             <a:avLst/>
@@ -6922,8 +6999,8 @@
         </p:nvSpPr>
         <p:spPr>
           <a:xfrm>
-            <a:off x="8077200" y="3810000"/>
-            <a:ext cx="3657600" cy="2209800"/>
+            <a:off x="8077200" y="3714750"/>
+            <a:ext cx="3657600" cy="2299145"/>
           </a:xfrm>
           <a:prstGeom prst="rect">
             <a:avLst/>
@@ -6947,14 +7024,14 @@
         </p:nvSpPr>
         <p:spPr>
           <a:xfrm>
-            <a:off x="8191500" y="3695700"/>
-            <a:ext cx="1866900" cy="320040"/>
+            <a:off x="8191500" y="3600450"/>
+            <a:ext cx="2000250" cy="342900"/>
           </a:xfrm>
           <a:prstGeom prst="rect">
             <a:avLst/>
           </a:prstGeom>
           <a:solidFill>
-            <a:srgbClr val="173C70"/>
+            <a:srgbClr val="235E96"/>
           </a:solidFill>
           <a:ln w="12700">
             <a:solidFill>
@@ -6974,8 +7051,8 @@
         </p:nvSpPr>
         <p:spPr>
           <a:xfrm>
-            <a:off x="8296275" y="3724275"/>
-            <a:ext cx="1657350" cy="262890"/>
+            <a:off x="8296275" y="3629025"/>
+            <a:ext cx="1790700" cy="285750"/>
           </a:xfrm>
           <a:prstGeom prst="rect">
             <a:avLst/>
@@ -6989,12 +7066,12 @@
           <a:p>
             <a:pPr algn="l" indent="0" marL="0">
               <a:lnSpc>
-                <a:spcPts val="2070"/>
-              </a:lnSpc>
-              <a:buNone/>
-            </a:pPr>
-            <a:r>
-              <a:rPr lang="zh-CN" altLang="en-US" sz="1800" b="1" dirty="0">
+                <a:spcPts val="2242"/>
+              </a:lnSpc>
+              <a:buNone/>
+            </a:pPr>
+            <a:r>
+              <a:rPr lang="zh-CN" altLang="en-US" sz="1950" b="1" dirty="0">
                 <a:solidFill>
                   <a:srgbClr val="FFFFFF"/>
                 </a:solidFill>
@@ -7004,7 +7081,7 @@
               </a:rPr>
               <a:t>仍然缺少的验证</a:t>
             </a:r>
-            <a:endParaRPr lang="zh-CN" sz="1800" dirty="0"/>
+            <a:endParaRPr lang="zh-CN" sz="1950" dirty="0"/>
           </a:p>
         </p:txBody>
       </p:sp>
@@ -7016,8 +7093,8 @@
         </p:nvSpPr>
         <p:spPr>
           <a:xfrm>
-            <a:off x="8210550" y="4158615"/>
-            <a:ext cx="3390900" cy="1765935"/>
+            <a:off x="8210550" y="4086225"/>
+            <a:ext cx="3390900" cy="1832420"/>
           </a:xfrm>
           <a:prstGeom prst="rect">
             <a:avLst/>
@@ -7031,12 +7108,12 @@
           <a:p>
             <a:pPr algn="l" indent="0" marL="0">
               <a:lnSpc>
-                <a:spcPts val="2139"/>
-              </a:lnSpc>
-              <a:buNone/>
-            </a:pPr>
-            <a:r>
-              <a:rPr lang="zh-CN" altLang="en-US" sz="1725" dirty="0">
+                <a:spcPts val="2232"/>
+              </a:lnSpc>
+              <a:buNone/>
+            </a:pPr>
+            <a:r>
+              <a:rPr lang="zh-CN" altLang="en-US" sz="1800" dirty="0">
                 <a:solidFill>
                   <a:srgbClr val="1C2430"/>
                 </a:solidFill>
@@ -7046,17 +7123,17 @@
               </a:rPr>
               <a:t>指出现有证据尚未覆盖的条件</a:t>
             </a:r>
-            <a:endParaRPr lang="zh-CN" sz="1725" dirty="0"/>
+            <a:endParaRPr lang="zh-CN" sz="1800" dirty="0"/>
           </a:p>
           <a:p>
             <a:pPr algn="l" indent="0" marL="0">
               <a:lnSpc>
-                <a:spcPts val="2139"/>
-              </a:lnSpc>
-              <a:buNone/>
-            </a:pPr>
-            <a:r>
-              <a:rPr lang="zh-CN" altLang="en-US" sz="1725" dirty="0">
+                <a:spcPts val="2232"/>
+              </a:lnSpc>
+              <a:buNone/>
+            </a:pPr>
+            <a:r>
+              <a:rPr lang="zh-CN" altLang="en-US" sz="1800" dirty="0">
                 <a:solidFill>
                   <a:srgbClr val="1C2430"/>
                 </a:solidFill>
@@ -7064,9 +7141,26 @@
                 <a:ea typeface="Noto Sans CJK SC" pitchFamily="34" charset="-122"/>
                 <a:cs typeface="Noto Sans CJK SC" pitchFamily="34" charset="-120"/>
               </a:rPr>
-              <a:t>提出升级验证需要的数据与对照</a:t>
-            </a:r>
-            <a:endParaRPr lang="zh-CN" sz="1725" dirty="0"/>
+              <a:t>提出升级验证需要的数据与</a:t>
+            </a:r>
+            <a:pPr algn="l" indent="0" marL="0">
+              <a:lnSpc>
+                <a:spcPts val="2232"/>
+              </a:lnSpc>
+              <a:buNone/>
+            </a:pPr>
+            <a:r>
+              <a:rPr lang="zh-CN" altLang="en-US" sz="1800" b="1" dirty="0">
+                <a:solidFill>
+                  <a:srgbClr val="235E96"/>
+                </a:solidFill>
+                <a:latin typeface="Noto Sans CJK SC" pitchFamily="34" charset="0"/>
+                <a:ea typeface="Noto Sans CJK SC" pitchFamily="34" charset="-122"/>
+                <a:cs typeface="Noto Sans CJK SC" pitchFamily="34" charset="-120"/>
+              </a:rPr>
+              <a:t>对照</a:t>
+            </a:r>
+            <a:endParaRPr lang="zh-CN" sz="1800" dirty="0"/>
           </a:p>
         </p:txBody>
       </p:sp>
@@ -7106,7 +7200,7 @@
                 <a:ea typeface="Noto Sans CJK SC" pitchFamily="34" charset="-122"/>
                 <a:cs typeface="Noto Sans CJK SC" pitchFamily="34" charset="-120"/>
               </a:rPr>
-              <a:t>T1 · 2026 · 待替换</a:t>
+              <a:t>T1 · 2026 · 书目占位；图表均为合成示例</a:t>
             </a:r>
             <a:endParaRPr lang="zh-CN" sz="1125" dirty="0"/>
           </a:p>
@@ -7215,14 +7309,14 @@
       </p:sp>
       <p:sp>
         <p:nvSpPr>
-          <p:cNvPr id="4" name="T35/kicker"/>
-          <p:cNvSpPr/>
-          <p:nvPr/>
-        </p:nvSpPr>
-        <p:spPr>
-          <a:xfrm>
-            <a:off x="457200" y="152400"/>
-            <a:ext cx="11277600" cy="190500"/>
+          <p:cNvPr id="4" name="T35/title"/>
+          <p:cNvSpPr/>
+          <p:nvPr/>
+        </p:nvSpPr>
+        <p:spPr>
+          <a:xfrm>
+            <a:off x="457200" y="209550"/>
+            <a:ext cx="11277600" cy="438150"/>
           </a:xfrm>
           <a:prstGeom prst="rect">
             <a:avLst/>
@@ -7236,54 +7330,12 @@
           <a:p>
             <a:pPr algn="l" indent="0" marL="0">
               <a:lnSpc>
-                <a:spcPts val="1320"/>
-              </a:lnSpc>
-              <a:buNone/>
-            </a:pPr>
-            <a:r>
-              <a:rPr lang="zh-CN" altLang="en-US" sz="1200" dirty="0">
-                <a:solidFill>
-                  <a:srgbClr val="515B68"/>
-                </a:solidFill>
-                <a:latin typeface="Noto Sans CJK SC" pitchFamily="34" charset="0"/>
-                <a:ea typeface="Noto Sans CJK SC" pitchFamily="34" charset="-122"/>
-                <a:cs typeface="Noto Sans CJK SC" pitchFamily="34" charset="-120"/>
-              </a:rPr>
-              <a:t>结构模板 / 占位说明与合成数据</a:t>
-            </a:r>
-            <a:endParaRPr lang="zh-CN" sz="1200" dirty="0"/>
-          </a:p>
-        </p:txBody>
-      </p:sp>
-      <p:sp>
-        <p:nvSpPr>
-          <p:cNvPr id="5" name="T35/title"/>
-          <p:cNvSpPr/>
-          <p:nvPr/>
-        </p:nvSpPr>
-        <p:spPr>
-          <a:xfrm>
-            <a:off x="457200" y="381000"/>
-            <a:ext cx="11277600" cy="400050"/>
-          </a:xfrm>
-          <a:prstGeom prst="rect">
-            <a:avLst/>
-          </a:prstGeom>
-          <a:noFill/>
-          <a:ln/>
-        </p:spPr>
-        <p:txBody>
-          <a:bodyPr wrap="none" lIns="0" tIns="0" rIns="0" bIns="0" rtlCol="0" anchor="t"/>
-          <a:lstStyle/>
-          <a:p>
-            <a:pPr algn="l" indent="0" marL="0">
-              <a:lnSpc>
-                <a:spcPts val="2856"/>
-              </a:lnSpc>
-              <a:buNone/>
-            </a:pPr>
-            <a:r>
-              <a:rPr lang="zh-CN" altLang="en-US" sz="2550" b="1" dirty="0">
+                <a:spcPts val="3360"/>
+              </a:lnSpc>
+              <a:buNone/>
+            </a:pPr>
+            <a:r>
+              <a:rPr lang="zh-CN" altLang="en-US" sz="3000" b="1" dirty="0">
                 <a:solidFill>
                   <a:srgbClr val="1C2430"/>
                 </a:solidFill>
@@ -7293,26 +7345,49 @@
               </a:rPr>
               <a:t>一致发现与相互冲突</a:t>
             </a:r>
-            <a:endParaRPr lang="zh-CN" sz="2550" dirty="0"/>
-          </a:p>
-        </p:txBody>
-      </p:sp>
-      <p:sp>
-        <p:nvSpPr>
-          <p:cNvPr id="6" name="T35/header-rule"/>
-          <p:cNvSpPr/>
-          <p:nvPr/>
-        </p:nvSpPr>
-        <p:spPr>
-          <a:xfrm>
-            <a:off x="457200" y="876300"/>
+            <a:endParaRPr lang="zh-CN" sz="3000" dirty="0"/>
+          </a:p>
+        </p:txBody>
+      </p:sp>
+      <p:sp>
+        <p:nvSpPr>
+          <p:cNvPr id="5" name="T35/header-rule"/>
+          <p:cNvSpPr/>
+          <p:nvPr/>
+        </p:nvSpPr>
+        <p:spPr>
+          <a:xfrm>
+            <a:off x="457200" y="752475"/>
             <a:ext cx="11277600" cy="0"/>
           </a:xfrm>
           <a:prstGeom prst="line">
             <a:avLst/>
           </a:prstGeom>
           <a:noFill/>
-          <a:ln w="11430">
+          <a:ln w="10478">
+            <a:solidFill>
+              <a:srgbClr val="BEC8D4"/>
+            </a:solidFill>
+            <a:prstDash val="solid"/>
+          </a:ln>
+        </p:spPr>
+      </p:sp>
+      <p:sp>
+        <p:nvSpPr>
+          <p:cNvPr id="6" name="T35/header-accent"/>
+          <p:cNvSpPr/>
+          <p:nvPr/>
+        </p:nvSpPr>
+        <p:spPr>
+          <a:xfrm>
+            <a:off x="457200" y="752475"/>
+            <a:ext cx="704850" cy="0"/>
+          </a:xfrm>
+          <a:prstGeom prst="line">
+            <a:avLst/>
+          </a:prstGeom>
+          <a:noFill/>
+          <a:ln w="28575">
             <a:solidFill>
               <a:srgbClr val="173C70"/>
             </a:solidFill>
@@ -7328,8 +7403,584 @@
         </p:nvSpPr>
         <p:spPr>
           <a:xfrm>
-            <a:off x="457200" y="1314450"/>
-            <a:ext cx="5467350" cy="2476500"/>
+            <a:off x="1446011" y="1146620"/>
+            <a:ext cx="3489729" cy="2586419"/>
+          </a:xfrm>
+          <a:prstGeom prst="rect">
+            <a:avLst/>
+          </a:prstGeom>
+          <a:solidFill>
+            <a:srgbClr val="FFFFFF"/>
+          </a:solidFill>
+          <a:ln w="7620">
+            <a:solidFill>
+              <a:srgbClr val="CCD4DD"/>
+            </a:solidFill>
+            <a:prstDash val="solid"/>
+          </a:ln>
+          <a:effectLst>
+            <a:outerShdw sx="100000" sy="100000" kx="0" ky="0" algn="bl" rotWithShape="0" blurRad="28575" dist="19050" dir="5400000">
+              <a:srgbClr val="263B50">
+                <a:alpha val="12000"/>
+              </a:srgbClr>
+            </a:outerShdw>
+          </a:effectLst>
+        </p:spPr>
+      </p:sp>
+      <p:pic>
+        <p:nvPicPr>
+          <p:cNvPr id="8" name="T35/figure:0:image" descr="A/B 为条件；合成数据">    </p:cNvPr>
+          <p:cNvPicPr>
+            <a:picLocks noChangeAspect="1"/>
+          </p:cNvPicPr>
+          <p:nvPr/>
+        </p:nvPicPr>
+        <p:blipFill>
+          <a:blip r:embed="rId1"/>
+          <a:stretch>
+            <a:fillRect/>
+          </a:stretch>
+        </p:blipFill>
+        <p:spPr>
+          <a:xfrm>
+            <a:off x="1474586" y="1175195"/>
+            <a:ext cx="3432579" cy="2529269"/>
+          </a:xfrm>
+          <a:prstGeom prst="rect">
+            <a:avLst/>
+          </a:prstGeom>
+        </p:spPr>
+      </p:pic>
+      <p:sp>
+        <p:nvSpPr>
+          <p:cNvPr id="9" name="T35/figure:0:caption"/>
+          <p:cNvSpPr/>
+          <p:nvPr/>
+        </p:nvSpPr>
+        <p:spPr>
+          <a:xfrm>
+            <a:off x="457200" y="3837813"/>
+            <a:ext cx="5467350" cy="257175"/>
+          </a:xfrm>
+          <a:prstGeom prst="rect">
+            <a:avLst/>
+          </a:prstGeom>
+          <a:noFill/>
+          <a:ln/>
+        </p:spPr>
+        <p:txBody>
+          <a:bodyPr wrap="none" lIns="0" tIns="0" rIns="0" bIns="0" rtlCol="0" anchor="t"/>
+          <a:lstStyle/>
+          <a:p>
+            <a:pPr algn="l" indent="0" marL="0">
+              <a:lnSpc>
+                <a:spcPts val="1674"/>
+              </a:lnSpc>
+              <a:buNone/>
+            </a:pPr>
+            <a:r>
+              <a:rPr lang="zh-CN" altLang="en-US" sz="1350" dirty="0">
+                <a:solidFill>
+                  <a:srgbClr val="515B68"/>
+                </a:solidFill>
+                <a:latin typeface="Noto Sans CJK SC" pitchFamily="34" charset="0"/>
+                <a:ea typeface="Noto Sans CJK SC" pitchFamily="34" charset="-122"/>
+                <a:cs typeface="Noto Sans CJK SC" pitchFamily="34" charset="-120"/>
+              </a:rPr>
+              <a:t>A/B 为条件；合成数据</a:t>
+            </a:r>
+            <a:endParaRPr lang="zh-CN" sz="1350" dirty="0"/>
+          </a:p>
+        </p:txBody>
+      </p:sp>
+      <p:sp>
+        <p:nvSpPr>
+          <p:cNvPr id="10" name="T35/figure:1:paper"/>
+          <p:cNvSpPr/>
+          <p:nvPr/>
+        </p:nvSpPr>
+        <p:spPr>
+          <a:xfrm>
+            <a:off x="7246736" y="1146620"/>
+            <a:ext cx="3489729" cy="2586419"/>
+          </a:xfrm>
+          <a:prstGeom prst="rect">
+            <a:avLst/>
+          </a:prstGeom>
+          <a:solidFill>
+            <a:srgbClr val="FFFFFF"/>
+          </a:solidFill>
+          <a:ln w="7620">
+            <a:solidFill>
+              <a:srgbClr val="CCD4DD"/>
+            </a:solidFill>
+            <a:prstDash val="solid"/>
+          </a:ln>
+          <a:effectLst>
+            <a:outerShdw sx="100000" sy="100000" kx="0" ky="0" algn="bl" rotWithShape="0" blurRad="28575" dist="19050" dir="5400000">
+              <a:srgbClr val="263B50">
+                <a:alpha val="12000"/>
+              </a:srgbClr>
+            </a:outerShdw>
+          </a:effectLst>
+        </p:spPr>
+      </p:sp>
+      <p:pic>
+        <p:nvPicPr>
+          <p:cNvPr id="11" name="T35/figure:1:image" descr="Ref. 为参考，V1–V3 为变体；合成数据">    </p:cNvPr>
+          <p:cNvPicPr>
+            <a:picLocks noChangeAspect="1"/>
+          </p:cNvPicPr>
+          <p:nvPr/>
+        </p:nvPicPr>
+        <p:blipFill>
+          <a:blip r:embed="rId2"/>
+          <a:stretch>
+            <a:fillRect/>
+          </a:stretch>
+        </p:blipFill>
+        <p:spPr>
+          <a:xfrm>
+            <a:off x="7275311" y="1175195"/>
+            <a:ext cx="3432579" cy="2529269"/>
+          </a:xfrm>
+          <a:prstGeom prst="rect">
+            <a:avLst/>
+          </a:prstGeom>
+        </p:spPr>
+      </p:pic>
+      <p:sp>
+        <p:nvSpPr>
+          <p:cNvPr id="12" name="T35/figure:1:caption"/>
+          <p:cNvSpPr/>
+          <p:nvPr/>
+        </p:nvSpPr>
+        <p:spPr>
+          <a:xfrm>
+            <a:off x="6248400" y="3837813"/>
+            <a:ext cx="5486400" cy="257175"/>
+          </a:xfrm>
+          <a:prstGeom prst="rect">
+            <a:avLst/>
+          </a:prstGeom>
+          <a:noFill/>
+          <a:ln/>
+        </p:spPr>
+        <p:txBody>
+          <a:bodyPr wrap="none" lIns="0" tIns="0" rIns="0" bIns="0" rtlCol="0" anchor="t"/>
+          <a:lstStyle/>
+          <a:p>
+            <a:pPr algn="l" indent="0" marL="0">
+              <a:lnSpc>
+                <a:spcPts val="1674"/>
+              </a:lnSpc>
+              <a:buNone/>
+            </a:pPr>
+            <a:r>
+              <a:rPr lang="zh-CN" altLang="en-US" sz="1350" dirty="0">
+                <a:solidFill>
+                  <a:srgbClr val="515B68"/>
+                </a:solidFill>
+                <a:latin typeface="Noto Sans CJK SC" pitchFamily="34" charset="0"/>
+                <a:ea typeface="Noto Sans CJK SC" pitchFamily="34" charset="-122"/>
+                <a:cs typeface="Noto Sans CJK SC" pitchFamily="34" charset="-120"/>
+              </a:rPr>
+              <a:t>Ref. 为参考，V1–V3 为变体；合成数据</a:t>
+            </a:r>
+            <a:endParaRPr lang="zh-CN" sz="1350" dirty="0"/>
+          </a:p>
+        </p:txBody>
+      </p:sp>
+      <p:sp>
+        <p:nvSpPr>
+          <p:cNvPr id="13" name="T35/card/region-1/frame"/>
+          <p:cNvSpPr/>
+          <p:nvPr/>
+        </p:nvSpPr>
+        <p:spPr>
+          <a:xfrm>
+            <a:off x="457200" y="4312634"/>
+            <a:ext cx="3524250" cy="1701356"/>
+          </a:xfrm>
+          <a:prstGeom prst="rect">
+            <a:avLst/>
+          </a:prstGeom>
+          <a:solidFill>
+            <a:srgbClr val="FFFFFF"/>
+          </a:solidFill>
+          <a:ln w="10478">
+            <a:solidFill>
+              <a:srgbClr val="BEC8D4"/>
+            </a:solidFill>
+            <a:prstDash val="solid"/>
+          </a:ln>
+        </p:spPr>
+      </p:sp>
+      <p:sp>
+        <p:nvSpPr>
+          <p:cNvPr id="14" name="T35/card/region-1/heading-fill"/>
+          <p:cNvSpPr/>
+          <p:nvPr/>
+        </p:nvSpPr>
+        <p:spPr>
+          <a:xfrm>
+            <a:off x="466725" y="4322159"/>
+            <a:ext cx="3505200" cy="371475"/>
+          </a:xfrm>
+          <a:prstGeom prst="rect">
+            <a:avLst/>
+          </a:prstGeom>
+          <a:solidFill>
+            <a:srgbClr val="E9F4F0"/>
+          </a:solidFill>
+          <a:ln w="12700">
+            <a:solidFill>
+              <a:srgbClr val="FFFFFF">
+                <a:alpha val="0"/>
+              </a:srgbClr>
+            </a:solidFill>
+            <a:prstDash val="solid"/>
+          </a:ln>
+        </p:spPr>
+      </p:sp>
+      <p:sp>
+        <p:nvSpPr>
+          <p:cNvPr id="15" name="T35/card/region-1/heading-rule"/>
+          <p:cNvSpPr/>
+          <p:nvPr/>
+        </p:nvSpPr>
+        <p:spPr>
+          <a:xfrm>
+            <a:off x="457200" y="4693634"/>
+            <a:ext cx="3524250" cy="0"/>
+          </a:xfrm>
+          <a:prstGeom prst="line">
+            <a:avLst/>
+          </a:prstGeom>
+          <a:noFill/>
+          <a:ln w="9525">
+            <a:solidFill>
+              <a:srgbClr val="BEC8D4"/>
+            </a:solidFill>
+            <a:prstDash val="solid"/>
+          </a:ln>
+        </p:spPr>
+      </p:sp>
+      <p:sp>
+        <p:nvSpPr>
+          <p:cNvPr id="16" name="T35/card/region-1/title"/>
+          <p:cNvSpPr/>
+          <p:nvPr/>
+        </p:nvSpPr>
+        <p:spPr>
+          <a:xfrm>
+            <a:off x="581025" y="4360259"/>
+            <a:ext cx="3276600" cy="295275"/>
+          </a:xfrm>
+          <a:prstGeom prst="rect">
+            <a:avLst/>
+          </a:prstGeom>
+          <a:noFill/>
+          <a:ln/>
+        </p:spPr>
+        <p:txBody>
+          <a:bodyPr wrap="none" lIns="0" tIns="0" rIns="0" bIns="0" rtlCol="0" anchor="t"/>
+          <a:lstStyle/>
+          <a:p>
+            <a:pPr algn="l" indent="0" marL="0">
+              <a:lnSpc>
+                <a:spcPts val="2242"/>
+              </a:lnSpc>
+              <a:buNone/>
+            </a:pPr>
+            <a:r>
+              <a:rPr lang="zh-CN" altLang="en-US" sz="1950" b="1" dirty="0">
+                <a:solidFill>
+                  <a:srgbClr val="146C63"/>
+                </a:solidFill>
+                <a:latin typeface="Noto Sans CJK SC" pitchFamily="34" charset="0"/>
+                <a:ea typeface="Noto Sans CJK SC" pitchFamily="34" charset="-122"/>
+                <a:cs typeface="Noto Sans CJK SC" pitchFamily="34" charset="-120"/>
+              </a:rPr>
+              <a:t>一致发现</a:t>
+            </a:r>
+            <a:endParaRPr lang="zh-CN" sz="1950" dirty="0"/>
+          </a:p>
+        </p:txBody>
+      </p:sp>
+      <p:sp>
+        <p:nvSpPr>
+          <p:cNvPr id="17" name="T35/card/region-1/body"/>
+          <p:cNvSpPr/>
+          <p:nvPr/>
+        </p:nvSpPr>
+        <p:spPr>
+          <a:xfrm>
+            <a:off x="590550" y="4798409"/>
+            <a:ext cx="3257550" cy="1120331"/>
+          </a:xfrm>
+          <a:prstGeom prst="rect">
+            <a:avLst/>
+          </a:prstGeom>
+          <a:noFill/>
+          <a:ln/>
+        </p:spPr>
+        <p:txBody>
+          <a:bodyPr wrap="none" lIns="0" tIns="0" rIns="0" bIns="0" rtlCol="0" anchor="t"/>
+          <a:lstStyle/>
+          <a:p>
+            <a:pPr algn="l" indent="0" marL="0">
+              <a:lnSpc>
+                <a:spcPts val="2232"/>
+              </a:lnSpc>
+              <a:buNone/>
+            </a:pPr>
+            <a:r>
+              <a:rPr lang="zh-CN" altLang="en-US" sz="1800" dirty="0">
+                <a:solidFill>
+                  <a:srgbClr val="1C2430"/>
+                </a:solidFill>
+                <a:latin typeface="Noto Sans CJK SC" pitchFamily="34" charset="0"/>
+                <a:ea typeface="Noto Sans CJK SC" pitchFamily="34" charset="-122"/>
+                <a:cs typeface="Noto Sans CJK SC" pitchFamily="34" charset="-120"/>
+              </a:rPr>
+              <a:t>汇总可被不同证据重复支持的关</a:t>
+            </a:r>
+            <a:endParaRPr lang="zh-CN" sz="1800" dirty="0"/>
+          </a:p>
+          <a:p>
+            <a:pPr algn="l" indent="0" marL="0">
+              <a:lnSpc>
+                <a:spcPts val="2232"/>
+              </a:lnSpc>
+              <a:buNone/>
+            </a:pPr>
+            <a:r>
+              <a:rPr lang="zh-CN" altLang="en-US" sz="1800" dirty="0">
+                <a:solidFill>
+                  <a:srgbClr val="1C2430"/>
+                </a:solidFill>
+                <a:latin typeface="Noto Sans CJK SC" pitchFamily="34" charset="0"/>
+                <a:ea typeface="Noto Sans CJK SC" pitchFamily="34" charset="-122"/>
+                <a:cs typeface="Noto Sans CJK SC" pitchFamily="34" charset="-120"/>
+              </a:rPr>
+              <a:t>系</a:t>
+            </a:r>
+            <a:endParaRPr lang="zh-CN" sz="1800" dirty="0"/>
+          </a:p>
+          <a:p>
+            <a:pPr algn="l" indent="0" marL="0">
+              <a:lnSpc>
+                <a:spcPts val="2232"/>
+              </a:lnSpc>
+              <a:buNone/>
+            </a:pPr>
+            <a:r>
+              <a:rPr lang="zh-CN" altLang="en-US" sz="1800" dirty="0">
+                <a:solidFill>
+                  <a:srgbClr val="1C2430"/>
+                </a:solidFill>
+                <a:latin typeface="Noto Sans CJK SC" pitchFamily="34" charset="0"/>
+                <a:ea typeface="Noto Sans CJK SC" pitchFamily="34" charset="-122"/>
+                <a:cs typeface="Noto Sans CJK SC" pitchFamily="34" charset="-120"/>
+              </a:rPr>
+              <a:t>保留各论文共享的实验条件</a:t>
+            </a:r>
+            <a:endParaRPr lang="zh-CN" sz="1800" dirty="0"/>
+          </a:p>
+        </p:txBody>
+      </p:sp>
+      <p:sp>
+        <p:nvSpPr>
+          <p:cNvPr id="18" name="T35/card/region-2/frame"/>
+          <p:cNvSpPr/>
+          <p:nvPr/>
+        </p:nvSpPr>
+        <p:spPr>
+          <a:xfrm>
+            <a:off x="4267200" y="4426934"/>
+            <a:ext cx="3524250" cy="1587056"/>
+          </a:xfrm>
+          <a:prstGeom prst="rect">
+            <a:avLst/>
+          </a:prstGeom>
+          <a:solidFill>
+            <a:srgbClr val="FFFFFF"/>
+          </a:solidFill>
+          <a:ln w="10478">
+            <a:solidFill>
+              <a:srgbClr val="BEC8D4"/>
+            </a:solidFill>
+            <a:prstDash val="solid"/>
+          </a:ln>
+        </p:spPr>
+      </p:sp>
+      <p:sp>
+        <p:nvSpPr>
+          <p:cNvPr id="19" name="T35/card/region-2/tab"/>
+          <p:cNvSpPr/>
+          <p:nvPr/>
+        </p:nvSpPr>
+        <p:spPr>
+          <a:xfrm>
+            <a:off x="4381500" y="4312634"/>
+            <a:ext cx="1257300" cy="342900"/>
+          </a:xfrm>
+          <a:prstGeom prst="rect">
+            <a:avLst/>
+          </a:prstGeom>
+          <a:solidFill>
+            <a:srgbClr val="A24736"/>
+          </a:solidFill>
+          <a:ln w="12700">
+            <a:solidFill>
+              <a:srgbClr val="FFFFFF">
+                <a:alpha val="0"/>
+              </a:srgbClr>
+            </a:solidFill>
+            <a:prstDash val="solid"/>
+          </a:ln>
+        </p:spPr>
+      </p:sp>
+      <p:sp>
+        <p:nvSpPr>
+          <p:cNvPr id="20" name="T35/card/region-2/title"/>
+          <p:cNvSpPr/>
+          <p:nvPr/>
+        </p:nvSpPr>
+        <p:spPr>
+          <a:xfrm>
+            <a:off x="4486275" y="4341209"/>
+            <a:ext cx="1047750" cy="285750"/>
+          </a:xfrm>
+          <a:prstGeom prst="rect">
+            <a:avLst/>
+          </a:prstGeom>
+          <a:noFill/>
+          <a:ln/>
+        </p:spPr>
+        <p:txBody>
+          <a:bodyPr wrap="none" lIns="0" tIns="0" rIns="0" bIns="0" rtlCol="0" anchor="t"/>
+          <a:lstStyle/>
+          <a:p>
+            <a:pPr algn="l" indent="0" marL="0">
+              <a:lnSpc>
+                <a:spcPts val="2242"/>
+              </a:lnSpc>
+              <a:buNone/>
+            </a:pPr>
+            <a:r>
+              <a:rPr lang="zh-CN" altLang="en-US" sz="1950" b="1" dirty="0">
+                <a:solidFill>
+                  <a:srgbClr val="FFFFFF"/>
+                </a:solidFill>
+                <a:latin typeface="Noto Sans CJK SC" pitchFamily="34" charset="0"/>
+                <a:ea typeface="Noto Sans CJK SC" pitchFamily="34" charset="-122"/>
+                <a:cs typeface="Noto Sans CJK SC" pitchFamily="34" charset="-120"/>
+              </a:rPr>
+              <a:t>冲突来源</a:t>
+            </a:r>
+            <a:endParaRPr lang="zh-CN" sz="1950" dirty="0"/>
+          </a:p>
+        </p:txBody>
+      </p:sp>
+      <p:sp>
+        <p:nvSpPr>
+          <p:cNvPr id="21" name="T35/card/region-2/body"/>
+          <p:cNvSpPr/>
+          <p:nvPr/>
+        </p:nvSpPr>
+        <p:spPr>
+          <a:xfrm>
+            <a:off x="4400550" y="4798409"/>
+            <a:ext cx="3257550" cy="1120331"/>
+          </a:xfrm>
+          <a:prstGeom prst="rect">
+            <a:avLst/>
+          </a:prstGeom>
+          <a:noFill/>
+          <a:ln/>
+        </p:spPr>
+        <p:txBody>
+          <a:bodyPr wrap="none" lIns="0" tIns="0" rIns="0" bIns="0" rtlCol="0" anchor="t"/>
+          <a:lstStyle/>
+          <a:p>
+            <a:pPr algn="l" indent="0" marL="0">
+              <a:lnSpc>
+                <a:spcPts val="2232"/>
+              </a:lnSpc>
+              <a:buNone/>
+            </a:pPr>
+            <a:r>
+              <a:rPr lang="zh-CN" altLang="en-US" sz="1800" dirty="0">
+                <a:solidFill>
+                  <a:srgbClr val="1C2430"/>
+                </a:solidFill>
+                <a:latin typeface="Noto Sans CJK SC" pitchFamily="34" charset="0"/>
+                <a:ea typeface="Noto Sans CJK SC" pitchFamily="34" charset="-122"/>
+                <a:cs typeface="Noto Sans CJK SC" pitchFamily="34" charset="-120"/>
+              </a:rPr>
+              <a:t>先检查任务、样本和测量尺度</a:t>
+            </a:r>
+            <a:endParaRPr lang="zh-CN" sz="1800" dirty="0"/>
+          </a:p>
+          <a:p>
+            <a:pPr algn="l" indent="0" marL="0">
+              <a:lnSpc>
+                <a:spcPts val="2232"/>
+              </a:lnSpc>
+              <a:buNone/>
+            </a:pPr>
+            <a:r>
+              <a:rPr lang="zh-CN" altLang="en-US" sz="1800" dirty="0">
+                <a:solidFill>
+                  <a:srgbClr val="1C2430"/>
+                </a:solidFill>
+                <a:latin typeface="Noto Sans CJK SC" pitchFamily="34" charset="0"/>
+                <a:ea typeface="Noto Sans CJK SC" pitchFamily="34" charset="-122"/>
+                <a:cs typeface="Noto Sans CJK SC" pitchFamily="34" charset="-120"/>
+              </a:rPr>
+              <a:t>再分析机制解释是否相互排斥</a:t>
+            </a:r>
+            <a:endParaRPr lang="zh-CN" sz="1800" dirty="0"/>
+          </a:p>
+        </p:txBody>
+      </p:sp>
+      <p:sp>
+        <p:nvSpPr>
+          <p:cNvPr id="22" name="T35/card/region-3/frame"/>
+          <p:cNvSpPr/>
+          <p:nvPr/>
+        </p:nvSpPr>
+        <p:spPr>
+          <a:xfrm>
+            <a:off x="8077200" y="4312634"/>
+            <a:ext cx="3657600" cy="1701356"/>
+          </a:xfrm>
+          <a:prstGeom prst="rect">
+            <a:avLst/>
+          </a:prstGeom>
+          <a:solidFill>
+            <a:srgbClr val="EAF2FA"/>
+          </a:solidFill>
+          <a:ln w="12383">
+            <a:solidFill>
+              <a:srgbClr val="235E96"/>
+            </a:solidFill>
+            <a:prstDash val="dash"/>
+          </a:ln>
+        </p:spPr>
+      </p:sp>
+      <p:sp>
+        <p:nvSpPr>
+          <p:cNvPr id="23" name="T35/card/region-3/corner-white"/>
+          <p:cNvSpPr/>
+          <p:nvPr/>
+        </p:nvSpPr>
+        <p:spPr>
+          <a:xfrm>
+            <a:off x="11468100" y="4312634"/>
+            <a:ext cx="266700" cy="266700"/>
           </a:xfrm>
           <a:prstGeom prst="rect">
             <a:avLst/>
@@ -7347,185 +7998,47 @@
           </a:ln>
         </p:spPr>
       </p:sp>
-      <p:pic>
-        <p:nvPicPr>
-          <p:cNvPr id="8" name="T35/figure:0:image" descr="T1 · 示例图 · 响应曲线；合成演示值">    </p:cNvPr>
-          <p:cNvPicPr>
-            <a:picLocks noChangeAspect="1"/>
-          </p:cNvPicPr>
-          <p:nvPr/>
-        </p:nvPicPr>
-        <p:blipFill>
-          <a:blip r:embed="rId1"/>
-          <a:stretch>
-            <a:fillRect/>
-          </a:stretch>
-        </p:blipFill>
-        <p:spPr>
-          <a:xfrm>
-            <a:off x="1412875" y="1314450"/>
-            <a:ext cx="3556000" cy="2133600"/>
-          </a:xfrm>
-          <a:prstGeom prst="rect">
-            <a:avLst/>
-          </a:prstGeom>
-        </p:spPr>
-      </p:pic>
-      <p:sp>
-        <p:nvSpPr>
-          <p:cNvPr id="9" name="T35/figure:0:caption"/>
-          <p:cNvSpPr/>
-          <p:nvPr/>
-        </p:nvSpPr>
-        <p:spPr>
-          <a:xfrm>
-            <a:off x="457200" y="3533775"/>
-            <a:ext cx="5467350" cy="257175"/>
-          </a:xfrm>
-          <a:prstGeom prst="rect">
-            <a:avLst/>
-          </a:prstGeom>
-          <a:noFill/>
-          <a:ln/>
-        </p:spPr>
-        <p:txBody>
-          <a:bodyPr wrap="none" lIns="0" tIns="0" rIns="0" bIns="0" rtlCol="0" anchor="t"/>
-          <a:lstStyle/>
-          <a:p>
-            <a:pPr algn="l" indent="0" marL="0">
-              <a:lnSpc>
-                <a:spcPts val="1674"/>
-              </a:lnSpc>
-              <a:buNone/>
-            </a:pPr>
-            <a:r>
-              <a:rPr lang="zh-CN" altLang="en-US" sz="1350" dirty="0">
-                <a:solidFill>
-                  <a:srgbClr val="515B68"/>
-                </a:solidFill>
-                <a:latin typeface="Noto Sans CJK SC" pitchFamily="34" charset="0"/>
-                <a:ea typeface="Noto Sans CJK SC" pitchFamily="34" charset="-122"/>
-                <a:cs typeface="Noto Sans CJK SC" pitchFamily="34" charset="-120"/>
-              </a:rPr>
-              <a:t>T1 · 示例图 · 响应曲线；合成演示值</a:t>
-            </a:r>
-            <a:endParaRPr lang="zh-CN" sz="1350" dirty="0"/>
-          </a:p>
-        </p:txBody>
-      </p:sp>
-      <p:sp>
-        <p:nvSpPr>
-          <p:cNvPr id="10" name="T35/figure:1:paper"/>
-          <p:cNvSpPr/>
-          <p:nvPr/>
-        </p:nvSpPr>
-        <p:spPr>
-          <a:xfrm>
-            <a:off x="6248400" y="1314450"/>
-            <a:ext cx="5486400" cy="2476500"/>
-          </a:xfrm>
-          <a:prstGeom prst="rect">
-            <a:avLst/>
-          </a:prstGeom>
-          <a:solidFill>
-            <a:srgbClr val="FFFFFF"/>
-          </a:solidFill>
-          <a:ln w="12700">
+      <p:sp>
+        <p:nvSpPr>
+          <p:cNvPr id="24" name="T35/card/region-3/fold-diagonal"/>
+          <p:cNvSpPr/>
+          <p:nvPr/>
+        </p:nvSpPr>
+        <p:spPr>
+          <a:xfrm>
+            <a:off x="11468100" y="4312634"/>
+            <a:ext cx="266700" cy="266700"/>
+          </a:xfrm>
+          <a:prstGeom prst="line">
+            <a:avLst/>
+          </a:prstGeom>
+          <a:noFill/>
+          <a:ln w="13335">
             <a:solidFill>
-              <a:srgbClr val="FFFFFF">
-                <a:alpha val="0"/>
-              </a:srgbClr>
+              <a:srgbClr val="235E96"/>
             </a:solidFill>
             <a:prstDash val="solid"/>
           </a:ln>
         </p:spPr>
       </p:sp>
-      <p:pic>
-        <p:nvPicPr>
-          <p:cNvPr id="11" name="T35/figure:1:image" descr="T1 · 示例图 · 效应与区间；合成演示值">    </p:cNvPr>
-          <p:cNvPicPr>
-            <a:picLocks noChangeAspect="1"/>
-          </p:cNvPicPr>
-          <p:nvPr/>
-        </p:nvPicPr>
-        <p:blipFill>
-          <a:blip r:embed="rId2"/>
-          <a:stretch>
-            <a:fillRect/>
-          </a:stretch>
-        </p:blipFill>
-        <p:spPr>
-          <a:xfrm>
-            <a:off x="7213600" y="1314450"/>
-            <a:ext cx="3556000" cy="2133600"/>
-          </a:xfrm>
-          <a:prstGeom prst="rect">
-            <a:avLst/>
-          </a:prstGeom>
-        </p:spPr>
-      </p:pic>
-      <p:sp>
-        <p:nvSpPr>
-          <p:cNvPr id="12" name="T35/figure:1:caption"/>
-          <p:cNvSpPr/>
-          <p:nvPr/>
-        </p:nvSpPr>
-        <p:spPr>
-          <a:xfrm>
-            <a:off x="6248400" y="3533775"/>
-            <a:ext cx="5486400" cy="257175"/>
-          </a:xfrm>
-          <a:prstGeom prst="rect">
-            <a:avLst/>
-          </a:prstGeom>
-          <a:noFill/>
-          <a:ln/>
-        </p:spPr>
-        <p:txBody>
-          <a:bodyPr wrap="none" lIns="0" tIns="0" rIns="0" bIns="0" rtlCol="0" anchor="t"/>
-          <a:lstStyle/>
-          <a:p>
-            <a:pPr algn="l" indent="0" marL="0">
-              <a:lnSpc>
-                <a:spcPts val="1674"/>
-              </a:lnSpc>
-              <a:buNone/>
-            </a:pPr>
-            <a:r>
-              <a:rPr lang="zh-CN" altLang="en-US" sz="1350" dirty="0">
-                <a:solidFill>
-                  <a:srgbClr val="515B68"/>
-                </a:solidFill>
-                <a:latin typeface="Noto Sans CJK SC" pitchFamily="34" charset="0"/>
-                <a:ea typeface="Noto Sans CJK SC" pitchFamily="34" charset="-122"/>
-                <a:cs typeface="Noto Sans CJK SC" pitchFamily="34" charset="-120"/>
-              </a:rPr>
-              <a:t>T1 · 示例图 · 效应与区间；合成演示值</a:t>
-            </a:r>
-            <a:endParaRPr lang="zh-CN" sz="1350" dirty="0"/>
-          </a:p>
-        </p:txBody>
-      </p:sp>
-      <p:sp>
-        <p:nvSpPr>
-          <p:cNvPr id="13" name="T35/card/region-1/frame"/>
-          <p:cNvSpPr/>
-          <p:nvPr/>
-        </p:nvSpPr>
-        <p:spPr>
-          <a:xfrm>
-            <a:off x="457200" y="4133850"/>
-            <a:ext cx="3524250" cy="1866900"/>
-          </a:xfrm>
-          <a:prstGeom prst="rect">
-            <a:avLst/>
-          </a:prstGeom>
-          <a:solidFill>
-            <a:srgbClr val="FFFFFF"/>
-          </a:solidFill>
-          <a:ln w="10478">
+      <p:sp>
+        <p:nvSpPr>
+          <p:cNvPr id="25" name="T35/card/region-3/fold-left"/>
+          <p:cNvSpPr/>
+          <p:nvPr/>
+        </p:nvSpPr>
+        <p:spPr>
+          <a:xfrm>
+            <a:off x="11468100" y="4312634"/>
+            <a:ext cx="0" cy="266700"/>
+          </a:xfrm>
+          <a:prstGeom prst="line">
+            <a:avLst/>
+          </a:prstGeom>
+          <a:noFill/>
+          <a:ln w="13335">
             <a:solidFill>
-              <a:srgbClr val="BEC8D4"/>
+              <a:srgbClr val="235E96"/>
             </a:solidFill>
             <a:prstDash val="solid"/>
           </a:ln>
@@ -7533,26 +8046,22 @@
       </p:sp>
       <p:sp>
         <p:nvSpPr>
-          <p:cNvPr id="14" name="T35/card/region-1/heading-fill"/>
-          <p:cNvSpPr/>
-          <p:nvPr/>
-        </p:nvSpPr>
-        <p:spPr>
-          <a:xfrm>
-            <a:off x="466725" y="4143375"/>
-            <a:ext cx="3505200" cy="371475"/>
-          </a:xfrm>
-          <a:prstGeom prst="rect">
-            <a:avLst/>
-          </a:prstGeom>
-          <a:solidFill>
-            <a:srgbClr val="EEF3F8"/>
-          </a:solidFill>
-          <a:ln w="12700">
+          <p:cNvPr id="26" name="T35/card/region-3/fold-bottom"/>
+          <p:cNvSpPr/>
+          <p:nvPr/>
+        </p:nvSpPr>
+        <p:spPr>
+          <a:xfrm>
+            <a:off x="11468100" y="4579334"/>
+            <a:ext cx="266700" cy="0"/>
+          </a:xfrm>
+          <a:prstGeom prst="line">
+            <a:avLst/>
+          </a:prstGeom>
+          <a:noFill/>
+          <a:ln w="13335">
             <a:solidFill>
-              <a:srgbClr val="FFFFFF">
-                <a:alpha val="0"/>
-              </a:srgbClr>
+              <a:srgbClr val="235E96"/>
             </a:solidFill>
             <a:prstDash val="solid"/>
           </a:ln>
@@ -7560,37 +8069,14 @@
       </p:sp>
       <p:sp>
         <p:nvSpPr>
-          <p:cNvPr id="15" name="T35/card/region-1/heading-rule"/>
-          <p:cNvSpPr/>
-          <p:nvPr/>
-        </p:nvSpPr>
-        <p:spPr>
-          <a:xfrm>
-            <a:off x="457200" y="4514850"/>
-            <a:ext cx="3524250" cy="0"/>
-          </a:xfrm>
-          <a:prstGeom prst="line">
-            <a:avLst/>
-          </a:prstGeom>
-          <a:noFill/>
-          <a:ln w="9525">
-            <a:solidFill>
-              <a:srgbClr val="BEC8D4"/>
-            </a:solidFill>
-            <a:prstDash val="solid"/>
-          </a:ln>
-        </p:spPr>
-      </p:sp>
-      <p:sp>
-        <p:nvSpPr>
-          <p:cNvPr id="16" name="T35/card/region-1/title"/>
-          <p:cNvSpPr/>
-          <p:nvPr/>
-        </p:nvSpPr>
-        <p:spPr>
-          <a:xfrm>
-            <a:off x="581025" y="4191000"/>
-            <a:ext cx="3276600" cy="276225"/>
+          <p:cNvPr id="27" name="T35/card/region-3/title"/>
+          <p:cNvSpPr/>
+          <p:nvPr/>
+        </p:nvSpPr>
+        <p:spPr>
+          <a:xfrm>
+            <a:off x="8267700" y="4474559"/>
+            <a:ext cx="3086100" cy="361950"/>
           </a:xfrm>
           <a:prstGeom prst="rect">
             <a:avLst/>
@@ -7604,35 +8090,35 @@
           <a:p>
             <a:pPr algn="l" indent="0" marL="0">
               <a:lnSpc>
-                <a:spcPts val="2070"/>
-              </a:lnSpc>
-              <a:buNone/>
-            </a:pPr>
-            <a:r>
-              <a:rPr lang="zh-CN" altLang="en-US" sz="1800" b="1" dirty="0">
-                <a:solidFill>
-                  <a:srgbClr val="173C70"/>
-                </a:solidFill>
-                <a:latin typeface="Noto Sans CJK SC" pitchFamily="34" charset="0"/>
-                <a:ea typeface="Noto Sans CJK SC" pitchFamily="34" charset="-122"/>
-                <a:cs typeface="Noto Sans CJK SC" pitchFamily="34" charset="-120"/>
-              </a:rPr>
-              <a:t>一致发现</a:t>
-            </a:r>
-            <a:endParaRPr lang="zh-CN" sz="1800" dirty="0"/>
-          </a:p>
-        </p:txBody>
-      </p:sp>
-      <p:sp>
-        <p:nvSpPr>
-          <p:cNvPr id="17" name="T35/card/region-1/body"/>
-          <p:cNvSpPr/>
-          <p:nvPr/>
-        </p:nvSpPr>
-        <p:spPr>
-          <a:xfrm>
-            <a:off x="590550" y="4629150"/>
-            <a:ext cx="3257550" cy="1276350"/>
+                <a:spcPts val="2242"/>
+              </a:lnSpc>
+              <a:buNone/>
+            </a:pPr>
+            <a:r>
+              <a:rPr lang="zh-CN" altLang="en-US" sz="1950" b="1" dirty="0">
+                <a:solidFill>
+                  <a:srgbClr val="235E96"/>
+                </a:solidFill>
+                <a:latin typeface="Noto Sans CJK SC" pitchFamily="34" charset="0"/>
+                <a:ea typeface="Noto Sans CJK SC" pitchFamily="34" charset="-122"/>
+                <a:cs typeface="Noto Sans CJK SC" pitchFamily="34" charset="-120"/>
+              </a:rPr>
+              <a:t>可区分的解释</a:t>
+            </a:r>
+            <a:endParaRPr lang="zh-CN" sz="1950" dirty="0"/>
+          </a:p>
+        </p:txBody>
+      </p:sp>
+      <p:sp>
+        <p:nvSpPr>
+          <p:cNvPr id="28" name="T35/card/region-3/body"/>
+          <p:cNvSpPr/>
+          <p:nvPr/>
+        </p:nvSpPr>
+        <p:spPr>
+          <a:xfrm>
+            <a:off x="8267700" y="4931759"/>
+            <a:ext cx="3276600" cy="891731"/>
           </a:xfrm>
           <a:prstGeom prst="rect">
             <a:avLst/>
@@ -7646,12 +8132,12 @@
           <a:p>
             <a:pPr algn="l" indent="0" marL="0">
               <a:lnSpc>
-                <a:spcPts val="2139"/>
-              </a:lnSpc>
-              <a:buNone/>
-            </a:pPr>
-            <a:r>
-              <a:rPr lang="zh-CN" altLang="en-US" sz="1725" dirty="0">
+                <a:spcPts val="2232"/>
+              </a:lnSpc>
+              <a:buNone/>
+            </a:pPr>
+            <a:r>
+              <a:rPr lang="zh-CN" altLang="en-US" sz="1800" dirty="0">
                 <a:solidFill>
                   <a:srgbClr val="1C2430"/>
                 </a:solidFill>
@@ -7659,19 +8145,19 @@
                 <a:ea typeface="Noto Sans CJK SC" pitchFamily="34" charset="-122"/>
                 <a:cs typeface="Noto Sans CJK SC" pitchFamily="34" charset="-120"/>
               </a:rPr>
-              <a:t>汇总可被不同证据重复支持的关</a:t>
-            </a:r>
-            <a:endParaRPr lang="zh-CN" sz="1725" dirty="0"/>
+              <a:t>列出能够解释分歧的具体条件</a:t>
+            </a:r>
+            <a:endParaRPr lang="zh-CN" sz="1800" dirty="0"/>
           </a:p>
           <a:p>
             <a:pPr algn="l" indent="0" marL="0">
               <a:lnSpc>
-                <a:spcPts val="2139"/>
-              </a:lnSpc>
-              <a:buNone/>
-            </a:pPr>
-            <a:r>
-              <a:rPr lang="zh-CN" altLang="en-US" sz="1725" dirty="0">
+                <a:spcPts val="2232"/>
+              </a:lnSpc>
+              <a:buNone/>
+            </a:pPr>
+            <a:r>
+              <a:rPr lang="zh-CN" altLang="en-US" sz="1800" dirty="0">
                 <a:solidFill>
                   <a:srgbClr val="1C2430"/>
                 </a:solidFill>
@@ -7679,94 +8165,39 @@
                 <a:ea typeface="Noto Sans CJK SC" pitchFamily="34" charset="-122"/>
                 <a:cs typeface="Noto Sans CJK SC" pitchFamily="34" charset="-120"/>
               </a:rPr>
-              <a:t>系</a:t>
-            </a:r>
-            <a:endParaRPr lang="zh-CN" sz="1725" dirty="0"/>
-          </a:p>
-          <a:p>
+              <a:t>设计只改变该条件的</a:t>
+            </a:r>
             <a:pPr algn="l" indent="0" marL="0">
               <a:lnSpc>
-                <a:spcPts val="2139"/>
-              </a:lnSpc>
-              <a:buNone/>
-            </a:pPr>
-            <a:r>
-              <a:rPr lang="zh-CN" altLang="en-US" sz="1725" dirty="0">
-                <a:solidFill>
-                  <a:srgbClr val="1C2430"/>
-                </a:solidFill>
-                <a:latin typeface="Noto Sans CJK SC" pitchFamily="34" charset="0"/>
-                <a:ea typeface="Noto Sans CJK SC" pitchFamily="34" charset="-122"/>
-                <a:cs typeface="Noto Sans CJK SC" pitchFamily="34" charset="-120"/>
-              </a:rPr>
-              <a:t>保留各论文共享的实验条件</a:t>
-            </a:r>
-            <a:endParaRPr lang="zh-CN" sz="1725" dirty="0"/>
-          </a:p>
-        </p:txBody>
-      </p:sp>
-      <p:sp>
-        <p:nvSpPr>
-          <p:cNvPr id="18" name="T35/card/region-2/frame"/>
-          <p:cNvSpPr/>
-          <p:nvPr/>
-        </p:nvSpPr>
-        <p:spPr>
-          <a:xfrm>
-            <a:off x="4267200" y="4248150"/>
-            <a:ext cx="3524250" cy="1752600"/>
-          </a:xfrm>
-          <a:prstGeom prst="rect">
-            <a:avLst/>
-          </a:prstGeom>
-          <a:solidFill>
-            <a:srgbClr val="FFFFFF"/>
-          </a:solidFill>
-          <a:ln w="10478">
-            <a:solidFill>
-              <a:srgbClr val="BEC8D4"/>
-            </a:solidFill>
-            <a:prstDash val="solid"/>
-          </a:ln>
-        </p:spPr>
-      </p:sp>
-      <p:sp>
-        <p:nvSpPr>
-          <p:cNvPr id="19" name="T35/card/region-2/tab"/>
-          <p:cNvSpPr/>
-          <p:nvPr/>
-        </p:nvSpPr>
-        <p:spPr>
-          <a:xfrm>
-            <a:off x="4381500" y="4133850"/>
-            <a:ext cx="1181100" cy="320040"/>
-          </a:xfrm>
-          <a:prstGeom prst="rect">
-            <a:avLst/>
-          </a:prstGeom>
-          <a:solidFill>
-            <a:srgbClr val="173C70"/>
-          </a:solidFill>
-          <a:ln w="12700">
-            <a:solidFill>
-              <a:srgbClr val="FFFFFF">
-                <a:alpha val="0"/>
-              </a:srgbClr>
-            </a:solidFill>
-            <a:prstDash val="solid"/>
-          </a:ln>
-        </p:spPr>
-      </p:sp>
-      <p:sp>
-        <p:nvSpPr>
-          <p:cNvPr id="20" name="T35/card/region-2/title"/>
-          <p:cNvSpPr/>
-          <p:nvPr/>
-        </p:nvSpPr>
-        <p:spPr>
-          <a:xfrm>
-            <a:off x="4486275" y="4162425"/>
-            <a:ext cx="971550" cy="262890"/>
+                <a:spcPts val="2232"/>
+              </a:lnSpc>
+              <a:buNone/>
+            </a:pPr>
+            <a:r>
+              <a:rPr lang="zh-CN" altLang="en-US" sz="1800" b="1" dirty="0">
+                <a:solidFill>
+                  <a:srgbClr val="235E96"/>
+                </a:solidFill>
+                <a:latin typeface="Noto Sans CJK SC" pitchFamily="34" charset="0"/>
+                <a:ea typeface="Noto Sans CJK SC" pitchFamily="34" charset="-122"/>
+                <a:cs typeface="Noto Sans CJK SC" pitchFamily="34" charset="-120"/>
+              </a:rPr>
+              <a:t>公平比较</a:t>
+            </a:r>
+            <a:endParaRPr lang="zh-CN" sz="1800" dirty="0"/>
+          </a:p>
+        </p:txBody>
+      </p:sp>
+      <p:sp>
+        <p:nvSpPr>
+          <p:cNvPr id="29" name="T35/sources"/>
+          <p:cNvSpPr/>
+          <p:nvPr/>
+        </p:nvSpPr>
+        <p:spPr>
+          <a:xfrm>
+            <a:off x="457200" y="6286500"/>
+            <a:ext cx="11277600" cy="228600"/>
           </a:xfrm>
           <a:prstGeom prst="rect">
             <a:avLst/>
@@ -7780,260 +8211,6 @@
           <a:p>
             <a:pPr algn="l" indent="0" marL="0">
               <a:lnSpc>
-                <a:spcPts val="2070"/>
-              </a:lnSpc>
-              <a:buNone/>
-            </a:pPr>
-            <a:r>
-              <a:rPr lang="zh-CN" altLang="en-US" sz="1800" b="1" dirty="0">
-                <a:solidFill>
-                  <a:srgbClr val="FFFFFF"/>
-                </a:solidFill>
-                <a:latin typeface="Noto Sans CJK SC" pitchFamily="34" charset="0"/>
-                <a:ea typeface="Noto Sans CJK SC" pitchFamily="34" charset="-122"/>
-                <a:cs typeface="Noto Sans CJK SC" pitchFamily="34" charset="-120"/>
-              </a:rPr>
-              <a:t>冲突来源</a:t>
-            </a:r>
-            <a:endParaRPr lang="zh-CN" sz="1800" dirty="0"/>
-          </a:p>
-        </p:txBody>
-      </p:sp>
-      <p:sp>
-        <p:nvSpPr>
-          <p:cNvPr id="21" name="T35/card/region-2/body"/>
-          <p:cNvSpPr/>
-          <p:nvPr/>
-        </p:nvSpPr>
-        <p:spPr>
-          <a:xfrm>
-            <a:off x="4400550" y="4596765"/>
-            <a:ext cx="3257550" cy="1308735"/>
-          </a:xfrm>
-          <a:prstGeom prst="rect">
-            <a:avLst/>
-          </a:prstGeom>
-          <a:noFill/>
-          <a:ln/>
-        </p:spPr>
-        <p:txBody>
-          <a:bodyPr wrap="none" lIns="0" tIns="0" rIns="0" bIns="0" rtlCol="0" anchor="t"/>
-          <a:lstStyle/>
-          <a:p>
-            <a:pPr algn="l" indent="0" marL="0">
-              <a:lnSpc>
-                <a:spcPts val="2139"/>
-              </a:lnSpc>
-              <a:buNone/>
-            </a:pPr>
-            <a:r>
-              <a:rPr lang="zh-CN" altLang="en-US" sz="1725" dirty="0">
-                <a:solidFill>
-                  <a:srgbClr val="1C2430"/>
-                </a:solidFill>
-                <a:latin typeface="Noto Sans CJK SC" pitchFamily="34" charset="0"/>
-                <a:ea typeface="Noto Sans CJK SC" pitchFamily="34" charset="-122"/>
-                <a:cs typeface="Noto Sans CJK SC" pitchFamily="34" charset="-120"/>
-              </a:rPr>
-              <a:t>先检查任务、样本和测量尺度</a:t>
-            </a:r>
-            <a:endParaRPr lang="zh-CN" sz="1725" dirty="0"/>
-          </a:p>
-          <a:p>
-            <a:pPr algn="l" indent="0" marL="0">
-              <a:lnSpc>
-                <a:spcPts val="2139"/>
-              </a:lnSpc>
-              <a:buNone/>
-            </a:pPr>
-            <a:r>
-              <a:rPr lang="zh-CN" altLang="en-US" sz="1725" dirty="0">
-                <a:solidFill>
-                  <a:srgbClr val="1C2430"/>
-                </a:solidFill>
-                <a:latin typeface="Noto Sans CJK SC" pitchFamily="34" charset="0"/>
-                <a:ea typeface="Noto Sans CJK SC" pitchFamily="34" charset="-122"/>
-                <a:cs typeface="Noto Sans CJK SC" pitchFamily="34" charset="-120"/>
-              </a:rPr>
-              <a:t>再分析机制解释是否相互排斥</a:t>
-            </a:r>
-            <a:endParaRPr lang="zh-CN" sz="1725" dirty="0"/>
-          </a:p>
-        </p:txBody>
-      </p:sp>
-      <p:sp>
-        <p:nvSpPr>
-          <p:cNvPr id="22" name="T35/card/region-3/heading-rule"/>
-          <p:cNvSpPr/>
-          <p:nvPr/>
-        </p:nvSpPr>
-        <p:spPr>
-          <a:xfrm>
-            <a:off x="8077200" y="4495800"/>
-            <a:ext cx="3657600" cy="0"/>
-          </a:xfrm>
-          <a:prstGeom prst="line">
-            <a:avLst/>
-          </a:prstGeom>
-          <a:noFill/>
-          <a:ln w="9525">
-            <a:solidFill>
-              <a:srgbClr val="BEC8D4"/>
-            </a:solidFill>
-            <a:prstDash val="solid"/>
-          </a:ln>
-        </p:spPr>
-      </p:sp>
-      <p:sp>
-        <p:nvSpPr>
-          <p:cNvPr id="23" name="T35/card/region-3/heading-mark"/>
-          <p:cNvSpPr/>
-          <p:nvPr/>
-        </p:nvSpPr>
-        <p:spPr>
-          <a:xfrm>
-            <a:off x="8077200" y="4495800"/>
-            <a:ext cx="342900" cy="0"/>
-          </a:xfrm>
-          <a:prstGeom prst="line">
-            <a:avLst/>
-          </a:prstGeom>
-          <a:noFill/>
-          <a:ln w="17145">
-            <a:solidFill>
-              <a:srgbClr val="173C70"/>
-            </a:solidFill>
-            <a:prstDash val="solid"/>
-          </a:ln>
-        </p:spPr>
-      </p:sp>
-      <p:sp>
-        <p:nvSpPr>
-          <p:cNvPr id="24" name="T35/card/region-3/title"/>
-          <p:cNvSpPr/>
-          <p:nvPr/>
-        </p:nvSpPr>
-        <p:spPr>
-          <a:xfrm>
-            <a:off x="8077200" y="4152900"/>
-            <a:ext cx="3657600" cy="323850"/>
-          </a:xfrm>
-          <a:prstGeom prst="rect">
-            <a:avLst/>
-          </a:prstGeom>
-          <a:noFill/>
-          <a:ln/>
-        </p:spPr>
-        <p:txBody>
-          <a:bodyPr wrap="none" lIns="0" tIns="0" rIns="0" bIns="0" rtlCol="0" anchor="t"/>
-          <a:lstStyle/>
-          <a:p>
-            <a:pPr algn="l" indent="0" marL="0">
-              <a:lnSpc>
-                <a:spcPts val="2156"/>
-              </a:lnSpc>
-              <a:buNone/>
-            </a:pPr>
-            <a:r>
-              <a:rPr lang="zh-CN" altLang="en-US" sz="1875" b="1" dirty="0">
-                <a:solidFill>
-                  <a:srgbClr val="173C70"/>
-                </a:solidFill>
-                <a:latin typeface="Noto Sans CJK SC" pitchFamily="34" charset="0"/>
-                <a:ea typeface="Noto Sans CJK SC" pitchFamily="34" charset="-122"/>
-                <a:cs typeface="Noto Sans CJK SC" pitchFamily="34" charset="-120"/>
-              </a:rPr>
-              <a:t>可区分的解释</a:t>
-            </a:r>
-            <a:endParaRPr lang="zh-CN" sz="1875" dirty="0"/>
-          </a:p>
-        </p:txBody>
-      </p:sp>
-      <p:sp>
-        <p:nvSpPr>
-          <p:cNvPr id="25" name="T35/card/region-3/body"/>
-          <p:cNvSpPr/>
-          <p:nvPr/>
-        </p:nvSpPr>
-        <p:spPr>
-          <a:xfrm>
-            <a:off x="8077200" y="4629150"/>
-            <a:ext cx="3657600" cy="1333500"/>
-          </a:xfrm>
-          <a:prstGeom prst="rect">
-            <a:avLst/>
-          </a:prstGeom>
-          <a:noFill/>
-          <a:ln/>
-        </p:spPr>
-        <p:txBody>
-          <a:bodyPr wrap="none" lIns="0" tIns="0" rIns="0" bIns="0" rtlCol="0" anchor="t"/>
-          <a:lstStyle/>
-          <a:p>
-            <a:pPr algn="l" indent="0" marL="0">
-              <a:lnSpc>
-                <a:spcPts val="2232"/>
-              </a:lnSpc>
-              <a:buNone/>
-            </a:pPr>
-            <a:r>
-              <a:rPr lang="zh-CN" altLang="en-US" sz="1800" dirty="0">
-                <a:solidFill>
-                  <a:srgbClr val="1C2430"/>
-                </a:solidFill>
-                <a:latin typeface="Noto Sans CJK SC" pitchFamily="34" charset="0"/>
-                <a:ea typeface="Noto Sans CJK SC" pitchFamily="34" charset="-122"/>
-                <a:cs typeface="Noto Sans CJK SC" pitchFamily="34" charset="-120"/>
-              </a:rPr>
-              <a:t>列出能够解释分歧的具体条件</a:t>
-            </a:r>
-            <a:endParaRPr lang="zh-CN" sz="1800" dirty="0"/>
-          </a:p>
-          <a:p>
-            <a:pPr algn="l" indent="0" marL="0">
-              <a:lnSpc>
-                <a:spcPts val="2232"/>
-              </a:lnSpc>
-              <a:buNone/>
-            </a:pPr>
-            <a:r>
-              <a:rPr lang="zh-CN" altLang="en-US" sz="1800" dirty="0">
-                <a:solidFill>
-                  <a:srgbClr val="1C2430"/>
-                </a:solidFill>
-                <a:latin typeface="Noto Sans CJK SC" pitchFamily="34" charset="0"/>
-                <a:ea typeface="Noto Sans CJK SC" pitchFamily="34" charset="-122"/>
-                <a:cs typeface="Noto Sans CJK SC" pitchFamily="34" charset="-120"/>
-              </a:rPr>
-              <a:t>设计只改变该条件的公平比较</a:t>
-            </a:r>
-            <a:endParaRPr lang="zh-CN" sz="1800" dirty="0"/>
-          </a:p>
-        </p:txBody>
-      </p:sp>
-      <p:sp>
-        <p:nvSpPr>
-          <p:cNvPr id="26" name="T35/sources"/>
-          <p:cNvSpPr/>
-          <p:nvPr/>
-        </p:nvSpPr>
-        <p:spPr>
-          <a:xfrm>
-            <a:off x="457200" y="6286500"/>
-            <a:ext cx="11277600" cy="228600"/>
-          </a:xfrm>
-          <a:prstGeom prst="rect">
-            <a:avLst/>
-          </a:prstGeom>
-          <a:noFill/>
-          <a:ln/>
-        </p:spPr>
-        <p:txBody>
-          <a:bodyPr wrap="none" lIns="0" tIns="0" rIns="0" bIns="0" rtlCol="0" anchor="t"/>
-          <a:lstStyle/>
-          <a:p>
-            <a:pPr algn="l" indent="0" marL="0">
-              <a:lnSpc>
                 <a:spcPts val="1283"/>
               </a:lnSpc>
               <a:buNone/>
@@ -8047,7 +8224,7 @@
                 <a:ea typeface="Noto Sans CJK SC" pitchFamily="34" charset="-122"/>
                 <a:cs typeface="Noto Sans CJK SC" pitchFamily="34" charset="-120"/>
               </a:rPr>
-              <a:t>T1 · 2026 · 待替换</a:t>
+              <a:t>T1 · 2026 · 书目占位；图表均为合成示例</a:t>
             </a:r>
             <a:endParaRPr lang="zh-CN" sz="1125" dirty="0"/>
           </a:p>
@@ -8156,14 +8333,14 @@
       </p:sp>
       <p:sp>
         <p:nvSpPr>
-          <p:cNvPr id="4" name="T36/kicker"/>
-          <p:cNvSpPr/>
-          <p:nvPr/>
-        </p:nvSpPr>
-        <p:spPr>
-          <a:xfrm>
-            <a:off x="457200" y="152400"/>
-            <a:ext cx="11277600" cy="190500"/>
+          <p:cNvPr id="4" name="T36/title"/>
+          <p:cNvSpPr/>
+          <p:nvPr/>
+        </p:nvSpPr>
+        <p:spPr>
+          <a:xfrm>
+            <a:off x="457200" y="209550"/>
+            <a:ext cx="11277600" cy="438150"/>
           </a:xfrm>
           <a:prstGeom prst="rect">
             <a:avLst/>
@@ -8177,54 +8354,12 @@
           <a:p>
             <a:pPr algn="l" indent="0" marL="0">
               <a:lnSpc>
-                <a:spcPts val="1320"/>
-              </a:lnSpc>
-              <a:buNone/>
-            </a:pPr>
-            <a:r>
-              <a:rPr lang="zh-CN" altLang="en-US" sz="1200" dirty="0">
-                <a:solidFill>
-                  <a:srgbClr val="515B68"/>
-                </a:solidFill>
-                <a:latin typeface="Noto Sans CJK SC" pitchFamily="34" charset="0"/>
-                <a:ea typeface="Noto Sans CJK SC" pitchFamily="34" charset="-122"/>
-                <a:cs typeface="Noto Sans CJK SC" pitchFamily="34" charset="-120"/>
-              </a:rPr>
-              <a:t>结构模板 / 占位说明与合成数据</a:t>
-            </a:r>
-            <a:endParaRPr lang="zh-CN" sz="1200" dirty="0"/>
-          </a:p>
-        </p:txBody>
-      </p:sp>
-      <p:sp>
-        <p:nvSpPr>
-          <p:cNvPr id="5" name="T36/title"/>
-          <p:cNvSpPr/>
-          <p:nvPr/>
-        </p:nvSpPr>
-        <p:spPr>
-          <a:xfrm>
-            <a:off x="457200" y="381000"/>
-            <a:ext cx="11277600" cy="400050"/>
-          </a:xfrm>
-          <a:prstGeom prst="rect">
-            <a:avLst/>
-          </a:prstGeom>
-          <a:noFill/>
-          <a:ln/>
-        </p:spPr>
-        <p:txBody>
-          <a:bodyPr wrap="none" lIns="0" tIns="0" rIns="0" bIns="0" rtlCol="0" anchor="t"/>
-          <a:lstStyle/>
-          <a:p>
-            <a:pPr algn="l" indent="0" marL="0">
-              <a:lnSpc>
-                <a:spcPts val="2856"/>
-              </a:lnSpc>
-              <a:buNone/>
-            </a:pPr>
-            <a:r>
-              <a:rPr lang="zh-CN" altLang="en-US" sz="2550" b="1" dirty="0">
+                <a:spcPts val="3360"/>
+              </a:lnSpc>
+              <a:buNone/>
+            </a:pPr>
+            <a:r>
+              <a:rPr lang="zh-CN" altLang="en-US" sz="3000" b="1" dirty="0">
                 <a:solidFill>
                   <a:srgbClr val="1C2430"/>
                 </a:solidFill>
@@ -8234,26 +8369,49 @@
               </a:rPr>
               <a:t>证据缺口与研究问题</a:t>
             </a:r>
-            <a:endParaRPr lang="zh-CN" sz="2550" dirty="0"/>
-          </a:p>
-        </p:txBody>
-      </p:sp>
-      <p:sp>
-        <p:nvSpPr>
-          <p:cNvPr id="6" name="T36/header-rule"/>
-          <p:cNvSpPr/>
-          <p:nvPr/>
-        </p:nvSpPr>
-        <p:spPr>
-          <a:xfrm>
-            <a:off x="457200" y="876300"/>
+            <a:endParaRPr lang="zh-CN" sz="3000" dirty="0"/>
+          </a:p>
+        </p:txBody>
+      </p:sp>
+      <p:sp>
+        <p:nvSpPr>
+          <p:cNvPr id="5" name="T36/header-rule"/>
+          <p:cNvSpPr/>
+          <p:nvPr/>
+        </p:nvSpPr>
+        <p:spPr>
+          <a:xfrm>
+            <a:off x="457200" y="752475"/>
             <a:ext cx="11277600" cy="0"/>
           </a:xfrm>
           <a:prstGeom prst="line">
             <a:avLst/>
           </a:prstGeom>
           <a:noFill/>
-          <a:ln w="11430">
+          <a:ln w="10478">
+            <a:solidFill>
+              <a:srgbClr val="BEC8D4"/>
+            </a:solidFill>
+            <a:prstDash val="solid"/>
+          </a:ln>
+        </p:spPr>
+      </p:sp>
+      <p:sp>
+        <p:nvSpPr>
+          <p:cNvPr id="6" name="T36/header-accent"/>
+          <p:cNvSpPr/>
+          <p:nvPr/>
+        </p:nvSpPr>
+        <p:spPr>
+          <a:xfrm>
+            <a:off x="457200" y="752475"/>
+            <a:ext cx="704850" cy="0"/>
+          </a:xfrm>
+          <a:prstGeom prst="line">
+            <a:avLst/>
+          </a:prstGeom>
+          <a:noFill/>
+          <a:ln w="28575">
             <a:solidFill>
               <a:srgbClr val="173C70"/>
             </a:solidFill>
@@ -8269,8 +8427,8 @@
         </p:nvSpPr>
         <p:spPr>
           <a:xfrm>
-            <a:off x="457200" y="1409700"/>
-            <a:ext cx="5124450" cy="1676400"/>
+            <a:off x="457200" y="1226534"/>
+            <a:ext cx="5124450" cy="1740884"/>
           </a:xfrm>
           <a:prstGeom prst="rect">
             <a:avLst/>
@@ -8294,14 +8452,14 @@
         </p:nvSpPr>
         <p:spPr>
           <a:xfrm>
-            <a:off x="466725" y="1419225"/>
+            <a:off x="466725" y="1236059"/>
             <a:ext cx="5105400" cy="371475"/>
           </a:xfrm>
           <a:prstGeom prst="rect">
             <a:avLst/>
           </a:prstGeom>
           <a:solidFill>
-            <a:srgbClr val="EEF3F8"/>
+            <a:srgbClr val="E9F4F0"/>
           </a:solidFill>
           <a:ln w="12700">
             <a:solidFill>
@@ -8321,7 +8479,7 @@
         </p:nvSpPr>
         <p:spPr>
           <a:xfrm>
-            <a:off x="457200" y="1790700"/>
+            <a:off x="457200" y="1607534"/>
             <a:ext cx="5124450" cy="0"/>
           </a:xfrm>
           <a:prstGeom prst="line">
@@ -8344,8 +8502,8 @@
         </p:nvSpPr>
         <p:spPr>
           <a:xfrm>
-            <a:off x="581025" y="1466850"/>
-            <a:ext cx="4876800" cy="276225"/>
+            <a:off x="581025" y="1274159"/>
+            <a:ext cx="4876800" cy="295275"/>
           </a:xfrm>
           <a:prstGeom prst="rect">
             <a:avLst/>
@@ -8359,14 +8517,14 @@
           <a:p>
             <a:pPr algn="l" indent="0" marL="0">
               <a:lnSpc>
-                <a:spcPts val="2070"/>
-              </a:lnSpc>
-              <a:buNone/>
-            </a:pPr>
-            <a:r>
-              <a:rPr lang="zh-CN" altLang="en-US" sz="1800" b="1" dirty="0">
-                <a:solidFill>
-                  <a:srgbClr val="173C70"/>
+                <a:spcPts val="2242"/>
+              </a:lnSpc>
+              <a:buNone/>
+            </a:pPr>
+            <a:r>
+              <a:rPr lang="zh-CN" altLang="en-US" sz="1950" b="1" dirty="0">
+                <a:solidFill>
+                  <a:srgbClr val="146C63"/>
                 </a:solidFill>
                 <a:latin typeface="Noto Sans CJK SC" pitchFamily="34" charset="0"/>
                 <a:ea typeface="Noto Sans CJK SC" pitchFamily="34" charset="-122"/>
@@ -8374,7 +8532,7 @@
               </a:rPr>
               <a:t>已知证据一</a:t>
             </a:r>
-            <a:endParaRPr lang="zh-CN" sz="1800" dirty="0"/>
+            <a:endParaRPr lang="zh-CN" sz="1950" dirty="0"/>
           </a:p>
         </p:txBody>
       </p:sp>
@@ -8386,8 +8544,8 @@
         </p:nvSpPr>
         <p:spPr>
           <a:xfrm>
-            <a:off x="590550" y="1905000"/>
-            <a:ext cx="4857750" cy="1085850"/>
+            <a:off x="590550" y="1712309"/>
+            <a:ext cx="4857750" cy="1159859"/>
           </a:xfrm>
           <a:prstGeom prst="rect">
             <a:avLst/>
@@ -8401,12 +8559,12 @@
           <a:p>
             <a:pPr algn="l" indent="0" marL="0">
               <a:lnSpc>
-                <a:spcPts val="2139"/>
-              </a:lnSpc>
-              <a:buNone/>
-            </a:pPr>
-            <a:r>
-              <a:rPr lang="zh-CN" altLang="en-US" sz="1725" dirty="0">
+                <a:spcPts val="2232"/>
+              </a:lnSpc>
+              <a:buNone/>
+            </a:pPr>
+            <a:r>
+              <a:rPr lang="zh-CN" altLang="en-US" sz="1800" dirty="0">
                 <a:solidFill>
                   <a:srgbClr val="1C2430"/>
                 </a:solidFill>
@@ -8416,17 +8574,17 @@
               </a:rPr>
               <a:t>汇总现有研究一致支持的发现</a:t>
             </a:r>
-            <a:endParaRPr lang="zh-CN" sz="1725" dirty="0"/>
+            <a:endParaRPr lang="zh-CN" sz="1800" dirty="0"/>
           </a:p>
           <a:p>
             <a:pPr algn="l" indent="0" marL="0">
               <a:lnSpc>
-                <a:spcPts val="2139"/>
-              </a:lnSpc>
-              <a:buNone/>
-            </a:pPr>
-            <a:r>
-              <a:rPr lang="zh-CN" altLang="en-US" sz="1725" dirty="0">
+                <a:spcPts val="2232"/>
+              </a:lnSpc>
+              <a:buNone/>
+            </a:pPr>
+            <a:r>
+              <a:rPr lang="zh-CN" altLang="en-US" sz="1800" dirty="0">
                 <a:solidFill>
                   <a:srgbClr val="1C2430"/>
                 </a:solidFill>
@@ -8436,7 +8594,7 @@
               </a:rPr>
               <a:t>保留场景与测量条件</a:t>
             </a:r>
-            <a:endParaRPr lang="zh-CN" sz="1725" dirty="0"/>
+            <a:endParaRPr lang="zh-CN" sz="1800" dirty="0"/>
           </a:p>
         </p:txBody>
       </p:sp>
@@ -8448,7 +8606,7 @@
         </p:nvSpPr>
         <p:spPr>
           <a:xfrm>
-            <a:off x="5924550" y="1428750"/>
+            <a:off x="5924550" y="1245584"/>
             <a:ext cx="5810250" cy="323850"/>
           </a:xfrm>
           <a:prstGeom prst="rect">
@@ -8463,14 +8621,14 @@
           <a:p>
             <a:pPr algn="l" indent="0" marL="0">
               <a:lnSpc>
-                <a:spcPts val="2156"/>
-              </a:lnSpc>
-              <a:buNone/>
-            </a:pPr>
-            <a:r>
-              <a:rPr lang="zh-CN" altLang="en-US" sz="1875" b="1" dirty="0">
-                <a:solidFill>
-                  <a:srgbClr val="355D88"/>
+                <a:spcPts val="2242"/>
+              </a:lnSpc>
+              <a:buNone/>
+            </a:pPr>
+            <a:r>
+              <a:rPr lang="zh-CN" altLang="en-US" sz="1950" b="1" dirty="0">
+                <a:solidFill>
+                  <a:srgbClr val="6C528E"/>
                 </a:solidFill>
                 <a:latin typeface="Noto Sans CJK SC" pitchFamily="34" charset="0"/>
                 <a:ea typeface="Noto Sans CJK SC" pitchFamily="34" charset="-122"/>
@@ -8478,7 +8636,7 @@
               </a:rPr>
               <a:t>对应研究问题一</a:t>
             </a:r>
-            <a:endParaRPr lang="zh-CN" sz="1875" dirty="0"/>
+            <a:endParaRPr lang="zh-CN" sz="1950" dirty="0"/>
           </a:p>
         </p:txBody>
       </p:sp>
@@ -8490,8 +8648,8 @@
         </p:nvSpPr>
         <p:spPr>
           <a:xfrm>
-            <a:off x="5924550" y="1876425"/>
-            <a:ext cx="5810250" cy="1171575"/>
+            <a:off x="5924550" y="1693259"/>
+            <a:ext cx="5810250" cy="1236059"/>
           </a:xfrm>
           <a:prstGeom prst="rect">
             <a:avLst/>
@@ -8552,8 +8710,8 @@
         </p:nvSpPr>
         <p:spPr>
           <a:xfrm>
-            <a:off x="457200" y="3371850"/>
-            <a:ext cx="5124450" cy="1676400"/>
+            <a:off x="457200" y="3264122"/>
+            <a:ext cx="5124450" cy="1740884"/>
           </a:xfrm>
           <a:prstGeom prst="rect">
             <a:avLst/>
@@ -8577,14 +8735,14 @@
         </p:nvSpPr>
         <p:spPr>
           <a:xfrm>
-            <a:off x="466725" y="3381375"/>
+            <a:off x="466725" y="3273647"/>
             <a:ext cx="5105400" cy="371475"/>
           </a:xfrm>
           <a:prstGeom prst="rect">
             <a:avLst/>
           </a:prstGeom>
           <a:solidFill>
-            <a:srgbClr val="EEF3F8"/>
+            <a:srgbClr val="E9F4F0"/>
           </a:solidFill>
           <a:ln w="12700">
             <a:solidFill>
@@ -8604,7 +8762,7 @@
         </p:nvSpPr>
         <p:spPr>
           <a:xfrm>
-            <a:off x="457200" y="3752850"/>
+            <a:off x="457200" y="3645122"/>
             <a:ext cx="5124450" cy="0"/>
           </a:xfrm>
           <a:prstGeom prst="line">
@@ -8627,8 +8785,8 @@
         </p:nvSpPr>
         <p:spPr>
           <a:xfrm>
-            <a:off x="581025" y="3429000"/>
-            <a:ext cx="4876800" cy="276225"/>
+            <a:off x="581025" y="3311747"/>
+            <a:ext cx="4876800" cy="295275"/>
           </a:xfrm>
           <a:prstGeom prst="rect">
             <a:avLst/>
@@ -8642,14 +8800,14 @@
           <a:p>
             <a:pPr algn="l" indent="0" marL="0">
               <a:lnSpc>
-                <a:spcPts val="2070"/>
-              </a:lnSpc>
-              <a:buNone/>
-            </a:pPr>
-            <a:r>
-              <a:rPr lang="zh-CN" altLang="en-US" sz="1800" b="1" dirty="0">
-                <a:solidFill>
-                  <a:srgbClr val="173C70"/>
+                <a:spcPts val="2242"/>
+              </a:lnSpc>
+              <a:buNone/>
+            </a:pPr>
+            <a:r>
+              <a:rPr lang="zh-CN" altLang="en-US" sz="1950" b="1" dirty="0">
+                <a:solidFill>
+                  <a:srgbClr val="146C63"/>
                 </a:solidFill>
                 <a:latin typeface="Noto Sans CJK SC" pitchFamily="34" charset="0"/>
                 <a:ea typeface="Noto Sans CJK SC" pitchFamily="34" charset="-122"/>
@@ -8657,7 +8815,7 @@
               </a:rPr>
               <a:t>已知证据二</a:t>
             </a:r>
-            <a:endParaRPr lang="zh-CN" sz="1800" dirty="0"/>
+            <a:endParaRPr lang="zh-CN" sz="1950" dirty="0"/>
           </a:p>
         </p:txBody>
       </p:sp>
@@ -8669,8 +8827,8 @@
         </p:nvSpPr>
         <p:spPr>
           <a:xfrm>
-            <a:off x="590550" y="3867150"/>
-            <a:ext cx="4857750" cy="1085850"/>
+            <a:off x="590550" y="3749897"/>
+            <a:ext cx="4857750" cy="1159859"/>
           </a:xfrm>
           <a:prstGeom prst="rect">
             <a:avLst/>
@@ -8684,12 +8842,12 @@
           <a:p>
             <a:pPr algn="l" indent="0" marL="0">
               <a:lnSpc>
-                <a:spcPts val="2139"/>
-              </a:lnSpc>
-              <a:buNone/>
-            </a:pPr>
-            <a:r>
-              <a:rPr lang="zh-CN" altLang="en-US" sz="1725" dirty="0">
+                <a:spcPts val="2232"/>
+              </a:lnSpc>
+              <a:buNone/>
+            </a:pPr>
+            <a:r>
+              <a:rPr lang="zh-CN" altLang="en-US" sz="1800" dirty="0">
                 <a:solidFill>
                   <a:srgbClr val="1C2430"/>
                 </a:solidFill>
@@ -8699,17 +8857,17 @@
               </a:rPr>
               <a:t>记录已有失败与反例</a:t>
             </a:r>
-            <a:endParaRPr lang="zh-CN" sz="1725" dirty="0"/>
+            <a:endParaRPr lang="zh-CN" sz="1800" dirty="0"/>
           </a:p>
           <a:p>
             <a:pPr algn="l" indent="0" marL="0">
               <a:lnSpc>
-                <a:spcPts val="2139"/>
-              </a:lnSpc>
-              <a:buNone/>
-            </a:pPr>
-            <a:r>
-              <a:rPr lang="zh-CN" altLang="en-US" sz="1725" dirty="0">
+                <a:spcPts val="2232"/>
+              </a:lnSpc>
+              <a:buNone/>
+            </a:pPr>
+            <a:r>
+              <a:rPr lang="zh-CN" altLang="en-US" sz="1800" dirty="0">
                 <a:solidFill>
                   <a:srgbClr val="1C2430"/>
                 </a:solidFill>
@@ -8719,7 +8877,7 @@
               </a:rPr>
               <a:t>说明信息是否足以解释</a:t>
             </a:r>
-            <a:endParaRPr lang="zh-CN" sz="1725" dirty="0"/>
+            <a:endParaRPr lang="zh-CN" sz="1800" dirty="0"/>
           </a:p>
         </p:txBody>
       </p:sp>
@@ -8731,7 +8889,7 @@
         </p:nvSpPr>
         <p:spPr>
           <a:xfrm>
-            <a:off x="5924550" y="3390900"/>
+            <a:off x="5924550" y="3283172"/>
             <a:ext cx="5810250" cy="323850"/>
           </a:xfrm>
           <a:prstGeom prst="rect">
@@ -8746,14 +8904,14 @@
           <a:p>
             <a:pPr algn="l" indent="0" marL="0">
               <a:lnSpc>
-                <a:spcPts val="2156"/>
-              </a:lnSpc>
-              <a:buNone/>
-            </a:pPr>
-            <a:r>
-              <a:rPr lang="zh-CN" altLang="en-US" sz="1875" b="1" dirty="0">
-                <a:solidFill>
-                  <a:srgbClr val="355D88"/>
+                <a:spcPts val="2242"/>
+              </a:lnSpc>
+              <a:buNone/>
+            </a:pPr>
+            <a:r>
+              <a:rPr lang="zh-CN" altLang="en-US" sz="1950" b="1" dirty="0">
+                <a:solidFill>
+                  <a:srgbClr val="6C528E"/>
                 </a:solidFill>
                 <a:latin typeface="Noto Sans CJK SC" pitchFamily="34" charset="0"/>
                 <a:ea typeface="Noto Sans CJK SC" pitchFamily="34" charset="-122"/>
@@ -8761,7 +8919,7 @@
               </a:rPr>
               <a:t>对应研究问题二</a:t>
             </a:r>
-            <a:endParaRPr lang="zh-CN" sz="1875" dirty="0"/>
+            <a:endParaRPr lang="zh-CN" sz="1950" dirty="0"/>
           </a:p>
         </p:txBody>
       </p:sp>
@@ -8773,8 +8931,8 @@
         </p:nvSpPr>
         <p:spPr>
           <a:xfrm>
-            <a:off x="5924550" y="3838575"/>
-            <a:ext cx="5810250" cy="1171575"/>
+            <a:off x="5924550" y="3730847"/>
+            <a:ext cx="5810250" cy="1236059"/>
           </a:xfrm>
           <a:prstGeom prst="rect">
             <a:avLst/>
@@ -8835,7 +8993,7 @@
         </p:nvSpPr>
         <p:spPr>
           <a:xfrm>
-            <a:off x="457200" y="5353050"/>
+            <a:off x="457200" y="5241703"/>
             <a:ext cx="11277600" cy="323850"/>
           </a:xfrm>
           <a:prstGeom prst="rect">
@@ -8850,14 +9008,14 @@
           <a:p>
             <a:pPr algn="l" indent="0" marL="0">
               <a:lnSpc>
-                <a:spcPts val="2156"/>
-              </a:lnSpc>
-              <a:buNone/>
-            </a:pPr>
-            <a:r>
-              <a:rPr lang="zh-CN" altLang="en-US" sz="1875" b="1" dirty="0">
-                <a:solidFill>
-                  <a:srgbClr val="173C70"/>
+                <a:spcPts val="2242"/>
+              </a:lnSpc>
+              <a:buNone/>
+            </a:pPr>
+            <a:r>
+              <a:rPr lang="zh-CN" altLang="en-US" sz="1950" b="1" dirty="0">
+                <a:solidFill>
+                  <a:srgbClr val="6C528E"/>
                 </a:solidFill>
                 <a:latin typeface="Noto Sans CJK SC" pitchFamily="34" charset="0"/>
                 <a:ea typeface="Noto Sans CJK SC" pitchFamily="34" charset="-122"/>
@@ -8865,7 +9023,7 @@
               </a:rPr>
               <a:t>下一步检验条件</a:t>
             </a:r>
-            <a:endParaRPr lang="zh-CN" sz="1875" dirty="0"/>
+            <a:endParaRPr lang="zh-CN" sz="1950" dirty="0"/>
           </a:p>
         </p:txBody>
       </p:sp>
@@ -8877,8 +9035,8 @@
         </p:nvSpPr>
         <p:spPr>
           <a:xfrm>
-            <a:off x="457200" y="5734050"/>
-            <a:ext cx="11277600" cy="285750"/>
+            <a:off x="457200" y="5622703"/>
+            <a:ext cx="11277600" cy="476250"/>
           </a:xfrm>
           <a:prstGeom prst="rect">
             <a:avLst/>
@@ -8892,12 +9050,12 @@
           <a:p>
             <a:pPr algn="l" indent="0" marL="0">
               <a:lnSpc>
-                <a:spcPts val="2139"/>
-              </a:lnSpc>
-              <a:buNone/>
-            </a:pPr>
-            <a:r>
-              <a:rPr lang="zh-CN" altLang="en-US" sz="1725" dirty="0">
+                <a:spcPts val="2232"/>
+              </a:lnSpc>
+              <a:buNone/>
+            </a:pPr>
+            <a:r>
+              <a:rPr lang="zh-CN" altLang="en-US" sz="1800" dirty="0">
                 <a:solidFill>
                   <a:srgbClr val="1C2430"/>
                 </a:solidFill>
@@ -8907,7 +9065,7 @@
               </a:rPr>
               <a:t>优先检验影响核心结论且能获得证据的问题</a:t>
             </a:r>
-            <a:endParaRPr lang="zh-CN" sz="1725" dirty="0"/>
+            <a:endParaRPr lang="zh-CN" sz="1800" dirty="0"/>
           </a:p>
         </p:txBody>
       </p:sp>
@@ -8947,7 +9105,7 @@
                 <a:ea typeface="Noto Sans CJK SC" pitchFamily="34" charset="-122"/>
                 <a:cs typeface="Noto Sans CJK SC" pitchFamily="34" charset="-120"/>
               </a:rPr>
-              <a:t>T1 · 2026 · 待替换</a:t>
+              <a:t>T1 · 2026 · 书目占位；图表均为合成示例</a:t>
             </a:r>
             <a:endParaRPr lang="zh-CN" sz="1125" dirty="0"/>
           </a:p>
